--- a/GULib-master/report/paper/stage_report_2026-02-27.pptx
+++ b/GULib-master/report/paper/stage_report_2026-02-27.pptx
@@ -4,24 +4,25 @@
   <p:sldMasterIdLst>
     <p:sldMasterId id="2147483648" r:id="rId1"/>
   </p:sldMasterIdLst>
+  <p:notesMasterIdLst>
+    <p:notesMasterId r:id="rId15"/>
+  </p:notesMasterIdLst>
   <p:sldIdLst>
     <p:sldId id="256" r:id="rId2"/>
     <p:sldId id="257" r:id="rId3"/>
     <p:sldId id="258" r:id="rId4"/>
     <p:sldId id="259" r:id="rId5"/>
-    <p:sldId id="260" r:id="rId6"/>
-    <p:sldId id="261" r:id="rId7"/>
-    <p:sldId id="262" r:id="rId8"/>
-    <p:sldId id="263" r:id="rId9"/>
-    <p:sldId id="264" r:id="rId10"/>
-    <p:sldId id="265" r:id="rId11"/>
+    <p:sldId id="268" r:id="rId6"/>
+    <p:sldId id="260" r:id="rId7"/>
+    <p:sldId id="261" r:id="rId8"/>
+    <p:sldId id="262" r:id="rId9"/>
+    <p:sldId id="263" r:id="rId10"/>
+    <p:sldId id="264" r:id="rId11"/>
     <p:sldId id="266" r:id="rId12"/>
     <p:sldId id="267" r:id="rId13"/>
+    <p:sldId id="265" r:id="rId14"/>
   </p:sldIdLst>
-  <p:notesMasterIdLst>
-    <p:notesMasterId r:id="rId14"/>
-  </p:notesMasterIdLst>
-  <p:sldSz cx="9144000" cy="5143500"/>
+  <p:sldSz cx="9144000" cy="5143500" type="screen16x9"/>
   <p:notesSz cx="5143500" cy="9144000"/>
   <p:defaultTextStyle>
     <a:lvl1pPr marL="0" algn="l" defTabSz="914400" rtl="0" eaLnBrk="1" latinLnBrk="0" hangingPunct="1">
@@ -115,6 +116,11 @@
       </a:defRPr>
     </a:lvl9pPr>
   </p:defaultTextStyle>
+  <p:extLst>
+    <p:ext uri="{EFAFB233-063F-42B5-8137-9DF3F51BA10A}">
+      <p15:sldGuideLst xmlns:p15="http://schemas.microsoft.com/office/powerpoint/2012/main"/>
+    </p:ext>
+  </p:extLst>
 </p:presentation>
 </file>
 
@@ -140,234 +146,10 @@
           <a:chExt cx="0" cy="0"/>
         </a:xfrm>
       </p:grpSpPr>
-      <p:sp>
-        <p:nvSpPr>
-          <p:cNvPr id="2" name="Header Placeholder 1"/>
-          <p:cNvSpPr>
-            <a:spLocks noGrp="1"/>
-          </p:cNvSpPr>
-          <p:nvPr>
-            <p:ph type="hdr" sz="quarter"/>
-          </p:nvPr>
-        </p:nvSpPr>
-        <p:spPr>
-          <a:xfrm>
-            <a:off x="0" y="0"/>
-            <a:ext cx="2971800" cy="458788"/>
-          </a:xfrm>
-          <a:prstGeom prst="rect">
-            <a:avLst/>
-          </a:prstGeom>
-        </p:spPr>
-        <p:txBody>
-          <a:bodyPr vert="horz" lIns="91440" tIns="45720" rIns="91440" bIns="45720" rtlCol="0"/>
-          <a:lstStyle>
-            <a:lvl1pPr algn="l">
-              <a:defRPr sz="1200"/>
-            </a:lvl1pPr>
-          </a:lstStyle>
-          <a:p>
-            <a:endParaRPr lang="en-US"/>
-          </a:p>
-        </p:txBody>
-      </p:sp>
-      <p:sp>
-        <p:nvSpPr>
-          <p:cNvPr id="3" name="Date Placeholder 2"/>
-          <p:cNvSpPr>
-            <a:spLocks noGrp="1"/>
-          </p:cNvSpPr>
-          <p:nvPr>
-            <p:ph type="dt" idx="1"/>
-          </p:nvPr>
-        </p:nvSpPr>
-        <p:spPr>
-          <a:xfrm>
-            <a:off x="3884613" y="0"/>
-            <a:ext cx="2971800" cy="458788"/>
-          </a:xfrm>
-          <a:prstGeom prst="rect">
-            <a:avLst/>
-          </a:prstGeom>
-        </p:spPr>
-        <p:txBody>
-          <a:bodyPr vert="horz" lIns="91440" tIns="45720" rIns="91440" bIns="45720" rtlCol="0"/>
-          <a:lstStyle>
-            <a:lvl1pPr algn="r">
-              <a:defRPr sz="1200"/>
-            </a:lvl1pPr>
-          </a:lstStyle>
-          <a:p>
-            <a:fld id="{5282F153-3F37-0F45-9E97-73ACFA13230C}" type="datetimeFigureOut">
-              <a:rPr lang="en-US"/>
-              <a:t>7/23/19</a:t>
-            </a:fld>
-            <a:endParaRPr lang="en-US"/>
-          </a:p>
-        </p:txBody>
-      </p:sp>
-      <p:sp>
-        <p:nvSpPr>
-          <p:cNvPr id="4" name="Slide Image Placeholder 3"/>
-          <p:cNvSpPr>
-            <a:spLocks noGrp="1" noRot="1" noChangeAspect="1"/>
-          </p:cNvSpPr>
-          <p:nvPr>
-            <p:ph type="sldImg" idx="2"/>
-          </p:nvPr>
-        </p:nvSpPr>
-        <p:spPr>
-          <a:xfrm>
-            <a:off x="685800" y="1143000"/>
-            <a:ext cx="5486400" cy="3086100"/>
-          </a:xfrm>
-          <a:prstGeom prst="rect">
-            <a:avLst/>
-          </a:prstGeom>
-          <a:noFill/>
-          <a:ln w="12700">
-            <a:solidFill>
-              <a:prstClr val="black"/>
-            </a:solidFill>
-          </a:ln>
-        </p:spPr>
-        <p:txBody>
-          <a:bodyPr vert="horz" lIns="91440" tIns="45720" rIns="91440" bIns="45720" rtlCol="0" anchor="ctr"/>
-          <a:lstStyle/>
-          <a:p>
-            <a:endParaRPr lang="en-US"/>
-          </a:p>
-        </p:txBody>
-      </p:sp>
-      <p:sp>
-        <p:nvSpPr>
-          <p:cNvPr id="5" name="Notes Placeholder 4"/>
-          <p:cNvSpPr>
-            <a:spLocks noGrp="1"/>
-          </p:cNvSpPr>
-          <p:nvPr>
-            <p:ph type="body" sz="quarter" idx="3"/>
-          </p:nvPr>
-        </p:nvSpPr>
-        <p:spPr>
-          <a:xfrm>
-            <a:off x="685800" y="4400550"/>
-            <a:ext cx="5486400" cy="3600450"/>
-          </a:xfrm>
-          <a:prstGeom prst="rect">
-            <a:avLst/>
-          </a:prstGeom>
-        </p:spPr>
-        <p:txBody>
-          <a:bodyPr vert="horz" lIns="91440" tIns="45720" rIns="91440" bIns="45720" rtlCol="0"/>
-          <a:lstStyle/>
-          <a:p>
-            <a:pPr lvl="0"/>
-            <a:r>
-              <a:rPr lang="en-US"/>
-              <a:t>Click to edit Master text styles</a:t>
-            </a:r>
-          </a:p>
-          <a:p>
-            <a:pPr lvl="1"/>
-            <a:r>
-              <a:rPr lang="en-US"/>
-              <a:t>Second level</a:t>
-            </a:r>
-          </a:p>
-          <a:p>
-            <a:pPr lvl="2"/>
-            <a:r>
-              <a:rPr lang="en-US"/>
-              <a:t>Third level</a:t>
-            </a:r>
-          </a:p>
-          <a:p>
-            <a:pPr lvl="3"/>
-            <a:r>
-              <a:rPr lang="en-US"/>
-              <a:t>Fourth level</a:t>
-            </a:r>
-          </a:p>
-          <a:p>
-            <a:pPr lvl="4"/>
-            <a:r>
-              <a:rPr lang="en-US"/>
-              <a:t>Fifth level</a:t>
-            </a:r>
-          </a:p>
-        </p:txBody>
-      </p:sp>
-      <p:sp>
-        <p:nvSpPr>
-          <p:cNvPr id="6" name="Footer Placeholder 5"/>
-          <p:cNvSpPr>
-            <a:spLocks noGrp="1"/>
-          </p:cNvSpPr>
-          <p:nvPr>
-            <p:ph type="ftr" sz="quarter" idx="4"/>
-          </p:nvPr>
-        </p:nvSpPr>
-        <p:spPr>
-          <a:xfrm>
-            <a:off x="0" y="8685213"/>
-            <a:ext cx="2971800" cy="458787"/>
-          </a:xfrm>
-          <a:prstGeom prst="rect">
-            <a:avLst/>
-          </a:prstGeom>
-        </p:spPr>
-        <p:txBody>
-          <a:bodyPr vert="horz" lIns="91440" tIns="45720" rIns="91440" bIns="45720" rtlCol="0" anchor="b"/>
-          <a:lstStyle>
-            <a:lvl1pPr algn="l">
-              <a:defRPr sz="1200"/>
-            </a:lvl1pPr>
-          </a:lstStyle>
-          <a:p>
-            <a:endParaRPr lang="en-US"/>
-          </a:p>
-        </p:txBody>
-      </p:sp>
-      <p:sp>
-        <p:nvSpPr>
-          <p:cNvPr id="7" name="Slide Number Placeholder 6"/>
-          <p:cNvSpPr>
-            <a:spLocks noGrp="1"/>
-          </p:cNvSpPr>
-          <p:nvPr>
-            <p:ph type="sldNum" sz="quarter" idx="5"/>
-          </p:nvPr>
-        </p:nvSpPr>
-        <p:spPr>
-          <a:xfrm>
-            <a:off x="3884613" y="8685213"/>
-            <a:ext cx="2971800" cy="458787"/>
-          </a:xfrm>
-          <a:prstGeom prst="rect">
-            <a:avLst/>
-          </a:prstGeom>
-        </p:spPr>
-        <p:txBody>
-          <a:bodyPr vert="horz" lIns="91440" tIns="45720" rIns="91440" bIns="45720" rtlCol="0" anchor="b"/>
-          <a:lstStyle>
-            <a:lvl1pPr algn="r">
-              <a:defRPr sz="1200"/>
-            </a:lvl1pPr>
-          </a:lstStyle>
-          <a:p>
-            <a:fld id="{CE5E9CC1-C706-0F49-92D6-E571CC5EEA8F}" type="slidenum">
-              <a:rPr lang="en-US"/>
-              <a:t>‹#›</a:t>
-            </a:fld>
-            <a:endParaRPr lang="en-US"/>
-          </a:p>
-        </p:txBody>
-      </p:sp>
     </p:spTree>
     <p:extLst>
       <p:ext uri="{BB962C8B-B14F-4D97-AF65-F5344CB8AC3E}">
-        <p14:creationId xmlns:p14="http://schemas.microsoft.com/office/powerpoint/2010/main" val="1024086991"/>
+        <p14:creationId xmlns:p14="http://schemas.microsoft.com/office/powerpoint/2010/main" val="2245316375"/>
       </p:ext>
     </p:extLst>
   </p:cSld>
@@ -511,10 +293,6 @@
           <a:bodyPr/>
           <a:lstStyle/>
           <a:p>
-            <a:r>
-              <a:rPr lang="en-US" dirty="0"/>
-              <a:t/>
-            </a:r>
             <a:endParaRPr lang="en-US" dirty="0"/>
           </a:p>
         </p:txBody>
@@ -599,10 +377,6 @@
           <a:bodyPr/>
           <a:lstStyle/>
           <a:p>
-            <a:r>
-              <a:rPr lang="en-US" dirty="0"/>
-              <a:t/>
-            </a:r>
             <a:endParaRPr lang="en-US" dirty="0"/>
           </a:p>
         </p:txBody>
@@ -624,7 +398,7 @@
           <a:p>
             <a:fld id="{F7021451-1387-4CA6-816F-3879F97B5CBC}" type="slidenum">
               <a:rPr lang="en-US"/>
-              <a:t>10</a:t>
+              <a:t>11</a:t>
             </a:fld>
             <a:endParaRPr lang="en-US"/>
           </a:p>
@@ -687,10 +461,6 @@
           <a:bodyPr/>
           <a:lstStyle/>
           <a:p>
-            <a:r>
-              <a:rPr lang="en-US" dirty="0"/>
-              <a:t/>
-            </a:r>
             <a:endParaRPr lang="en-US" dirty="0"/>
           </a:p>
         </p:txBody>
@@ -712,7 +482,7 @@
           <a:p>
             <a:fld id="{F7021451-1387-4CA6-816F-3879F97B5CBC}" type="slidenum">
               <a:rPr lang="en-US"/>
-              <a:t>11</a:t>
+              <a:t>12</a:t>
             </a:fld>
             <a:endParaRPr lang="en-US"/>
           </a:p>
@@ -775,10 +545,6 @@
           <a:bodyPr/>
           <a:lstStyle/>
           <a:p>
-            <a:r>
-              <a:rPr lang="en-US" dirty="0"/>
-              <a:t/>
-            </a:r>
             <a:endParaRPr lang="en-US" dirty="0"/>
           </a:p>
         </p:txBody>
@@ -800,7 +566,7 @@
           <a:p>
             <a:fld id="{F7021451-1387-4CA6-816F-3879F97B5CBC}" type="slidenum">
               <a:rPr lang="en-US"/>
-              <a:t>12</a:t>
+              <a:t>13</a:t>
             </a:fld>
             <a:endParaRPr lang="en-US"/>
           </a:p>
@@ -863,10 +629,6 @@
           <a:bodyPr/>
           <a:lstStyle/>
           <a:p>
-            <a:r>
-              <a:rPr lang="en-US" dirty="0"/>
-              <a:t/>
-            </a:r>
             <a:endParaRPr lang="en-US" dirty="0"/>
           </a:p>
         </p:txBody>
@@ -951,10 +713,6 @@
           <a:bodyPr/>
           <a:lstStyle/>
           <a:p>
-            <a:r>
-              <a:rPr lang="en-US" dirty="0"/>
-              <a:t/>
-            </a:r>
             <a:endParaRPr lang="en-US" dirty="0"/>
           </a:p>
         </p:txBody>
@@ -1039,10 +797,6 @@
           <a:bodyPr/>
           <a:lstStyle/>
           <a:p>
-            <a:r>
-              <a:rPr lang="en-US" dirty="0"/>
-              <a:t/>
-            </a:r>
             <a:endParaRPr lang="en-US" dirty="0"/>
           </a:p>
         </p:txBody>
@@ -1128,8 +882,16 @@
           <a:lstStyle/>
           <a:p>
             <a:r>
-              <a:rPr lang="en-US" dirty="0"/>
-              <a:t/>
+              <a:rPr lang="zh-CN" altLang="en-US" dirty="0"/>
+              <a:t>加一张</a:t>
+            </a:r>
+            <a:r>
+              <a:rPr lang="en-US" altLang="zh-CN" dirty="0" err="1"/>
+              <a:t>grapheraser</a:t>
+            </a:r>
+            <a:r>
+              <a:rPr lang="zh-CN" altLang="en-US" dirty="0"/>
+              <a:t>的伪下降图</a:t>
             </a:r>
             <a:endParaRPr lang="en-US" dirty="0"/>
           </a:p>
@@ -1152,7 +914,7 @@
           <a:p>
             <a:fld id="{F7021451-1387-4CA6-816F-3879F97B5CBC}" type="slidenum">
               <a:rPr lang="en-US"/>
-              <a:t>5</a:t>
+              <a:t>6</a:t>
             </a:fld>
             <a:endParaRPr lang="en-US"/>
           </a:p>
@@ -1215,10 +977,6 @@
           <a:bodyPr/>
           <a:lstStyle/>
           <a:p>
-            <a:r>
-              <a:rPr lang="en-US" dirty="0"/>
-              <a:t/>
-            </a:r>
             <a:endParaRPr lang="en-US" dirty="0"/>
           </a:p>
         </p:txBody>
@@ -1240,7 +998,7 @@
           <a:p>
             <a:fld id="{F7021451-1387-4CA6-816F-3879F97B5CBC}" type="slidenum">
               <a:rPr lang="en-US"/>
-              <a:t>6</a:t>
+              <a:t>7</a:t>
             </a:fld>
             <a:endParaRPr lang="en-US"/>
           </a:p>
@@ -1303,10 +1061,6 @@
           <a:bodyPr/>
           <a:lstStyle/>
           <a:p>
-            <a:r>
-              <a:rPr lang="en-US" dirty="0"/>
-              <a:t/>
-            </a:r>
             <a:endParaRPr lang="en-US" dirty="0"/>
           </a:p>
         </p:txBody>
@@ -1328,7 +1082,7 @@
           <a:p>
             <a:fld id="{F7021451-1387-4CA6-816F-3879F97B5CBC}" type="slidenum">
               <a:rPr lang="en-US"/>
-              <a:t>7</a:t>
+              <a:t>8</a:t>
             </a:fld>
             <a:endParaRPr lang="en-US"/>
           </a:p>
@@ -1391,10 +1145,6 @@
           <a:bodyPr/>
           <a:lstStyle/>
           <a:p>
-            <a:r>
-              <a:rPr lang="en-US" dirty="0"/>
-              <a:t/>
-            </a:r>
             <a:endParaRPr lang="en-US" dirty="0"/>
           </a:p>
         </p:txBody>
@@ -1416,7 +1166,7 @@
           <a:p>
             <a:fld id="{F7021451-1387-4CA6-816F-3879F97B5CBC}" type="slidenum">
               <a:rPr lang="en-US"/>
-              <a:t>8</a:t>
+              <a:t>9</a:t>
             </a:fld>
             <a:endParaRPr lang="en-US"/>
           </a:p>
@@ -1479,10 +1229,6 @@
           <a:bodyPr/>
           <a:lstStyle/>
           <a:p>
-            <a:r>
-              <a:rPr lang="en-US" dirty="0"/>
-              <a:t/>
-            </a:r>
             <a:endParaRPr lang="en-US" dirty="0"/>
           </a:p>
         </p:txBody>
@@ -1504,7 +1250,7 @@
           <a:p>
             <a:fld id="{F7021451-1387-4CA6-816F-3879F97B5CBC}" type="slidenum">
               <a:rPr lang="en-US"/>
-              <a:t>9</a:t>
+              <a:t>10</a:t>
             </a:fld>
             <a:endParaRPr lang="en-US"/>
           </a:p>
@@ -1556,6 +1302,11 @@
 <file path=ppt/slideMasters/slideMaster1.xml><?xml version="1.0" encoding="utf-8"?>
 <p:sldMaster xmlns:a="http://schemas.openxmlformats.org/drawingml/2006/main" xmlns:r="http://schemas.openxmlformats.org/officeDocument/2006/relationships" xmlns:p="http://schemas.openxmlformats.org/presentationml/2006/main">
   <p:cSld>
+    <p:bg>
+      <p:bgRef idx="1001">
+        <a:schemeClr val="bg1"/>
+      </p:bgRef>
+    </p:bg>
     <p:spTree>
       <p:nvGrpSpPr>
         <p:cNvPr id="1" name=""/>
@@ -1838,6 +1589,7 @@
         <a:solidFill>
           <a:srgbClr val="1E2761"/>
         </a:solidFill>
+        <a:effectLst/>
       </p:bgPr>
     </p:bg>
     <p:spTree>
@@ -1875,7 +1627,7 @@
           <a:bodyPr wrap="square" lIns="0" tIns="0" rIns="0" bIns="0" rtlCol="0" anchor="ctr"/>
           <a:lstStyle/>
           <a:p>
-            <a:pPr algn="l" indent="0" marL="0">
+            <a:pPr marL="0" indent="0" algn="l">
               <a:buNone/>
             </a:pPr>
             <a:r>
@@ -1914,11 +1666,11 @@
           <a:bodyPr wrap="square" lIns="0" tIns="0" rIns="0" bIns="0" rtlCol="0" anchor="ctr"/>
           <a:lstStyle/>
           <a:p>
-            <a:pPr algn="l" indent="0" marL="0">
-              <a:buNone/>
-            </a:pPr>
-            <a:r>
-              <a:rPr lang="en-US" sz="2400" dirty="0">
+            <a:pPr marL="0" indent="0" algn="l">
+              <a:buNone/>
+            </a:pPr>
+            <a:r>
+              <a:rPr lang="en-US" sz="2400" dirty="0" err="1">
                 <a:solidFill>
                   <a:srgbClr val="4A90D9"/>
                 </a:solidFill>
@@ -1926,7 +1678,7 @@
                 <a:ea typeface="Arial" pitchFamily="34" charset="-122"/>
                 <a:cs typeface="Arial" pitchFamily="34" charset="-120"/>
               </a:rPr>
-              <a:t>导师汇报版阶段报告</a:t>
+              <a:t>阶段报告</a:t>
             </a:r>
             <a:endParaRPr lang="en-US" sz="2400" dirty="0"/>
           </a:p>
@@ -1953,7 +1705,7 @@
           <a:bodyPr wrap="square" lIns="0" tIns="0" rIns="0" bIns="0" rtlCol="0" anchor="ctr"/>
           <a:lstStyle/>
           <a:p>
-            <a:pPr algn="l" indent="0" marL="0">
+            <a:pPr marL="0" indent="0" algn="l">
               <a:buNone/>
             </a:pPr>
             <a:r>
@@ -1990,6 +1742,13 @@
           </a:solidFill>
           <a:ln/>
         </p:spPr>
+        <p:txBody>
+          <a:bodyPr/>
+          <a:lstStyle/>
+          <a:p>
+            <a:endParaRPr lang="zh-CN" altLang="en-US"/>
+          </a:p>
+        </p:txBody>
       </p:sp>
     </p:spTree>
   </p:cSld>
@@ -2001,12 +1760,13 @@
 
 <file path=ppt/slides/slide10.xml><?xml version="1.0" encoding="utf-8"?>
 <p:sld xmlns:a="http://schemas.openxmlformats.org/drawingml/2006/main" xmlns:r="http://schemas.openxmlformats.org/officeDocument/2006/relationships" xmlns:p="http://schemas.openxmlformats.org/presentationml/2006/main">
-  <p:cSld name="Slide 10">
+  <p:cSld name="Slide 9">
     <p:bg>
       <p:bgPr>
         <a:solidFill>
-          <a:srgbClr val="1E2761"/>
+          <a:srgbClr val="E8F0F8"/>
         </a:solidFill>
+        <a:effectLst/>
       </p:bgPr>
     </p:bg>
     <p:spTree>
@@ -2025,30 +1785,57 @@
       </p:grpSpPr>
       <p:sp>
         <p:nvSpPr>
-          <p:cNvPr id="2" name="Text 0"/>
-          <p:cNvSpPr/>
-          <p:nvPr/>
-        </p:nvSpPr>
-        <p:spPr>
-          <a:xfrm>
-            <a:off x="457200" y="457200"/>
-            <a:ext cx="8229600" cy="548640"/>
-          </a:xfrm>
-          <a:prstGeom prst="rect">
-            <a:avLst/>
-          </a:prstGeom>
-          <a:noFill/>
-          <a:ln/>
-        </p:spPr>
-        <p:txBody>
-          <a:bodyPr wrap="square" lIns="0" tIns="0" rIns="0" bIns="0" rtlCol="0" anchor="ctr"/>
-          <a:lstStyle/>
-          <a:p>
-            <a:pPr algn="l" indent="0" marL="0">
-              <a:buNone/>
-            </a:pPr>
-            <a:r>
-              <a:rPr lang="en-US" sz="2800" b="1" dirty="0">
+          <p:cNvPr id="2" name="Shape 0"/>
+          <p:cNvSpPr/>
+          <p:nvPr/>
+        </p:nvSpPr>
+        <p:spPr>
+          <a:xfrm>
+            <a:off x="0" y="0"/>
+            <a:ext cx="9144000" cy="731520"/>
+          </a:xfrm>
+          <a:prstGeom prst="rect">
+            <a:avLst/>
+          </a:prstGeom>
+          <a:solidFill>
+            <a:srgbClr val="1E2761"/>
+          </a:solidFill>
+          <a:ln/>
+        </p:spPr>
+        <p:txBody>
+          <a:bodyPr/>
+          <a:lstStyle/>
+          <a:p>
+            <a:endParaRPr lang="zh-CN" altLang="en-US"/>
+          </a:p>
+        </p:txBody>
+      </p:sp>
+      <p:sp>
+        <p:nvSpPr>
+          <p:cNvPr id="3" name="Text 1"/>
+          <p:cNvSpPr/>
+          <p:nvPr/>
+        </p:nvSpPr>
+        <p:spPr>
+          <a:xfrm>
+            <a:off x="457200" y="137160"/>
+            <a:ext cx="8229600" cy="457200"/>
+          </a:xfrm>
+          <a:prstGeom prst="rect">
+            <a:avLst/>
+          </a:prstGeom>
+          <a:noFill/>
+          <a:ln/>
+        </p:spPr>
+        <p:txBody>
+          <a:bodyPr wrap="square" lIns="0" tIns="0" rIns="0" bIns="0" rtlCol="0" anchor="ctr"/>
+          <a:lstStyle/>
+          <a:p>
+            <a:pPr marL="0" indent="0" algn="l">
+              <a:buNone/>
+            </a:pPr>
+            <a:r>
+              <a:rPr lang="en-US" sz="2400" b="1" dirty="0">
                 <a:solidFill>
                   <a:srgbClr val="FFFFFF"/>
                 </a:solidFill>
@@ -2056,88 +1843,70 @@
                 <a:ea typeface="Arial" pitchFamily="34" charset="-122"/>
                 <a:cs typeface="Arial" pitchFamily="34" charset="-120"/>
               </a:rPr>
-              <a:t>6. 面向下一次组会的简要结论</a:t>
-            </a:r>
-            <a:endParaRPr lang="en-US" sz="2800" dirty="0"/>
-          </a:p>
-        </p:txBody>
-      </p:sp>
-      <p:sp>
-        <p:nvSpPr>
-          <p:cNvPr id="3" name="Shape 1"/>
-          <p:cNvSpPr/>
-          <p:nvPr/>
-        </p:nvSpPr>
-        <p:spPr>
-          <a:xfrm>
-            <a:off x="457200" y="1005840"/>
-            <a:ext cx="1371600" cy="54864"/>
+              <a:t>5. 可视化图表（可直接引用）</a:t>
+            </a:r>
+            <a:endParaRPr lang="en-US" sz="2400" dirty="0"/>
+          </a:p>
+        </p:txBody>
+      </p:sp>
+      <p:sp>
+        <p:nvSpPr>
+          <p:cNvPr id="4" name="Shape 2"/>
+          <p:cNvSpPr/>
+          <p:nvPr/>
+        </p:nvSpPr>
+        <p:spPr>
+          <a:xfrm>
+            <a:off x="457200" y="914400"/>
+            <a:ext cx="2651760" cy="1463040"/>
           </a:xfrm>
           <a:prstGeom prst="rect">
             <a:avLst/>
           </a:prstGeom>
           <a:solidFill>
-            <a:srgbClr val="4A90D9"/>
+            <a:srgbClr val="FFFFFF"/>
           </a:solidFill>
           <a:ln/>
-        </p:spPr>
-      </p:sp>
-      <p:sp>
-        <p:nvSpPr>
-          <p:cNvPr id="4" name="Shape 2"/>
-          <p:cNvSpPr/>
-          <p:nvPr/>
-        </p:nvSpPr>
-        <p:spPr>
-          <a:xfrm>
-            <a:off x="457200" y="1371600"/>
-            <a:ext cx="457200" cy="457200"/>
-          </a:xfrm>
-          <a:prstGeom prst="ellipse">
+          <a:effectLst>
+            <a:outerShdw blurRad="50800" dist="25400" dir="8100000" algn="bl" rotWithShape="0">
+              <a:srgbClr val="000000">
+                <a:alpha val="15000"/>
+              </a:srgbClr>
+            </a:outerShdw>
+          </a:effectLst>
+        </p:spPr>
+        <p:txBody>
+          <a:bodyPr/>
+          <a:lstStyle/>
+          <a:p>
+            <a:endParaRPr lang="zh-CN" altLang="en-US"/>
+          </a:p>
+        </p:txBody>
+      </p:sp>
+      <p:sp>
+        <p:nvSpPr>
+          <p:cNvPr id="5" name="Shape 3"/>
+          <p:cNvSpPr/>
+          <p:nvPr/>
+        </p:nvSpPr>
+        <p:spPr>
+          <a:xfrm>
+            <a:off x="594360" y="1051560"/>
+            <a:ext cx="2377440" cy="822960"/>
+          </a:xfrm>
+          <a:prstGeom prst="rect">
             <a:avLst/>
           </a:prstGeom>
           <a:solidFill>
-            <a:srgbClr val="4A90D9"/>
+            <a:srgbClr val="E8F0F8"/>
           </a:solidFill>
           <a:ln/>
         </p:spPr>
-      </p:sp>
-      <p:sp>
-        <p:nvSpPr>
-          <p:cNvPr id="5" name="Text 3"/>
-          <p:cNvSpPr/>
-          <p:nvPr/>
-        </p:nvSpPr>
-        <p:spPr>
-          <a:xfrm>
-            <a:off x="457200" y="1371600"/>
-            <a:ext cx="457200" cy="457200"/>
-          </a:xfrm>
-          <a:prstGeom prst="rect">
-            <a:avLst/>
-          </a:prstGeom>
-          <a:noFill/>
-          <a:ln/>
-        </p:spPr>
-        <p:txBody>
-          <a:bodyPr wrap="square" lIns="0" tIns="0" rIns="0" bIns="0" rtlCol="0" anchor="ctr"/>
-          <a:lstStyle/>
-          <a:p>
-            <a:pPr algn="ctr" indent="0" marL="0">
-              <a:buNone/>
-            </a:pPr>
-            <a:r>
-              <a:rPr lang="en-US" sz="1800" b="1" dirty="0">
-                <a:solidFill>
-                  <a:srgbClr val="FFFFFF"/>
-                </a:solidFill>
-                <a:latin typeface="Arial" pitchFamily="34" charset="0"/>
-                <a:ea typeface="Arial" pitchFamily="34" charset="-122"/>
-                <a:cs typeface="Arial" pitchFamily="34" charset="-120"/>
-              </a:rPr>
-              <a:t>1</a:t>
-            </a:r>
-            <a:endParaRPr lang="en-US" sz="1800" dirty="0"/>
+        <p:txBody>
+          <a:bodyPr/>
+          <a:lstStyle/>
+          <a:p>
+            <a:endParaRPr lang="zh-CN" altLang="en-US"/>
           </a:p>
         </p:txBody>
       </p:sp>
@@ -2149,132 +1918,143 @@
         </p:nvSpPr>
         <p:spPr>
           <a:xfrm>
-            <a:off x="1097280" y="1417320"/>
-            <a:ext cx="7589520" cy="822960"/>
-          </a:xfrm>
-          <a:prstGeom prst="rect">
-            <a:avLst/>
-          </a:prstGeom>
-          <a:noFill/>
-          <a:ln/>
-        </p:spPr>
-        <p:txBody>
-          <a:bodyPr wrap="square" lIns="0" tIns="0" rIns="0" bIns="0" rtlCol="0" anchor="ctr"/>
-          <a:lstStyle/>
-          <a:p>
-            <a:pPr algn="l" indent="0" marL="0">
-              <a:buNone/>
-            </a:pPr>
-            <a:r>
-              <a:rPr lang="en-US" sz="1600" dirty="0">
-                <a:solidFill>
-                  <a:srgbClr val="FFFFFF"/>
-                </a:solidFill>
-                <a:latin typeface="Arial" pitchFamily="34" charset="0"/>
-                <a:ea typeface="Arial" pitchFamily="34" charset="-122"/>
-                <a:cs typeface="Arial" pitchFamily="34" charset="-120"/>
-              </a:rPr>
-              <a:t>已经把「攻击有效性」从「方法自身偏置」里分离出来（Relative + k=5 baseline）</a:t>
-            </a:r>
-            <a:endParaRPr lang="en-US" sz="1600" dirty="0"/>
-          </a:p>
-        </p:txBody>
-      </p:sp>
-      <p:sp>
-        <p:nvSpPr>
-          <p:cNvPr id="7" name="Shape 5"/>
-          <p:cNvSpPr/>
-          <p:nvPr/>
-        </p:nvSpPr>
-        <p:spPr>
-          <a:xfrm>
-            <a:off x="457200" y="2468880"/>
-            <a:ext cx="457200" cy="457200"/>
-          </a:xfrm>
-          <a:prstGeom prst="ellipse">
+            <a:off x="594360" y="1051560"/>
+            <a:ext cx="2377440" cy="822960"/>
+          </a:xfrm>
+          <a:prstGeom prst="rect">
+            <a:avLst/>
+          </a:prstGeom>
+          <a:noFill/>
+          <a:ln/>
+        </p:spPr>
+        <p:txBody>
+          <a:bodyPr wrap="square" lIns="0" tIns="0" rIns="0" bIns="0" rtlCol="0" anchor="ctr"/>
+          <a:lstStyle/>
+          <a:p>
+            <a:pPr marL="0" indent="0" algn="ctr">
+              <a:buNone/>
+            </a:pPr>
+            <a:r>
+              <a:rPr lang="en-US" sz="3200" dirty="0">
+                <a:solidFill>
+                  <a:srgbClr val="000000"/>
+                </a:solidFill>
+              </a:rPr>
+              <a:t>📊</a:t>
+            </a:r>
+            <a:endParaRPr lang="en-US" sz="3200" dirty="0"/>
+          </a:p>
+        </p:txBody>
+      </p:sp>
+      <p:sp>
+        <p:nvSpPr>
+          <p:cNvPr id="7" name="Text 5"/>
+          <p:cNvSpPr/>
+          <p:nvPr/>
+        </p:nvSpPr>
+        <p:spPr>
+          <a:xfrm>
+            <a:off x="594360" y="1965960"/>
+            <a:ext cx="914400" cy="274320"/>
+          </a:xfrm>
+          <a:prstGeom prst="rect">
+            <a:avLst/>
+          </a:prstGeom>
+          <a:noFill/>
+          <a:ln/>
+        </p:spPr>
+        <p:txBody>
+          <a:bodyPr wrap="square" lIns="0" tIns="0" rIns="0" bIns="0" rtlCol="0" anchor="ctr"/>
+          <a:lstStyle/>
+          <a:p>
+            <a:pPr marL="0" indent="0" algn="l">
+              <a:buNone/>
+            </a:pPr>
+            <a:r>
+              <a:rPr lang="en-US" sz="1200" b="1" dirty="0">
+                <a:solidFill>
+                  <a:srgbClr val="4A90D9"/>
+                </a:solidFill>
+                <a:latin typeface="Arial" pitchFamily="34" charset="0"/>
+                <a:ea typeface="Arial" pitchFamily="34" charset="-122"/>
+                <a:cs typeface="Arial" pitchFamily="34" charset="-120"/>
+              </a:rPr>
+              <a:t>FIG-1</a:t>
+            </a:r>
+            <a:endParaRPr lang="en-US" sz="1200" dirty="0"/>
+          </a:p>
+        </p:txBody>
+      </p:sp>
+      <p:sp>
+        <p:nvSpPr>
+          <p:cNvPr id="8" name="Text 6"/>
+          <p:cNvSpPr/>
+          <p:nvPr/>
+        </p:nvSpPr>
+        <p:spPr>
+          <a:xfrm>
+            <a:off x="594360" y="2194560"/>
+            <a:ext cx="2377440" cy="137160"/>
+          </a:xfrm>
+          <a:prstGeom prst="rect">
+            <a:avLst/>
+          </a:prstGeom>
+          <a:noFill/>
+          <a:ln/>
+        </p:spPr>
+        <p:txBody>
+          <a:bodyPr wrap="square" lIns="0" tIns="0" rIns="0" bIns="0" rtlCol="0" anchor="ctr"/>
+          <a:lstStyle/>
+          <a:p>
+            <a:pPr marL="0" indent="0" algn="l">
+              <a:buNone/>
+            </a:pPr>
+            <a:r>
+              <a:rPr lang="en-US" sz="1100" dirty="0">
+                <a:solidFill>
+                  <a:srgbClr val="64748B"/>
+                </a:solidFill>
+                <a:latin typeface="Arial" pitchFamily="34" charset="0"/>
+                <a:ea typeface="Arial" pitchFamily="34" charset="-122"/>
+                <a:cs typeface="Arial" pitchFamily="34" charset="-120"/>
+              </a:rPr>
+              <a:t>泛化与方法族对比</a:t>
+            </a:r>
+            <a:endParaRPr lang="en-US" sz="1100" dirty="0"/>
+          </a:p>
+        </p:txBody>
+      </p:sp>
+      <p:sp>
+        <p:nvSpPr>
+          <p:cNvPr id="9" name="Shape 7"/>
+          <p:cNvSpPr/>
+          <p:nvPr/>
+        </p:nvSpPr>
+        <p:spPr>
+          <a:xfrm>
+            <a:off x="3291840" y="914400"/>
+            <a:ext cx="2651760" cy="1463040"/>
+          </a:xfrm>
+          <a:prstGeom prst="rect">
             <a:avLst/>
           </a:prstGeom>
           <a:solidFill>
-            <a:srgbClr val="4A90D9"/>
+            <a:srgbClr val="FFFFFF"/>
           </a:solidFill>
           <a:ln/>
-        </p:spPr>
-      </p:sp>
-      <p:sp>
-        <p:nvSpPr>
-          <p:cNvPr id="8" name="Text 6"/>
-          <p:cNvSpPr/>
-          <p:nvPr/>
-        </p:nvSpPr>
-        <p:spPr>
-          <a:xfrm>
-            <a:off x="457200" y="2468880"/>
-            <a:ext cx="457200" cy="457200"/>
-          </a:xfrm>
-          <a:prstGeom prst="rect">
-            <a:avLst/>
-          </a:prstGeom>
-          <a:noFill/>
-          <a:ln/>
-        </p:spPr>
-        <p:txBody>
-          <a:bodyPr wrap="square" lIns="0" tIns="0" rIns="0" bIns="0" rtlCol="0" anchor="ctr"/>
-          <a:lstStyle/>
-          <a:p>
-            <a:pPr algn="ctr" indent="0" marL="0">
-              <a:buNone/>
-            </a:pPr>
-            <a:r>
-              <a:rPr lang="en-US" sz="1800" b="1" dirty="0">
-                <a:solidFill>
-                  <a:srgbClr val="FFFFFF"/>
-                </a:solidFill>
-                <a:latin typeface="Arial" pitchFamily="34" charset="0"/>
-                <a:ea typeface="Arial" pitchFamily="34" charset="-122"/>
-                <a:cs typeface="Arial" pitchFamily="34" charset="-120"/>
-              </a:rPr>
-              <a:t>2</a:t>
-            </a:r>
-            <a:endParaRPr lang="en-US" sz="1800" dirty="0"/>
-          </a:p>
-        </p:txBody>
-      </p:sp>
-      <p:sp>
-        <p:nvSpPr>
-          <p:cNvPr id="9" name="Text 7"/>
-          <p:cNvSpPr/>
-          <p:nvPr/>
-        </p:nvSpPr>
-        <p:spPr>
-          <a:xfrm>
-            <a:off x="1097280" y="2514600"/>
-            <a:ext cx="7589520" cy="822960"/>
-          </a:xfrm>
-          <a:prstGeom prst="rect">
-            <a:avLst/>
-          </a:prstGeom>
-          <a:noFill/>
-          <a:ln/>
-        </p:spPr>
-        <p:txBody>
-          <a:bodyPr wrap="square" lIns="0" tIns="0" rIns="0" bIns="0" rtlCol="0" anchor="ctr"/>
-          <a:lstStyle/>
-          <a:p>
-            <a:pPr algn="l" indent="0" marL="0">
-              <a:buNone/>
-            </a:pPr>
-            <a:r>
-              <a:rPr lang="en-US" sz="1600" dirty="0">
-                <a:solidFill>
-                  <a:srgbClr val="FFFFFF"/>
-                </a:solidFill>
-                <a:latin typeface="Arial" pitchFamily="34" charset="0"/>
-                <a:ea typeface="Arial" pitchFamily="34" charset="-122"/>
-                <a:cs typeface="Arial" pitchFamily="34" charset="-120"/>
-              </a:rPr>
-              <a:t>IF 与 IM 的算力路径已明确：TracIn（当前可执行）+ IM v4（当前高效）+ D-SSA（大图下一步）</a:t>
-            </a:r>
-            <a:endParaRPr lang="en-US" sz="1600" dirty="0"/>
+          <a:effectLst>
+            <a:outerShdw blurRad="50800" dist="25400" dir="8100000" algn="bl" rotWithShape="0">
+              <a:srgbClr val="000000">
+                <a:alpha val="15000"/>
+              </a:srgbClr>
+            </a:outerShdw>
+          </a:effectLst>
+        </p:spPr>
+        <p:txBody>
+          <a:bodyPr/>
+          <a:lstStyle/>
+          <a:p>
+            <a:endParaRPr lang="zh-CN" altLang="en-US"/>
           </a:p>
         </p:txBody>
       </p:sp>
@@ -2286,17 +2066,24 @@
         </p:nvSpPr>
         <p:spPr>
           <a:xfrm>
-            <a:off x="457200" y="3566160"/>
-            <a:ext cx="457200" cy="457200"/>
-          </a:xfrm>
-          <a:prstGeom prst="ellipse">
+            <a:off x="3429000" y="1051560"/>
+            <a:ext cx="2377440" cy="822960"/>
+          </a:xfrm>
+          <a:prstGeom prst="rect">
             <a:avLst/>
           </a:prstGeom>
           <a:solidFill>
-            <a:srgbClr val="4A90D9"/>
+            <a:srgbClr val="E8F0F8"/>
           </a:solidFill>
           <a:ln/>
         </p:spPr>
+        <p:txBody>
+          <a:bodyPr/>
+          <a:lstStyle/>
+          <a:p>
+            <a:endParaRPr lang="zh-CN" altLang="en-US"/>
+          </a:p>
+        </p:txBody>
       </p:sp>
       <p:sp>
         <p:nvSpPr>
@@ -2306,34 +2093,31 @@
         </p:nvSpPr>
         <p:spPr>
           <a:xfrm>
-            <a:off x="457200" y="3566160"/>
-            <a:ext cx="457200" cy="457200"/>
-          </a:xfrm>
-          <a:prstGeom prst="rect">
-            <a:avLst/>
-          </a:prstGeom>
-          <a:noFill/>
-          <a:ln/>
-        </p:spPr>
-        <p:txBody>
-          <a:bodyPr wrap="square" lIns="0" tIns="0" rIns="0" bIns="0" rtlCol="0" anchor="ctr"/>
-          <a:lstStyle/>
-          <a:p>
-            <a:pPr algn="ctr" indent="0" marL="0">
-              <a:buNone/>
-            </a:pPr>
-            <a:r>
-              <a:rPr lang="en-US" sz="1800" b="1" dirty="0">
-                <a:solidFill>
-                  <a:srgbClr val="FFFFFF"/>
-                </a:solidFill>
-                <a:latin typeface="Arial" pitchFamily="34" charset="0"/>
-                <a:ea typeface="Arial" pitchFamily="34" charset="-122"/>
-                <a:cs typeface="Arial" pitchFamily="34" charset="-120"/>
-              </a:rPr>
-              <a:t>3</a:t>
-            </a:r>
-            <a:endParaRPr lang="en-US" sz="1800" dirty="0"/>
+            <a:off x="3429000" y="1051560"/>
+            <a:ext cx="2377440" cy="822960"/>
+          </a:xfrm>
+          <a:prstGeom prst="rect">
+            <a:avLst/>
+          </a:prstGeom>
+          <a:noFill/>
+          <a:ln/>
+        </p:spPr>
+        <p:txBody>
+          <a:bodyPr wrap="square" lIns="0" tIns="0" rIns="0" bIns="0" rtlCol="0" anchor="ctr"/>
+          <a:lstStyle/>
+          <a:p>
+            <a:pPr marL="0" indent="0" algn="ctr">
+              <a:buNone/>
+            </a:pPr>
+            <a:r>
+              <a:rPr lang="en-US" sz="3200" dirty="0">
+                <a:solidFill>
+                  <a:srgbClr val="000000"/>
+                </a:solidFill>
+              </a:rPr>
+              <a:t>📊</a:t>
+            </a:r>
+            <a:endParaRPr lang="en-US" sz="3200" dirty="0"/>
           </a:p>
         </p:txBody>
       </p:sp>
@@ -2345,34 +2129,598 @@
         </p:nvSpPr>
         <p:spPr>
           <a:xfrm>
-            <a:off x="1097280" y="3611880"/>
-            <a:ext cx="7589520" cy="822960"/>
-          </a:xfrm>
-          <a:prstGeom prst="rect">
-            <a:avLst/>
-          </a:prstGeom>
-          <a:noFill/>
-          <a:ln/>
-        </p:spPr>
-        <p:txBody>
-          <a:bodyPr wrap="square" lIns="0" tIns="0" rIns="0" bIns="0" rtlCol="0" anchor="ctr"/>
-          <a:lstStyle/>
-          <a:p>
-            <a:pPr algn="l" indent="0" marL="0">
-              <a:buNone/>
-            </a:pPr>
-            <a:r>
-              <a:rPr lang="en-US" sz="1600" dirty="0">
-                <a:solidFill>
-                  <a:srgbClr val="FFFFFF"/>
-                </a:solidFill>
-                <a:latin typeface="Arial" pitchFamily="34" charset="0"/>
-                <a:ea typeface="Arial" pitchFamily="34" charset="-122"/>
-                <a:cs typeface="Arial" pitchFamily="34" charset="-120"/>
-              </a:rPr>
-              <a:t>关键发现：Shard-based「变好」主要来自方法本身机制；但 Relative 口径下攻击增益并非 0，需明确「双层结论」</a:t>
-            </a:r>
-            <a:endParaRPr lang="en-US" sz="1600" dirty="0"/>
+            <a:off x="3429000" y="1965960"/>
+            <a:ext cx="914400" cy="274320"/>
+          </a:xfrm>
+          <a:prstGeom prst="rect">
+            <a:avLst/>
+          </a:prstGeom>
+          <a:noFill/>
+          <a:ln/>
+        </p:spPr>
+        <p:txBody>
+          <a:bodyPr wrap="square" lIns="0" tIns="0" rIns="0" bIns="0" rtlCol="0" anchor="ctr"/>
+          <a:lstStyle/>
+          <a:p>
+            <a:pPr marL="0" indent="0" algn="l">
+              <a:buNone/>
+            </a:pPr>
+            <a:r>
+              <a:rPr lang="en-US" sz="1200" b="1" dirty="0">
+                <a:solidFill>
+                  <a:srgbClr val="4A90D9"/>
+                </a:solidFill>
+                <a:latin typeface="Arial" pitchFamily="34" charset="0"/>
+                <a:ea typeface="Arial" pitchFamily="34" charset="-122"/>
+                <a:cs typeface="Arial" pitchFamily="34" charset="-120"/>
+              </a:rPr>
+              <a:t>FIG-2</a:t>
+            </a:r>
+            <a:endParaRPr lang="en-US" sz="1200" dirty="0"/>
+          </a:p>
+        </p:txBody>
+      </p:sp>
+      <p:sp>
+        <p:nvSpPr>
+          <p:cNvPr id="13" name="Text 11"/>
+          <p:cNvSpPr/>
+          <p:nvPr/>
+        </p:nvSpPr>
+        <p:spPr>
+          <a:xfrm>
+            <a:off x="3429000" y="2194560"/>
+            <a:ext cx="2377440" cy="137160"/>
+          </a:xfrm>
+          <a:prstGeom prst="rect">
+            <a:avLst/>
+          </a:prstGeom>
+          <a:noFill/>
+          <a:ln/>
+        </p:spPr>
+        <p:txBody>
+          <a:bodyPr wrap="square" lIns="0" tIns="0" rIns="0" bIns="0" rtlCol="0" anchor="ctr"/>
+          <a:lstStyle/>
+          <a:p>
+            <a:pPr marL="0" indent="0" algn="l">
+              <a:buNone/>
+            </a:pPr>
+            <a:r>
+              <a:rPr lang="en-US" sz="1100" dirty="0">
+                <a:solidFill>
+                  <a:srgbClr val="64748B"/>
+                </a:solidFill>
+                <a:latin typeface="Arial" pitchFamily="34" charset="0"/>
+                <a:ea typeface="Arial" pitchFamily="34" charset="-122"/>
+                <a:cs typeface="Arial" pitchFamily="34" charset="-120"/>
+              </a:rPr>
+              <a:t>Ratio 敏感性</a:t>
+            </a:r>
+            <a:endParaRPr lang="en-US" sz="1100" dirty="0"/>
+          </a:p>
+        </p:txBody>
+      </p:sp>
+      <p:sp>
+        <p:nvSpPr>
+          <p:cNvPr id="14" name="Shape 12"/>
+          <p:cNvSpPr/>
+          <p:nvPr/>
+        </p:nvSpPr>
+        <p:spPr>
+          <a:xfrm>
+            <a:off x="6126480" y="914400"/>
+            <a:ext cx="2651760" cy="1463040"/>
+          </a:xfrm>
+          <a:prstGeom prst="rect">
+            <a:avLst/>
+          </a:prstGeom>
+          <a:solidFill>
+            <a:srgbClr val="FFFFFF"/>
+          </a:solidFill>
+          <a:ln/>
+          <a:effectLst>
+            <a:outerShdw blurRad="50800" dist="25400" dir="8100000" algn="bl" rotWithShape="0">
+              <a:srgbClr val="000000">
+                <a:alpha val="15000"/>
+              </a:srgbClr>
+            </a:outerShdw>
+          </a:effectLst>
+        </p:spPr>
+        <p:txBody>
+          <a:bodyPr/>
+          <a:lstStyle/>
+          <a:p>
+            <a:endParaRPr lang="zh-CN" altLang="en-US"/>
+          </a:p>
+        </p:txBody>
+      </p:sp>
+      <p:sp>
+        <p:nvSpPr>
+          <p:cNvPr id="15" name="Shape 13"/>
+          <p:cNvSpPr/>
+          <p:nvPr/>
+        </p:nvSpPr>
+        <p:spPr>
+          <a:xfrm>
+            <a:off x="6263640" y="1051560"/>
+            <a:ext cx="2377440" cy="822960"/>
+          </a:xfrm>
+          <a:prstGeom prst="rect">
+            <a:avLst/>
+          </a:prstGeom>
+          <a:solidFill>
+            <a:srgbClr val="E8F0F8"/>
+          </a:solidFill>
+          <a:ln/>
+        </p:spPr>
+        <p:txBody>
+          <a:bodyPr/>
+          <a:lstStyle/>
+          <a:p>
+            <a:endParaRPr lang="zh-CN" altLang="en-US"/>
+          </a:p>
+        </p:txBody>
+      </p:sp>
+      <p:sp>
+        <p:nvSpPr>
+          <p:cNvPr id="16" name="Text 14"/>
+          <p:cNvSpPr/>
+          <p:nvPr/>
+        </p:nvSpPr>
+        <p:spPr>
+          <a:xfrm>
+            <a:off x="6263640" y="1051560"/>
+            <a:ext cx="2377440" cy="822960"/>
+          </a:xfrm>
+          <a:prstGeom prst="rect">
+            <a:avLst/>
+          </a:prstGeom>
+          <a:noFill/>
+          <a:ln/>
+        </p:spPr>
+        <p:txBody>
+          <a:bodyPr wrap="square" lIns="0" tIns="0" rIns="0" bIns="0" rtlCol="0" anchor="ctr"/>
+          <a:lstStyle/>
+          <a:p>
+            <a:pPr marL="0" indent="0" algn="ctr">
+              <a:buNone/>
+            </a:pPr>
+            <a:r>
+              <a:rPr lang="en-US" sz="3200" dirty="0">
+                <a:solidFill>
+                  <a:srgbClr val="000000"/>
+                </a:solidFill>
+              </a:rPr>
+              <a:t>📊</a:t>
+            </a:r>
+            <a:endParaRPr lang="en-US" sz="3200" dirty="0"/>
+          </a:p>
+        </p:txBody>
+      </p:sp>
+      <p:sp>
+        <p:nvSpPr>
+          <p:cNvPr id="17" name="Text 15"/>
+          <p:cNvSpPr/>
+          <p:nvPr/>
+        </p:nvSpPr>
+        <p:spPr>
+          <a:xfrm>
+            <a:off x="6263640" y="1965960"/>
+            <a:ext cx="914400" cy="274320"/>
+          </a:xfrm>
+          <a:prstGeom prst="rect">
+            <a:avLst/>
+          </a:prstGeom>
+          <a:noFill/>
+          <a:ln/>
+        </p:spPr>
+        <p:txBody>
+          <a:bodyPr wrap="square" lIns="0" tIns="0" rIns="0" bIns="0" rtlCol="0" anchor="ctr"/>
+          <a:lstStyle/>
+          <a:p>
+            <a:pPr marL="0" indent="0" algn="l">
+              <a:buNone/>
+            </a:pPr>
+            <a:r>
+              <a:rPr lang="en-US" sz="1200" b="1" dirty="0">
+                <a:solidFill>
+                  <a:srgbClr val="4A90D9"/>
+                </a:solidFill>
+                <a:latin typeface="Arial" pitchFamily="34" charset="0"/>
+                <a:ea typeface="Arial" pitchFamily="34" charset="-122"/>
+                <a:cs typeface="Arial" pitchFamily="34" charset="-120"/>
+              </a:rPr>
+              <a:t>FIG-3</a:t>
+            </a:r>
+            <a:endParaRPr lang="en-US" sz="1200" dirty="0"/>
+          </a:p>
+        </p:txBody>
+      </p:sp>
+      <p:sp>
+        <p:nvSpPr>
+          <p:cNvPr id="18" name="Text 16"/>
+          <p:cNvSpPr/>
+          <p:nvPr/>
+        </p:nvSpPr>
+        <p:spPr>
+          <a:xfrm>
+            <a:off x="6263640" y="2194560"/>
+            <a:ext cx="2377440" cy="137160"/>
+          </a:xfrm>
+          <a:prstGeom prst="rect">
+            <a:avLst/>
+          </a:prstGeom>
+          <a:noFill/>
+          <a:ln/>
+        </p:spPr>
+        <p:txBody>
+          <a:bodyPr wrap="square" lIns="0" tIns="0" rIns="0" bIns="0" rtlCol="0" anchor="ctr"/>
+          <a:lstStyle/>
+          <a:p>
+            <a:pPr marL="0" indent="0" algn="l">
+              <a:buNone/>
+            </a:pPr>
+            <a:r>
+              <a:rPr lang="en-US" sz="1100" dirty="0">
+                <a:solidFill>
+                  <a:srgbClr val="64748B"/>
+                </a:solidFill>
+                <a:latin typeface="Arial" pitchFamily="34" charset="0"/>
+                <a:ea typeface="Arial" pitchFamily="34" charset="-122"/>
+                <a:cs typeface="Arial" pitchFamily="34" charset="-120"/>
+              </a:rPr>
+              <a:t>全方法脆弱性谱</a:t>
+            </a:r>
+            <a:endParaRPr lang="en-US" sz="1100" dirty="0"/>
+          </a:p>
+        </p:txBody>
+      </p:sp>
+      <p:sp>
+        <p:nvSpPr>
+          <p:cNvPr id="19" name="Shape 17"/>
+          <p:cNvSpPr/>
+          <p:nvPr/>
+        </p:nvSpPr>
+        <p:spPr>
+          <a:xfrm>
+            <a:off x="457200" y="2560320"/>
+            <a:ext cx="2651760" cy="1463040"/>
+          </a:xfrm>
+          <a:prstGeom prst="rect">
+            <a:avLst/>
+          </a:prstGeom>
+          <a:solidFill>
+            <a:srgbClr val="FFFFFF"/>
+          </a:solidFill>
+          <a:ln/>
+          <a:effectLst>
+            <a:outerShdw blurRad="50800" dist="25400" dir="8100000" algn="bl" rotWithShape="0">
+              <a:srgbClr val="000000">
+                <a:alpha val="15000"/>
+              </a:srgbClr>
+            </a:outerShdw>
+          </a:effectLst>
+        </p:spPr>
+        <p:txBody>
+          <a:bodyPr/>
+          <a:lstStyle/>
+          <a:p>
+            <a:endParaRPr lang="zh-CN" altLang="en-US"/>
+          </a:p>
+        </p:txBody>
+      </p:sp>
+      <p:sp>
+        <p:nvSpPr>
+          <p:cNvPr id="20" name="Shape 18"/>
+          <p:cNvSpPr/>
+          <p:nvPr/>
+        </p:nvSpPr>
+        <p:spPr>
+          <a:xfrm>
+            <a:off x="594360" y="2697480"/>
+            <a:ext cx="2377440" cy="822960"/>
+          </a:xfrm>
+          <a:prstGeom prst="rect">
+            <a:avLst/>
+          </a:prstGeom>
+          <a:solidFill>
+            <a:srgbClr val="E8F0F8"/>
+          </a:solidFill>
+          <a:ln/>
+        </p:spPr>
+        <p:txBody>
+          <a:bodyPr/>
+          <a:lstStyle/>
+          <a:p>
+            <a:endParaRPr lang="zh-CN" altLang="en-US"/>
+          </a:p>
+        </p:txBody>
+      </p:sp>
+      <p:sp>
+        <p:nvSpPr>
+          <p:cNvPr id="21" name="Text 19"/>
+          <p:cNvSpPr/>
+          <p:nvPr/>
+        </p:nvSpPr>
+        <p:spPr>
+          <a:xfrm>
+            <a:off x="594360" y="2697480"/>
+            <a:ext cx="2377440" cy="822960"/>
+          </a:xfrm>
+          <a:prstGeom prst="rect">
+            <a:avLst/>
+          </a:prstGeom>
+          <a:noFill/>
+          <a:ln/>
+        </p:spPr>
+        <p:txBody>
+          <a:bodyPr wrap="square" lIns="0" tIns="0" rIns="0" bIns="0" rtlCol="0" anchor="ctr"/>
+          <a:lstStyle/>
+          <a:p>
+            <a:pPr marL="0" indent="0" algn="ctr">
+              <a:buNone/>
+            </a:pPr>
+            <a:r>
+              <a:rPr lang="en-US" sz="3200" dirty="0">
+                <a:solidFill>
+                  <a:srgbClr val="000000"/>
+                </a:solidFill>
+              </a:rPr>
+              <a:t>📊</a:t>
+            </a:r>
+            <a:endParaRPr lang="en-US" sz="3200" dirty="0"/>
+          </a:p>
+        </p:txBody>
+      </p:sp>
+      <p:sp>
+        <p:nvSpPr>
+          <p:cNvPr id="22" name="Text 20"/>
+          <p:cNvSpPr/>
+          <p:nvPr/>
+        </p:nvSpPr>
+        <p:spPr>
+          <a:xfrm>
+            <a:off x="594360" y="3611880"/>
+            <a:ext cx="914400" cy="274320"/>
+          </a:xfrm>
+          <a:prstGeom prst="rect">
+            <a:avLst/>
+          </a:prstGeom>
+          <a:noFill/>
+          <a:ln/>
+        </p:spPr>
+        <p:txBody>
+          <a:bodyPr wrap="square" lIns="0" tIns="0" rIns="0" bIns="0" rtlCol="0" anchor="ctr"/>
+          <a:lstStyle/>
+          <a:p>
+            <a:pPr marL="0" indent="0" algn="l">
+              <a:buNone/>
+            </a:pPr>
+            <a:r>
+              <a:rPr lang="en-US" sz="1200" b="1" dirty="0">
+                <a:solidFill>
+                  <a:srgbClr val="4A90D9"/>
+                </a:solidFill>
+                <a:latin typeface="Arial" pitchFamily="34" charset="0"/>
+                <a:ea typeface="Arial" pitchFamily="34" charset="-122"/>
+                <a:cs typeface="Arial" pitchFamily="34" charset="-120"/>
+              </a:rPr>
+              <a:t>FIG-4</a:t>
+            </a:r>
+            <a:endParaRPr lang="en-US" sz="1200" dirty="0"/>
+          </a:p>
+        </p:txBody>
+      </p:sp>
+      <p:sp>
+        <p:nvSpPr>
+          <p:cNvPr id="23" name="Text 21"/>
+          <p:cNvSpPr/>
+          <p:nvPr/>
+        </p:nvSpPr>
+        <p:spPr>
+          <a:xfrm>
+            <a:off x="594360" y="3840480"/>
+            <a:ext cx="2377440" cy="137160"/>
+          </a:xfrm>
+          <a:prstGeom prst="rect">
+            <a:avLst/>
+          </a:prstGeom>
+          <a:noFill/>
+          <a:ln/>
+        </p:spPr>
+        <p:txBody>
+          <a:bodyPr wrap="square" lIns="0" tIns="0" rIns="0" bIns="0" rtlCol="0" anchor="ctr"/>
+          <a:lstStyle/>
+          <a:p>
+            <a:pPr marL="0" indent="0" algn="l">
+              <a:buNone/>
+            </a:pPr>
+            <a:r>
+              <a:rPr lang="en-US" sz="1100" dirty="0">
+                <a:solidFill>
+                  <a:srgbClr val="64748B"/>
+                </a:solidFill>
+                <a:latin typeface="Arial" pitchFamily="34" charset="0"/>
+                <a:ea typeface="Arial" pitchFamily="34" charset="-122"/>
+                <a:cs typeface="Arial" pitchFamily="34" charset="-120"/>
+              </a:rPr>
+              <a:t>统计显著性</a:t>
+            </a:r>
+            <a:endParaRPr lang="en-US" sz="1100" dirty="0"/>
+          </a:p>
+        </p:txBody>
+      </p:sp>
+      <p:sp>
+        <p:nvSpPr>
+          <p:cNvPr id="24" name="Shape 22"/>
+          <p:cNvSpPr/>
+          <p:nvPr/>
+        </p:nvSpPr>
+        <p:spPr>
+          <a:xfrm>
+            <a:off x="3291840" y="2560320"/>
+            <a:ext cx="2651760" cy="1463040"/>
+          </a:xfrm>
+          <a:prstGeom prst="rect">
+            <a:avLst/>
+          </a:prstGeom>
+          <a:solidFill>
+            <a:srgbClr val="FFFFFF"/>
+          </a:solidFill>
+          <a:ln/>
+          <a:effectLst>
+            <a:outerShdw blurRad="50800" dist="25400" dir="8100000" algn="bl" rotWithShape="0">
+              <a:srgbClr val="000000">
+                <a:alpha val="15000"/>
+              </a:srgbClr>
+            </a:outerShdw>
+          </a:effectLst>
+        </p:spPr>
+        <p:txBody>
+          <a:bodyPr/>
+          <a:lstStyle/>
+          <a:p>
+            <a:endParaRPr lang="zh-CN" altLang="en-US"/>
+          </a:p>
+        </p:txBody>
+      </p:sp>
+      <p:sp>
+        <p:nvSpPr>
+          <p:cNvPr id="25" name="Shape 23"/>
+          <p:cNvSpPr/>
+          <p:nvPr/>
+        </p:nvSpPr>
+        <p:spPr>
+          <a:xfrm>
+            <a:off x="3429000" y="2697480"/>
+            <a:ext cx="2377440" cy="822960"/>
+          </a:xfrm>
+          <a:prstGeom prst="rect">
+            <a:avLst/>
+          </a:prstGeom>
+          <a:solidFill>
+            <a:srgbClr val="E8F0F8"/>
+          </a:solidFill>
+          <a:ln/>
+        </p:spPr>
+        <p:txBody>
+          <a:bodyPr/>
+          <a:lstStyle/>
+          <a:p>
+            <a:endParaRPr lang="zh-CN" altLang="en-US"/>
+          </a:p>
+        </p:txBody>
+      </p:sp>
+      <p:sp>
+        <p:nvSpPr>
+          <p:cNvPr id="26" name="Text 24"/>
+          <p:cNvSpPr/>
+          <p:nvPr/>
+        </p:nvSpPr>
+        <p:spPr>
+          <a:xfrm>
+            <a:off x="3429000" y="2697480"/>
+            <a:ext cx="2377440" cy="822960"/>
+          </a:xfrm>
+          <a:prstGeom prst="rect">
+            <a:avLst/>
+          </a:prstGeom>
+          <a:noFill/>
+          <a:ln/>
+        </p:spPr>
+        <p:txBody>
+          <a:bodyPr wrap="square" lIns="0" tIns="0" rIns="0" bIns="0" rtlCol="0" anchor="ctr"/>
+          <a:lstStyle/>
+          <a:p>
+            <a:pPr marL="0" indent="0" algn="ctr">
+              <a:buNone/>
+            </a:pPr>
+            <a:r>
+              <a:rPr lang="en-US" sz="3200" dirty="0">
+                <a:solidFill>
+                  <a:srgbClr val="000000"/>
+                </a:solidFill>
+              </a:rPr>
+              <a:t>📊</a:t>
+            </a:r>
+            <a:endParaRPr lang="en-US" sz="3200" dirty="0"/>
+          </a:p>
+        </p:txBody>
+      </p:sp>
+      <p:sp>
+        <p:nvSpPr>
+          <p:cNvPr id="27" name="Text 25"/>
+          <p:cNvSpPr/>
+          <p:nvPr/>
+        </p:nvSpPr>
+        <p:spPr>
+          <a:xfrm>
+            <a:off x="3429000" y="3611880"/>
+            <a:ext cx="914400" cy="274320"/>
+          </a:xfrm>
+          <a:prstGeom prst="rect">
+            <a:avLst/>
+          </a:prstGeom>
+          <a:noFill/>
+          <a:ln/>
+        </p:spPr>
+        <p:txBody>
+          <a:bodyPr wrap="square" lIns="0" tIns="0" rIns="0" bIns="0" rtlCol="0" anchor="ctr"/>
+          <a:lstStyle/>
+          <a:p>
+            <a:pPr marL="0" indent="0" algn="l">
+              <a:buNone/>
+            </a:pPr>
+            <a:r>
+              <a:rPr lang="en-US" sz="1200" b="1" dirty="0">
+                <a:solidFill>
+                  <a:srgbClr val="4A90D9"/>
+                </a:solidFill>
+                <a:latin typeface="Arial" pitchFamily="34" charset="0"/>
+                <a:ea typeface="Arial" pitchFamily="34" charset="-122"/>
+                <a:cs typeface="Arial" pitchFamily="34" charset="-120"/>
+              </a:rPr>
+              <a:t>FIG-5</a:t>
+            </a:r>
+            <a:endParaRPr lang="en-US" sz="1200" dirty="0"/>
+          </a:p>
+        </p:txBody>
+      </p:sp>
+      <p:sp>
+        <p:nvSpPr>
+          <p:cNvPr id="28" name="Text 26"/>
+          <p:cNvSpPr/>
+          <p:nvPr/>
+        </p:nvSpPr>
+        <p:spPr>
+          <a:xfrm>
+            <a:off x="3429000" y="3840480"/>
+            <a:ext cx="2377440" cy="137160"/>
+          </a:xfrm>
+          <a:prstGeom prst="rect">
+            <a:avLst/>
+          </a:prstGeom>
+          <a:noFill/>
+          <a:ln/>
+        </p:spPr>
+        <p:txBody>
+          <a:bodyPr wrap="square" lIns="0" tIns="0" rIns="0" bIns="0" rtlCol="0" anchor="ctr"/>
+          <a:lstStyle/>
+          <a:p>
+            <a:pPr marL="0" indent="0" algn="l">
+              <a:buNone/>
+            </a:pPr>
+            <a:r>
+              <a:rPr lang="en-US" sz="1100" dirty="0">
+                <a:solidFill>
+                  <a:srgbClr val="64748B"/>
+                </a:solidFill>
+                <a:latin typeface="Arial" pitchFamily="34" charset="0"/>
+                <a:ea typeface="Arial" pitchFamily="34" charset="-122"/>
+                <a:cs typeface="Arial" pitchFamily="34" charset="-120"/>
+              </a:rPr>
+              <a:t>Relative vs Gap</a:t>
+            </a:r>
+            <a:endParaRPr lang="en-US" sz="1100" dirty="0"/>
           </a:p>
         </p:txBody>
       </p:sp>
@@ -2392,6 +2740,7 @@
         <a:solidFill>
           <a:srgbClr val="E8F0F8"/>
         </a:solidFill>
+        <a:effectLst/>
       </p:bgPr>
     </p:bg>
     <p:spTree>
@@ -2427,6 +2776,13 @@
           </a:solidFill>
           <a:ln/>
         </p:spPr>
+        <p:txBody>
+          <a:bodyPr/>
+          <a:lstStyle/>
+          <a:p>
+            <a:endParaRPr lang="zh-CN" altLang="en-US"/>
+          </a:p>
+        </p:txBody>
       </p:sp>
       <p:sp>
         <p:nvSpPr>
@@ -2449,7 +2805,7 @@
           <a:bodyPr wrap="square" lIns="0" tIns="0" rIns="0" bIns="0" rtlCol="0" anchor="ctr"/>
           <a:lstStyle/>
           <a:p>
-            <a:pPr algn="l" indent="0" marL="0">
+            <a:pPr marL="0" indent="0" algn="l">
               <a:buNone/>
             </a:pPr>
             <a:r>
@@ -2461,7 +2817,18 @@
                 <a:ea typeface="Arial" pitchFamily="34" charset="-122"/>
                 <a:cs typeface="Arial" pitchFamily="34" charset="-120"/>
               </a:rPr>
-              <a:t>7. 待补证据（建议带给导师）</a:t>
+              <a:t>7. </a:t>
+            </a:r>
+            <a:r>
+              <a:rPr lang="en-US" sz="2400" b="1" dirty="0" err="1">
+                <a:solidFill>
+                  <a:srgbClr val="FFFFFF"/>
+                </a:solidFill>
+                <a:latin typeface="Arial" pitchFamily="34" charset="0"/>
+                <a:ea typeface="Arial" pitchFamily="34" charset="-122"/>
+                <a:cs typeface="Arial" pitchFamily="34" charset="-120"/>
+              </a:rPr>
+              <a:t>待补证据</a:t>
             </a:r>
             <a:endParaRPr lang="en-US" sz="2400" dirty="0"/>
           </a:p>
@@ -2486,13 +2853,20 @@
           </a:solidFill>
           <a:ln/>
           <a:effectLst>
-            <a:outerShdw sx="100000" sy="100000" kx="0" ky="0" algn="bl" rotWithShape="0" blurRad="50800" dist="25400" dir="8100000">
+            <a:outerShdw blurRad="50800" dist="25400" dir="8100000" algn="bl" rotWithShape="0">
               <a:srgbClr val="000000">
                 <a:alpha val="15000"/>
               </a:srgbClr>
             </a:outerShdw>
           </a:effectLst>
         </p:spPr>
+        <p:txBody>
+          <a:bodyPr/>
+          <a:lstStyle/>
+          <a:p>
+            <a:endParaRPr lang="zh-CN" altLang="en-US"/>
+          </a:p>
+        </p:txBody>
       </p:sp>
       <p:sp>
         <p:nvSpPr>
@@ -2513,6 +2887,13 @@
           </a:solidFill>
           <a:ln/>
         </p:spPr>
+        <p:txBody>
+          <a:bodyPr/>
+          <a:lstStyle/>
+          <a:p>
+            <a:endParaRPr lang="zh-CN" altLang="en-US"/>
+          </a:p>
+        </p:txBody>
       </p:sp>
       <p:sp>
         <p:nvSpPr>
@@ -2535,7 +2916,7 @@
           <a:bodyPr wrap="square" lIns="0" tIns="0" rIns="0" bIns="0" rtlCol="0" anchor="ctr"/>
           <a:lstStyle/>
           <a:p>
-            <a:pPr algn="ctr" indent="0" marL="0">
+            <a:pPr marL="0" indent="0" algn="ctr">
               <a:buNone/>
             </a:pPr>
             <a:r>
@@ -2574,7 +2955,7 @@
           <a:bodyPr wrap="square" lIns="0" tIns="0" rIns="0" bIns="0" rtlCol="0" anchor="ctr"/>
           <a:lstStyle/>
           <a:p>
-            <a:pPr algn="l" indent="0" marL="0">
+            <a:pPr marL="0" indent="0" algn="l">
               <a:buNone/>
             </a:pPr>
             <a:r>
@@ -2613,7 +2994,7 @@
           <a:bodyPr wrap="square" lIns="0" tIns="0" rIns="0" bIns="0" rtlCol="0" anchor="ctr"/>
           <a:lstStyle/>
           <a:p>
-            <a:pPr algn="l" indent="0" marL="0">
+            <a:pPr marL="0" indent="0" algn="l">
               <a:buNone/>
             </a:pPr>
             <a:r>
@@ -2650,13 +3031,20 @@
           </a:solidFill>
           <a:ln/>
           <a:effectLst>
-            <a:outerShdw sx="100000" sy="100000" kx="0" ky="0" algn="bl" rotWithShape="0" blurRad="50800" dist="25400" dir="8100000">
+            <a:outerShdw blurRad="50800" dist="25400" dir="8100000" algn="bl" rotWithShape="0">
               <a:srgbClr val="000000">
                 <a:alpha val="15000"/>
               </a:srgbClr>
             </a:outerShdw>
           </a:effectLst>
         </p:spPr>
+        <p:txBody>
+          <a:bodyPr/>
+          <a:lstStyle/>
+          <a:p>
+            <a:endParaRPr lang="zh-CN" altLang="en-US"/>
+          </a:p>
+        </p:txBody>
       </p:sp>
       <p:sp>
         <p:nvSpPr>
@@ -2677,6 +3065,13 @@
           </a:solidFill>
           <a:ln/>
         </p:spPr>
+        <p:txBody>
+          <a:bodyPr/>
+          <a:lstStyle/>
+          <a:p>
+            <a:endParaRPr lang="zh-CN" altLang="en-US"/>
+          </a:p>
+        </p:txBody>
       </p:sp>
       <p:sp>
         <p:nvSpPr>
@@ -2699,7 +3094,7 @@
           <a:bodyPr wrap="square" lIns="0" tIns="0" rIns="0" bIns="0" rtlCol="0" anchor="ctr"/>
           <a:lstStyle/>
           <a:p>
-            <a:pPr algn="ctr" indent="0" marL="0">
+            <a:pPr marL="0" indent="0" algn="ctr">
               <a:buNone/>
             </a:pPr>
             <a:r>
@@ -2738,9 +3133,20 @@
           <a:bodyPr wrap="square" lIns="0" tIns="0" rIns="0" bIns="0" rtlCol="0" anchor="ctr"/>
           <a:lstStyle/>
           <a:p>
-            <a:pPr algn="l" indent="0" marL="0">
-              <a:buNone/>
-            </a:pPr>
+            <a:pPr marL="0" indent="0" algn="l">
+              <a:buNone/>
+            </a:pPr>
+            <a:r>
+              <a:rPr lang="en-US" sz="1600" b="1" dirty="0" err="1">
+                <a:solidFill>
+                  <a:srgbClr val="1E293B"/>
+                </a:solidFill>
+                <a:latin typeface="Arial" pitchFamily="34" charset="0"/>
+                <a:ea typeface="Arial" pitchFamily="34" charset="-122"/>
+                <a:cs typeface="Arial" pitchFamily="34" charset="-120"/>
+              </a:rPr>
+              <a:t>机制验证缺</a:t>
+            </a:r>
             <a:r>
               <a:rPr lang="en-US" sz="1600" b="1" dirty="0">
                 <a:solidFill>
@@ -2750,7 +3156,7 @@
                 <a:ea typeface="Arial" pitchFamily="34" charset="-122"/>
                 <a:cs typeface="Arial" pitchFamily="34" charset="-120"/>
               </a:rPr>
-              <a:t>机制验证缺 ablation</a:t>
+              <a:t> ablation </a:t>
             </a:r>
             <a:endParaRPr lang="en-US" sz="1600" dirty="0"/>
           </a:p>
@@ -2777,7 +3183,7 @@
           <a:bodyPr wrap="square" lIns="0" tIns="0" rIns="0" bIns="0" rtlCol="0" anchor="ctr"/>
           <a:lstStyle/>
           <a:p>
-            <a:pPr algn="l" indent="0" marL="0">
+            <a:pPr marL="0" indent="0" algn="l">
               <a:buNone/>
             </a:pPr>
             <a:r>
@@ -2814,13 +3220,20 @@
           </a:solidFill>
           <a:ln/>
           <a:effectLst>
-            <a:outerShdw sx="100000" sy="100000" kx="0" ky="0" algn="bl" rotWithShape="0" blurRad="50800" dist="25400" dir="8100000">
+            <a:outerShdw blurRad="50800" dist="25400" dir="8100000" algn="bl" rotWithShape="0">
               <a:srgbClr val="000000">
                 <a:alpha val="15000"/>
               </a:srgbClr>
             </a:outerShdw>
           </a:effectLst>
         </p:spPr>
+        <p:txBody>
+          <a:bodyPr/>
+          <a:lstStyle/>
+          <a:p>
+            <a:endParaRPr lang="zh-CN" altLang="en-US"/>
+          </a:p>
+        </p:txBody>
       </p:sp>
       <p:sp>
         <p:nvSpPr>
@@ -2841,6 +3254,13 @@
           </a:solidFill>
           <a:ln/>
         </p:spPr>
+        <p:txBody>
+          <a:bodyPr/>
+          <a:lstStyle/>
+          <a:p>
+            <a:endParaRPr lang="zh-CN" altLang="en-US"/>
+          </a:p>
+        </p:txBody>
       </p:sp>
       <p:sp>
         <p:nvSpPr>
@@ -2863,7 +3283,7 @@
           <a:bodyPr wrap="square" lIns="0" tIns="0" rIns="0" bIns="0" rtlCol="0" anchor="ctr"/>
           <a:lstStyle/>
           <a:p>
-            <a:pPr algn="ctr" indent="0" marL="0">
+            <a:pPr marL="0" indent="0" algn="ctr">
               <a:buNone/>
             </a:pPr>
             <a:r>
@@ -2902,11 +3322,11 @@
           <a:bodyPr wrap="square" lIns="0" tIns="0" rIns="0" bIns="0" rtlCol="0" anchor="ctr"/>
           <a:lstStyle/>
           <a:p>
-            <a:pPr algn="l" indent="0" marL="0">
-              <a:buNone/>
-            </a:pPr>
-            <a:r>
-              <a:rPr lang="en-US" sz="1600" b="1" dirty="0">
+            <a:pPr marL="0" indent="0" algn="l">
+              <a:buNone/>
+            </a:pPr>
+            <a:r>
+              <a:rPr lang="en-US" sz="1600" b="1">
                 <a:solidFill>
                   <a:srgbClr val="1E293B"/>
                 </a:solidFill>
@@ -2914,7 +3334,7 @@
                 <a:ea typeface="Arial" pitchFamily="34" charset="-122"/>
                 <a:cs typeface="Arial" pitchFamily="34" charset="-120"/>
               </a:rPr>
-              <a:t>外推证据不足</a:t>
+              <a:t>可选扩展：CV-Exp-1（scene graph）</a:t>
             </a:r>
             <a:endParaRPr lang="en-US" sz="1600" dirty="0"/>
           </a:p>
@@ -2941,7 +3361,7 @@
           <a:bodyPr wrap="square" lIns="0" tIns="0" rIns="0" bIns="0" rtlCol="0" anchor="ctr"/>
           <a:lstStyle/>
           <a:p>
-            <a:pPr algn="l" indent="0" marL="0">
+            <a:pPr marL="0" indent="0" algn="l">
               <a:buNone/>
             </a:pPr>
             <a:r>
@@ -2953,7 +3373,7 @@
                 <a:ea typeface="Arial" pitchFamily="34" charset="-122"/>
                 <a:cs typeface="Arial" pitchFamily="34" charset="-120"/>
               </a:rPr>
-              <a:t>若做下一轮扩展，优先加 1 个更大规模数据集验证趋势是否保真</a:t>
+              <a:t>最小包：1 组主表 + 1 组可视化，用于验证 CV 场景可迁移性</a:t>
             </a:r>
             <a:endParaRPr lang="en-US" sz="1400" dirty="0"/>
           </a:p>
@@ -2975,6 +3395,7 @@
         <a:solidFill>
           <a:srgbClr val="1E2761"/>
         </a:solidFill>
+        <a:effectLst/>
       </p:bgPr>
     </p:bg>
     <p:spTree>
@@ -3012,7 +3433,7 @@
           <a:bodyPr wrap="square" lIns="0" tIns="0" rIns="0" bIns="0" rtlCol="0" anchor="ctr"/>
           <a:lstStyle/>
           <a:p>
-            <a:pPr algn="ctr" indent="0" marL="0">
+            <a:pPr marL="0" indent="0" algn="ctr">
               <a:buNone/>
             </a:pPr>
             <a:r>
@@ -3051,7 +3472,7 @@
           <a:bodyPr wrap="square" lIns="0" tIns="0" rIns="0" bIns="0" rtlCol="0" anchor="ctr"/>
           <a:lstStyle/>
           <a:p>
-            <a:pPr algn="ctr" indent="0" marL="0">
+            <a:pPr marL="0" indent="0" algn="ctr">
               <a:buNone/>
             </a:pPr>
             <a:r>
@@ -3066,6 +3487,431 @@
               <a:t>Q &amp; A</a:t>
             </a:r>
             <a:endParaRPr lang="en-US" sz="2400" dirty="0"/>
+          </a:p>
+        </p:txBody>
+      </p:sp>
+    </p:spTree>
+  </p:cSld>
+  <p:clrMapOvr>
+    <a:masterClrMapping/>
+  </p:clrMapOvr>
+</p:sld>
+</file>
+
+<file path=ppt/slides/slide13.xml><?xml version="1.0" encoding="utf-8"?>
+<p:sld xmlns:a="http://schemas.openxmlformats.org/drawingml/2006/main" xmlns:r="http://schemas.openxmlformats.org/officeDocument/2006/relationships" xmlns:p="http://schemas.openxmlformats.org/presentationml/2006/main">
+  <p:cSld name="Slide 10">
+    <p:bg>
+      <p:bgPr>
+        <a:solidFill>
+          <a:srgbClr val="1E2761"/>
+        </a:solidFill>
+        <a:effectLst/>
+      </p:bgPr>
+    </p:bg>
+    <p:spTree>
+      <p:nvGrpSpPr>
+        <p:cNvPr id="1" name=""/>
+        <p:cNvGrpSpPr/>
+        <p:nvPr/>
+      </p:nvGrpSpPr>
+      <p:grpSpPr>
+        <a:xfrm>
+          <a:off x="0" y="0"/>
+          <a:ext cx="0" cy="0"/>
+          <a:chOff x="0" y="0"/>
+          <a:chExt cx="0" cy="0"/>
+        </a:xfrm>
+      </p:grpSpPr>
+      <p:sp>
+        <p:nvSpPr>
+          <p:cNvPr id="2" name="Text 0"/>
+          <p:cNvSpPr/>
+          <p:nvPr/>
+        </p:nvSpPr>
+        <p:spPr>
+          <a:xfrm>
+            <a:off x="457200" y="457200"/>
+            <a:ext cx="8229600" cy="548640"/>
+          </a:xfrm>
+          <a:prstGeom prst="rect">
+            <a:avLst/>
+          </a:prstGeom>
+          <a:noFill/>
+          <a:ln/>
+        </p:spPr>
+        <p:txBody>
+          <a:bodyPr wrap="square" lIns="0" tIns="0" rIns="0" bIns="0" rtlCol="0" anchor="ctr"/>
+          <a:lstStyle/>
+          <a:p>
+            <a:pPr marL="0" indent="0" algn="l">
+              <a:buNone/>
+            </a:pPr>
+            <a:r>
+              <a:rPr lang="en-US" sz="2800" b="1" dirty="0">
+                <a:solidFill>
+                  <a:srgbClr val="FFFFFF"/>
+                </a:solidFill>
+                <a:latin typeface="Arial" pitchFamily="34" charset="0"/>
+                <a:ea typeface="Arial" pitchFamily="34" charset="-122"/>
+                <a:cs typeface="Arial" pitchFamily="34" charset="-120"/>
+              </a:rPr>
+              <a:t>6. 面向下一次组会的简要结论</a:t>
+            </a:r>
+            <a:endParaRPr lang="en-US" sz="2800" dirty="0"/>
+          </a:p>
+        </p:txBody>
+      </p:sp>
+      <p:sp>
+        <p:nvSpPr>
+          <p:cNvPr id="3" name="Shape 1"/>
+          <p:cNvSpPr/>
+          <p:nvPr/>
+        </p:nvSpPr>
+        <p:spPr>
+          <a:xfrm>
+            <a:off x="457200" y="1005840"/>
+            <a:ext cx="1371600" cy="54864"/>
+          </a:xfrm>
+          <a:prstGeom prst="rect">
+            <a:avLst/>
+          </a:prstGeom>
+          <a:solidFill>
+            <a:srgbClr val="4A90D9"/>
+          </a:solidFill>
+          <a:ln/>
+        </p:spPr>
+        <p:txBody>
+          <a:bodyPr/>
+          <a:lstStyle/>
+          <a:p>
+            <a:endParaRPr lang="zh-CN" altLang="en-US"/>
+          </a:p>
+        </p:txBody>
+      </p:sp>
+      <p:sp>
+        <p:nvSpPr>
+          <p:cNvPr id="4" name="Shape 2"/>
+          <p:cNvSpPr/>
+          <p:nvPr/>
+        </p:nvSpPr>
+        <p:spPr>
+          <a:xfrm>
+            <a:off x="457200" y="1371600"/>
+            <a:ext cx="457200" cy="457200"/>
+          </a:xfrm>
+          <a:prstGeom prst="ellipse">
+            <a:avLst/>
+          </a:prstGeom>
+          <a:solidFill>
+            <a:srgbClr val="4A90D9"/>
+          </a:solidFill>
+          <a:ln/>
+        </p:spPr>
+        <p:txBody>
+          <a:bodyPr/>
+          <a:lstStyle/>
+          <a:p>
+            <a:endParaRPr lang="zh-CN" altLang="en-US"/>
+          </a:p>
+        </p:txBody>
+      </p:sp>
+      <p:sp>
+        <p:nvSpPr>
+          <p:cNvPr id="5" name="Text 3"/>
+          <p:cNvSpPr/>
+          <p:nvPr/>
+        </p:nvSpPr>
+        <p:spPr>
+          <a:xfrm>
+            <a:off x="457200" y="1371600"/>
+            <a:ext cx="457200" cy="457200"/>
+          </a:xfrm>
+          <a:prstGeom prst="rect">
+            <a:avLst/>
+          </a:prstGeom>
+          <a:noFill/>
+          <a:ln/>
+        </p:spPr>
+        <p:txBody>
+          <a:bodyPr wrap="square" lIns="0" tIns="0" rIns="0" bIns="0" rtlCol="0" anchor="ctr"/>
+          <a:lstStyle/>
+          <a:p>
+            <a:pPr marL="0" indent="0" algn="ctr">
+              <a:buNone/>
+            </a:pPr>
+            <a:r>
+              <a:rPr lang="en-US" sz="1800" b="1" dirty="0">
+                <a:solidFill>
+                  <a:srgbClr val="FFFFFF"/>
+                </a:solidFill>
+                <a:latin typeface="Arial" pitchFamily="34" charset="0"/>
+                <a:ea typeface="Arial" pitchFamily="34" charset="-122"/>
+                <a:cs typeface="Arial" pitchFamily="34" charset="-120"/>
+              </a:rPr>
+              <a:t>1</a:t>
+            </a:r>
+            <a:endParaRPr lang="en-US" sz="1800" dirty="0"/>
+          </a:p>
+        </p:txBody>
+      </p:sp>
+      <p:sp>
+        <p:nvSpPr>
+          <p:cNvPr id="6" name="Text 4"/>
+          <p:cNvSpPr/>
+          <p:nvPr/>
+        </p:nvSpPr>
+        <p:spPr>
+          <a:xfrm>
+            <a:off x="1097280" y="1417320"/>
+            <a:ext cx="7589520" cy="822960"/>
+          </a:xfrm>
+          <a:prstGeom prst="rect">
+            <a:avLst/>
+          </a:prstGeom>
+          <a:noFill/>
+          <a:ln/>
+        </p:spPr>
+        <p:txBody>
+          <a:bodyPr wrap="square" lIns="0" tIns="0" rIns="0" bIns="0" rtlCol="0" anchor="ctr"/>
+          <a:lstStyle/>
+          <a:p>
+            <a:pPr marL="0" indent="0" algn="l">
+              <a:buNone/>
+            </a:pPr>
+            <a:r>
+              <a:rPr lang="en-US" sz="1600" dirty="0" err="1">
+                <a:solidFill>
+                  <a:srgbClr val="FFFFFF"/>
+                </a:solidFill>
+                <a:latin typeface="Arial" pitchFamily="34" charset="0"/>
+                <a:ea typeface="Arial" pitchFamily="34" charset="-122"/>
+                <a:cs typeface="Arial" pitchFamily="34" charset="-120"/>
+              </a:rPr>
+              <a:t>已经把「攻击有效性」从「方法自身偏置」里分离来（Relative</a:t>
+            </a:r>
+            <a:r>
+              <a:rPr lang="en-US" sz="1600" dirty="0">
+                <a:solidFill>
+                  <a:srgbClr val="FFFFFF"/>
+                </a:solidFill>
+                <a:latin typeface="Arial" pitchFamily="34" charset="0"/>
+                <a:ea typeface="Arial" pitchFamily="34" charset="-122"/>
+                <a:cs typeface="Arial" pitchFamily="34" charset="-120"/>
+              </a:rPr>
+              <a:t> + k=5 baseline）</a:t>
+            </a:r>
+            <a:endParaRPr lang="en-US" sz="1600" dirty="0"/>
+          </a:p>
+        </p:txBody>
+      </p:sp>
+      <p:sp>
+        <p:nvSpPr>
+          <p:cNvPr id="7" name="Shape 5"/>
+          <p:cNvSpPr/>
+          <p:nvPr/>
+        </p:nvSpPr>
+        <p:spPr>
+          <a:xfrm>
+            <a:off x="457200" y="2468880"/>
+            <a:ext cx="457200" cy="457200"/>
+          </a:xfrm>
+          <a:prstGeom prst="ellipse">
+            <a:avLst/>
+          </a:prstGeom>
+          <a:solidFill>
+            <a:srgbClr val="4A90D9"/>
+          </a:solidFill>
+          <a:ln/>
+        </p:spPr>
+        <p:txBody>
+          <a:bodyPr/>
+          <a:lstStyle/>
+          <a:p>
+            <a:endParaRPr lang="zh-CN" altLang="en-US"/>
+          </a:p>
+        </p:txBody>
+      </p:sp>
+      <p:sp>
+        <p:nvSpPr>
+          <p:cNvPr id="8" name="Text 6"/>
+          <p:cNvSpPr/>
+          <p:nvPr/>
+        </p:nvSpPr>
+        <p:spPr>
+          <a:xfrm>
+            <a:off x="457200" y="2468880"/>
+            <a:ext cx="457200" cy="457200"/>
+          </a:xfrm>
+          <a:prstGeom prst="rect">
+            <a:avLst/>
+          </a:prstGeom>
+          <a:noFill/>
+          <a:ln/>
+        </p:spPr>
+        <p:txBody>
+          <a:bodyPr wrap="square" lIns="0" tIns="0" rIns="0" bIns="0" rtlCol="0" anchor="ctr"/>
+          <a:lstStyle/>
+          <a:p>
+            <a:pPr marL="0" indent="0" algn="ctr">
+              <a:buNone/>
+            </a:pPr>
+            <a:r>
+              <a:rPr lang="en-US" sz="1800" b="1" dirty="0">
+                <a:solidFill>
+                  <a:srgbClr val="FFFFFF"/>
+                </a:solidFill>
+                <a:latin typeface="Arial" pitchFamily="34" charset="0"/>
+                <a:ea typeface="Arial" pitchFamily="34" charset="-122"/>
+                <a:cs typeface="Arial" pitchFamily="34" charset="-120"/>
+              </a:rPr>
+              <a:t>2</a:t>
+            </a:r>
+            <a:endParaRPr lang="en-US" sz="1800" dirty="0"/>
+          </a:p>
+        </p:txBody>
+      </p:sp>
+      <p:sp>
+        <p:nvSpPr>
+          <p:cNvPr id="9" name="Text 7"/>
+          <p:cNvSpPr/>
+          <p:nvPr/>
+        </p:nvSpPr>
+        <p:spPr>
+          <a:xfrm>
+            <a:off x="1097280" y="2514600"/>
+            <a:ext cx="7589520" cy="822960"/>
+          </a:xfrm>
+          <a:prstGeom prst="rect">
+            <a:avLst/>
+          </a:prstGeom>
+          <a:noFill/>
+          <a:ln/>
+        </p:spPr>
+        <p:txBody>
+          <a:bodyPr wrap="square" lIns="0" tIns="0" rIns="0" bIns="0" rtlCol="0" anchor="ctr"/>
+          <a:lstStyle/>
+          <a:p>
+            <a:pPr marL="0" indent="0" algn="l">
+              <a:buNone/>
+            </a:pPr>
+            <a:r>
+              <a:rPr lang="en-US" sz="1600" dirty="0">
+                <a:solidFill>
+                  <a:srgbClr val="FFFFFF"/>
+                </a:solidFill>
+                <a:latin typeface="Arial" pitchFamily="34" charset="0"/>
+                <a:ea typeface="Arial" pitchFamily="34" charset="-122"/>
+                <a:cs typeface="Arial" pitchFamily="34" charset="-120"/>
+              </a:rPr>
+              <a:t>IF 与 IM 的算力路径已明确：TracIn（当前可执行）+ IM v4（当前高效）+ D-SSA（大图下一步）</a:t>
+            </a:r>
+            <a:endParaRPr lang="en-US" sz="1600" dirty="0"/>
+          </a:p>
+        </p:txBody>
+      </p:sp>
+      <p:sp>
+        <p:nvSpPr>
+          <p:cNvPr id="10" name="Shape 8"/>
+          <p:cNvSpPr/>
+          <p:nvPr/>
+        </p:nvSpPr>
+        <p:spPr>
+          <a:xfrm>
+            <a:off x="457200" y="3566160"/>
+            <a:ext cx="457200" cy="457200"/>
+          </a:xfrm>
+          <a:prstGeom prst="ellipse">
+            <a:avLst/>
+          </a:prstGeom>
+          <a:solidFill>
+            <a:srgbClr val="4A90D9"/>
+          </a:solidFill>
+          <a:ln/>
+        </p:spPr>
+        <p:txBody>
+          <a:bodyPr/>
+          <a:lstStyle/>
+          <a:p>
+            <a:endParaRPr lang="zh-CN" altLang="en-US"/>
+          </a:p>
+        </p:txBody>
+      </p:sp>
+      <p:sp>
+        <p:nvSpPr>
+          <p:cNvPr id="11" name="Text 9"/>
+          <p:cNvSpPr/>
+          <p:nvPr/>
+        </p:nvSpPr>
+        <p:spPr>
+          <a:xfrm>
+            <a:off x="457200" y="3566160"/>
+            <a:ext cx="457200" cy="457200"/>
+          </a:xfrm>
+          <a:prstGeom prst="rect">
+            <a:avLst/>
+          </a:prstGeom>
+          <a:noFill/>
+          <a:ln/>
+        </p:spPr>
+        <p:txBody>
+          <a:bodyPr wrap="square" lIns="0" tIns="0" rIns="0" bIns="0" rtlCol="0" anchor="ctr"/>
+          <a:lstStyle/>
+          <a:p>
+            <a:pPr marL="0" indent="0" algn="ctr">
+              <a:buNone/>
+            </a:pPr>
+            <a:r>
+              <a:rPr lang="en-US" sz="1800" b="1" dirty="0">
+                <a:solidFill>
+                  <a:srgbClr val="FFFFFF"/>
+                </a:solidFill>
+                <a:latin typeface="Arial" pitchFamily="34" charset="0"/>
+                <a:ea typeface="Arial" pitchFamily="34" charset="-122"/>
+                <a:cs typeface="Arial" pitchFamily="34" charset="-120"/>
+              </a:rPr>
+              <a:t>3</a:t>
+            </a:r>
+            <a:endParaRPr lang="en-US" sz="1800" dirty="0"/>
+          </a:p>
+        </p:txBody>
+      </p:sp>
+      <p:sp>
+        <p:nvSpPr>
+          <p:cNvPr id="12" name="Text 10"/>
+          <p:cNvSpPr/>
+          <p:nvPr/>
+        </p:nvSpPr>
+        <p:spPr>
+          <a:xfrm>
+            <a:off x="1097280" y="3611880"/>
+            <a:ext cx="7589520" cy="822960"/>
+          </a:xfrm>
+          <a:prstGeom prst="rect">
+            <a:avLst/>
+          </a:prstGeom>
+          <a:noFill/>
+          <a:ln/>
+        </p:spPr>
+        <p:txBody>
+          <a:bodyPr wrap="square" lIns="0" tIns="0" rIns="0" bIns="0" rtlCol="0" anchor="ctr"/>
+          <a:lstStyle/>
+          <a:p>
+            <a:pPr marL="0" indent="0" algn="l">
+              <a:buNone/>
+            </a:pPr>
+            <a:r>
+              <a:rPr lang="en-US" sz="1600" dirty="0">
+                <a:solidFill>
+                  <a:srgbClr val="FFFFFF"/>
+                </a:solidFill>
+                <a:latin typeface="Arial" pitchFamily="34" charset="0"/>
+                <a:ea typeface="Arial" pitchFamily="34" charset="-122"/>
+                <a:cs typeface="Arial" pitchFamily="34" charset="-120"/>
+              </a:rPr>
+              <a:t>关键发现：Shard-based「变好」主要来自方法本身机制；但 Relative 口径下攻击增益并非 0，需明确「双层结论」</a:t>
+            </a:r>
+            <a:endParaRPr lang="en-US" sz="1600" dirty="0"/>
           </a:p>
         </p:txBody>
       </p:sp>
@@ -3085,6 +3931,7 @@
         <a:solidFill>
           <a:srgbClr val="E8F0F8"/>
         </a:solidFill>
+        <a:effectLst/>
       </p:bgPr>
     </p:bg>
     <p:spTree>
@@ -3120,6 +3967,13 @@
           </a:solidFill>
           <a:ln/>
         </p:spPr>
+        <p:txBody>
+          <a:bodyPr/>
+          <a:lstStyle/>
+          <a:p>
+            <a:endParaRPr lang="zh-CN" altLang="en-US"/>
+          </a:p>
+        </p:txBody>
       </p:sp>
       <p:sp>
         <p:nvSpPr>
@@ -3142,7 +3996,7 @@
           <a:bodyPr wrap="square" lIns="0" tIns="0" rIns="0" bIns="0" rtlCol="0" anchor="ctr"/>
           <a:lstStyle/>
           <a:p>
-            <a:pPr algn="l" indent="0" marL="0">
+            <a:pPr marL="0" indent="0" algn="l">
               <a:buNone/>
             </a:pPr>
             <a:r>
@@ -3179,13 +4033,20 @@
           </a:solidFill>
           <a:ln/>
           <a:effectLst>
-            <a:outerShdw sx="100000" sy="100000" kx="0" ky="0" algn="bl" rotWithShape="0" blurRad="50800" dist="25400" dir="8100000">
+            <a:outerShdw blurRad="50800" dist="25400" dir="8100000" algn="bl" rotWithShape="0">
               <a:srgbClr val="000000">
                 <a:alpha val="15000"/>
               </a:srgbClr>
             </a:outerShdw>
           </a:effectLst>
         </p:spPr>
+        <p:txBody>
+          <a:bodyPr/>
+          <a:lstStyle/>
+          <a:p>
+            <a:endParaRPr lang="zh-CN" altLang="en-US"/>
+          </a:p>
+        </p:txBody>
       </p:sp>
       <p:sp>
         <p:nvSpPr>
@@ -3206,6 +4067,13 @@
           </a:solidFill>
           <a:ln/>
         </p:spPr>
+        <p:txBody>
+          <a:bodyPr/>
+          <a:lstStyle/>
+          <a:p>
+            <a:endParaRPr lang="zh-CN" altLang="en-US"/>
+          </a:p>
+        </p:txBody>
       </p:sp>
       <p:sp>
         <p:nvSpPr>
@@ -3228,7 +4096,7 @@
           <a:bodyPr wrap="square" lIns="0" tIns="0" rIns="0" bIns="0" rtlCol="0" anchor="ctr"/>
           <a:lstStyle/>
           <a:p>
-            <a:pPr algn="l" indent="0" marL="0">
+            <a:pPr marL="0" indent="0" algn="l">
               <a:buNone/>
             </a:pPr>
             <a:r>
@@ -3267,7 +4135,7 @@
           <a:bodyPr wrap="square" lIns="0" tIns="0" rIns="0" bIns="0" rtlCol="0" anchor="ctr"/>
           <a:lstStyle/>
           <a:p>
-            <a:pPr algn="l" indent="0" marL="0">
+            <a:pPr marL="0" indent="0" algn="l">
               <a:buNone/>
             </a:pPr>
             <a:r>
@@ -3306,7 +4174,7 @@
           <a:bodyPr wrap="square" lIns="0" tIns="0" rIns="0" bIns="0" rtlCol="0" anchor="ctr"/>
           <a:lstStyle/>
           <a:p>
-            <a:pPr algn="l" indent="0" marL="0">
+            <a:pPr marL="0" indent="0" algn="l">
               <a:buNone/>
             </a:pPr>
             <a:r>
@@ -3345,7 +4213,7 @@
           <a:bodyPr wrap="square" lIns="0" tIns="0" rIns="0" bIns="0" rtlCol="0" anchor="ctr"/>
           <a:lstStyle/>
           <a:p>
-            <a:pPr algn="l" indent="0" marL="0">
+            <a:pPr marL="0" indent="0" algn="l">
               <a:buNone/>
             </a:pPr>
             <a:r>
@@ -3379,6 +4247,7 @@
         <a:solidFill>
           <a:srgbClr val="E8F0F8"/>
         </a:solidFill>
+        <a:effectLst/>
       </p:bgPr>
     </p:bg>
     <p:spTree>
@@ -3414,6 +4283,13 @@
           </a:solidFill>
           <a:ln/>
         </p:spPr>
+        <p:txBody>
+          <a:bodyPr/>
+          <a:lstStyle/>
+          <a:p>
+            <a:endParaRPr lang="zh-CN" altLang="en-US"/>
+          </a:p>
+        </p:txBody>
       </p:sp>
       <p:sp>
         <p:nvSpPr>
@@ -3436,7 +4312,7 @@
           <a:bodyPr wrap="square" lIns="0" tIns="0" rIns="0" bIns="0" rtlCol="0" anchor="ctr"/>
           <a:lstStyle/>
           <a:p>
-            <a:pPr algn="l" indent="0" marL="0">
+            <a:pPr marL="0" indent="0" algn="l">
               <a:buNone/>
             </a:pPr>
             <a:r>
@@ -3473,6 +4349,13 @@
           </a:solidFill>
           <a:ln/>
         </p:spPr>
+        <p:txBody>
+          <a:bodyPr/>
+          <a:lstStyle/>
+          <a:p>
+            <a:endParaRPr lang="zh-CN" altLang="en-US"/>
+          </a:p>
+        </p:txBody>
       </p:sp>
       <p:sp>
         <p:nvSpPr>
@@ -3495,7 +4378,7 @@
           <a:bodyPr wrap="square" lIns="0" tIns="0" rIns="0" bIns="0" rtlCol="0" anchor="ctr"/>
           <a:lstStyle/>
           <a:p>
-            <a:pPr algn="ctr" indent="0" marL="0">
+            <a:pPr marL="0" indent="0" algn="ctr">
               <a:buNone/>
             </a:pPr>
             <a:r>
@@ -3534,7 +4417,7 @@
           <a:bodyPr wrap="square" lIns="0" tIns="0" rIns="0" bIns="0" rtlCol="0" anchor="ctr"/>
           <a:lstStyle/>
           <a:p>
-            <a:pPr algn="l" indent="0" marL="0">
+            <a:pPr marL="0" indent="0" algn="l">
               <a:buNone/>
             </a:pPr>
             <a:r>
@@ -3573,7 +4456,7 @@
           <a:bodyPr wrap="square" lIns="0" tIns="0" rIns="0" bIns="0" rtlCol="0" anchor="ctr"/>
           <a:lstStyle/>
           <a:p>
-            <a:pPr algn="l" indent="0" marL="0">
+            <a:pPr marL="0" indent="0" algn="l">
               <a:buNone/>
             </a:pPr>
             <a:r>
@@ -3610,6 +4493,13 @@
           </a:solidFill>
           <a:ln/>
         </p:spPr>
+        <p:txBody>
+          <a:bodyPr/>
+          <a:lstStyle/>
+          <a:p>
+            <a:endParaRPr lang="zh-CN" altLang="en-US"/>
+          </a:p>
+        </p:txBody>
       </p:sp>
       <p:sp>
         <p:nvSpPr>
@@ -3632,7 +4522,7 @@
           <a:bodyPr wrap="square" lIns="0" tIns="0" rIns="0" bIns="0" rtlCol="0" anchor="ctr"/>
           <a:lstStyle/>
           <a:p>
-            <a:pPr algn="ctr" indent="0" marL="0">
+            <a:pPr marL="0" indent="0" algn="ctr">
               <a:buNone/>
             </a:pPr>
             <a:r>
@@ -3671,7 +4561,7 @@
           <a:bodyPr wrap="square" lIns="0" tIns="0" rIns="0" bIns="0" rtlCol="0" anchor="ctr"/>
           <a:lstStyle/>
           <a:p>
-            <a:pPr algn="l" indent="0" marL="0">
+            <a:pPr marL="0" indent="0" algn="l">
               <a:buNone/>
             </a:pPr>
             <a:r>
@@ -3710,7 +4600,7 @@
           <a:bodyPr wrap="square" lIns="0" tIns="0" rIns="0" bIns="0" rtlCol="0" anchor="ctr"/>
           <a:lstStyle/>
           <a:p>
-            <a:pPr algn="l" indent="0" marL="0">
+            <a:pPr marL="0" indent="0" algn="l">
               <a:buNone/>
             </a:pPr>
             <a:r>
@@ -3747,6 +4637,13 @@
           </a:solidFill>
           <a:ln/>
         </p:spPr>
+        <p:txBody>
+          <a:bodyPr/>
+          <a:lstStyle/>
+          <a:p>
+            <a:endParaRPr lang="zh-CN" altLang="en-US"/>
+          </a:p>
+        </p:txBody>
       </p:sp>
       <p:sp>
         <p:nvSpPr>
@@ -3769,7 +4666,7 @@
           <a:bodyPr wrap="square" lIns="0" tIns="0" rIns="0" bIns="0" rtlCol="0" anchor="ctr"/>
           <a:lstStyle/>
           <a:p>
-            <a:pPr algn="ctr" indent="0" marL="0">
+            <a:pPr marL="0" indent="0" algn="ctr">
               <a:buNone/>
             </a:pPr>
             <a:r>
@@ -3808,7 +4705,7 @@
           <a:bodyPr wrap="square" lIns="0" tIns="0" rIns="0" bIns="0" rtlCol="0" anchor="ctr"/>
           <a:lstStyle/>
           <a:p>
-            <a:pPr algn="l" indent="0" marL="0">
+            <a:pPr marL="0" indent="0" algn="l">
               <a:buNone/>
             </a:pPr>
             <a:r>
@@ -3847,7 +4744,7 @@
           <a:bodyPr wrap="square" lIns="0" tIns="0" rIns="0" bIns="0" rtlCol="0" anchor="ctr"/>
           <a:lstStyle/>
           <a:p>
-            <a:pPr algn="l" indent="0" marL="0">
+            <a:pPr marL="0" indent="0" algn="l">
               <a:buNone/>
             </a:pPr>
             <a:r>
@@ -3884,6 +4781,13 @@
           </a:solidFill>
           <a:ln/>
         </p:spPr>
+        <p:txBody>
+          <a:bodyPr/>
+          <a:lstStyle/>
+          <a:p>
+            <a:endParaRPr lang="zh-CN" altLang="en-US"/>
+          </a:p>
+        </p:txBody>
       </p:sp>
       <p:sp>
         <p:nvSpPr>
@@ -3906,7 +4810,7 @@
           <a:bodyPr wrap="square" lIns="0" tIns="0" rIns="0" bIns="0" rtlCol="0" anchor="ctr"/>
           <a:lstStyle/>
           <a:p>
-            <a:pPr algn="ctr" indent="0" marL="0">
+            <a:pPr marL="0" indent="0" algn="ctr">
               <a:buNone/>
             </a:pPr>
             <a:r>
@@ -3945,7 +4849,7 @@
           <a:bodyPr wrap="square" lIns="0" tIns="0" rIns="0" bIns="0" rtlCol="0" anchor="ctr"/>
           <a:lstStyle/>
           <a:p>
-            <a:pPr algn="l" indent="0" marL="0">
+            <a:pPr marL="0" indent="0" algn="l">
               <a:buNone/>
             </a:pPr>
             <a:r>
@@ -3984,7 +4888,7 @@
           <a:bodyPr wrap="square" lIns="0" tIns="0" rIns="0" bIns="0" rtlCol="0" anchor="ctr"/>
           <a:lstStyle/>
           <a:p>
-            <a:pPr algn="l" indent="0" marL="0">
+            <a:pPr marL="0" indent="0" algn="l">
               <a:buNone/>
             </a:pPr>
             <a:r>
@@ -4021,6 +4925,13 @@
           </a:solidFill>
           <a:ln/>
         </p:spPr>
+        <p:txBody>
+          <a:bodyPr/>
+          <a:lstStyle/>
+          <a:p>
+            <a:endParaRPr lang="zh-CN" altLang="en-US"/>
+          </a:p>
+        </p:txBody>
       </p:sp>
       <p:sp>
         <p:nvSpPr>
@@ -4043,7 +4954,7 @@
           <a:bodyPr wrap="square" lIns="0" tIns="0" rIns="0" bIns="0" rtlCol="0" anchor="ctr"/>
           <a:lstStyle/>
           <a:p>
-            <a:pPr algn="ctr" indent="0" marL="0">
+            <a:pPr marL="0" indent="0" algn="ctr">
               <a:buNone/>
             </a:pPr>
             <a:r>
@@ -4082,7 +4993,7 @@
           <a:bodyPr wrap="square" lIns="0" tIns="0" rIns="0" bIns="0" rtlCol="0" anchor="ctr"/>
           <a:lstStyle/>
           <a:p>
-            <a:pPr algn="l" indent="0" marL="0">
+            <a:pPr marL="0" indent="0" algn="l">
               <a:buNone/>
             </a:pPr>
             <a:r>
@@ -4121,7 +5032,7 @@
           <a:bodyPr wrap="square" lIns="0" tIns="0" rIns="0" bIns="0" rtlCol="0" anchor="ctr"/>
           <a:lstStyle/>
           <a:p>
-            <a:pPr algn="l" indent="0" marL="0">
+            <a:pPr marL="0" indent="0" algn="l">
               <a:buNone/>
             </a:pPr>
             <a:r>
@@ -4160,7 +5071,7 @@
           <a:bodyPr wrap="square" lIns="0" tIns="0" rIns="0" bIns="0" rtlCol="0" anchor="ctr"/>
           <a:lstStyle/>
           <a:p>
-            <a:pPr algn="ctr" indent="0" marL="0">
+            <a:pPr marL="0" indent="0" algn="ctr">
               <a:buNone/>
             </a:pPr>
             <a:r>
@@ -4191,6 +5102,7 @@
         <a:solidFill>
           <a:srgbClr val="E8F0F8"/>
         </a:solidFill>
+        <a:effectLst/>
       </p:bgPr>
     </p:bg>
     <p:spTree>
@@ -4226,6 +5138,13 @@
           </a:solidFill>
           <a:ln/>
         </p:spPr>
+        <p:txBody>
+          <a:bodyPr/>
+          <a:lstStyle/>
+          <a:p>
+            <a:endParaRPr lang="zh-CN" altLang="en-US"/>
+          </a:p>
+        </p:txBody>
       </p:sp>
       <p:sp>
         <p:nvSpPr>
@@ -4248,7 +5167,7 @@
           <a:bodyPr wrap="square" lIns="0" tIns="0" rIns="0" bIns="0" rtlCol="0" anchor="ctr"/>
           <a:lstStyle/>
           <a:p>
-            <a:pPr algn="l" indent="0" marL="0">
+            <a:pPr marL="0" indent="0" algn="l">
               <a:buNone/>
             </a:pPr>
             <a:r>
@@ -4285,13 +5204,20 @@
           </a:solidFill>
           <a:ln/>
           <a:effectLst>
-            <a:outerShdw sx="100000" sy="100000" kx="0" ky="0" algn="bl" rotWithShape="0" blurRad="50800" dist="25400" dir="8100000">
+            <a:outerShdw blurRad="50800" dist="25400" dir="8100000" algn="bl" rotWithShape="0">
               <a:srgbClr val="000000">
                 <a:alpha val="15000"/>
               </a:srgbClr>
             </a:outerShdw>
           </a:effectLst>
         </p:spPr>
+        <p:txBody>
+          <a:bodyPr/>
+          <a:lstStyle/>
+          <a:p>
+            <a:endParaRPr lang="zh-CN" altLang="en-US"/>
+          </a:p>
+        </p:txBody>
       </p:sp>
       <p:sp>
         <p:nvSpPr>
@@ -4314,7 +5240,7 @@
           <a:bodyPr wrap="square" lIns="0" tIns="0" rIns="0" bIns="0" rtlCol="0" anchor="ctr"/>
           <a:lstStyle/>
           <a:p>
-            <a:pPr algn="l" indent="0" marL="0">
+            <a:pPr marL="0" indent="0" algn="l">
               <a:buNone/>
             </a:pPr>
             <a:r>
@@ -4353,7 +5279,7 @@
           <a:bodyPr wrap="square" lIns="0" tIns="0" rIns="0" bIns="0" rtlCol="0" anchor="ctr"/>
           <a:lstStyle/>
           <a:p>
-            <a:pPr algn="l" indent="0" marL="0">
+            <a:pPr marL="0" indent="0" algn="l">
               <a:buNone/>
             </a:pPr>
             <a:r>
@@ -4390,13 +5316,20 @@
           </a:solidFill>
           <a:ln/>
           <a:effectLst>
-            <a:outerShdw sx="100000" sy="100000" kx="0" ky="0" algn="bl" rotWithShape="0" blurRad="50800" dist="25400" dir="8100000">
+            <a:outerShdw blurRad="50800" dist="25400" dir="8100000" algn="bl" rotWithShape="0">
               <a:srgbClr val="000000">
                 <a:alpha val="15000"/>
               </a:srgbClr>
             </a:outerShdw>
           </a:effectLst>
         </p:spPr>
+        <p:txBody>
+          <a:bodyPr/>
+          <a:lstStyle/>
+          <a:p>
+            <a:endParaRPr lang="zh-CN" altLang="en-US"/>
+          </a:p>
+        </p:txBody>
       </p:sp>
       <p:sp>
         <p:nvSpPr>
@@ -4419,7 +5352,7 @@
           <a:bodyPr wrap="square" lIns="0" tIns="0" rIns="0" bIns="0" rtlCol="0" anchor="ctr"/>
           <a:lstStyle/>
           <a:p>
-            <a:pPr algn="l" indent="0" marL="0">
+            <a:pPr marL="0" indent="0" algn="l">
               <a:buNone/>
             </a:pPr>
             <a:r>
@@ -4458,7 +5391,7 @@
           <a:bodyPr wrap="square" lIns="0" tIns="0" rIns="0" bIns="0" rtlCol="0" anchor="ctr"/>
           <a:lstStyle/>
           <a:p>
-            <a:pPr algn="l" indent="0" marL="0">
+            <a:pPr marL="0" indent="0" algn="l">
               <a:buNone/>
             </a:pPr>
             <a:r>
@@ -4495,13 +5428,20 @@
           </a:solidFill>
           <a:ln/>
           <a:effectLst>
-            <a:outerShdw sx="100000" sy="100000" kx="0" ky="0" algn="bl" rotWithShape="0" blurRad="50800" dist="25400" dir="8100000">
+            <a:outerShdw blurRad="50800" dist="25400" dir="8100000" algn="bl" rotWithShape="0">
               <a:srgbClr val="000000">
                 <a:alpha val="15000"/>
               </a:srgbClr>
             </a:outerShdw>
           </a:effectLst>
         </p:spPr>
+        <p:txBody>
+          <a:bodyPr/>
+          <a:lstStyle/>
+          <a:p>
+            <a:endParaRPr lang="zh-CN" altLang="en-US"/>
+          </a:p>
+        </p:txBody>
       </p:sp>
       <p:sp>
         <p:nvSpPr>
@@ -4524,7 +5464,7 @@
           <a:bodyPr wrap="square" lIns="0" tIns="0" rIns="0" bIns="0" rtlCol="0" anchor="ctr"/>
           <a:lstStyle/>
           <a:p>
-            <a:pPr algn="l" indent="0" marL="0">
+            <a:pPr marL="0" indent="0" algn="l">
               <a:buNone/>
             </a:pPr>
             <a:r>
@@ -4563,7 +5503,7 @@
           <a:bodyPr wrap="square" lIns="0" tIns="0" rIns="0" bIns="0" rtlCol="0" anchor="ctr"/>
           <a:lstStyle/>
           <a:p>
-            <a:pPr algn="l" indent="0" marL="0">
+            <a:pPr marL="0" indent="0" algn="l">
               <a:buNone/>
             </a:pPr>
             <a:r>
@@ -4600,13 +5540,20 @@
           </a:solidFill>
           <a:ln/>
           <a:effectLst>
-            <a:outerShdw sx="100000" sy="100000" kx="0" ky="0" algn="bl" rotWithShape="0" blurRad="50800" dist="25400" dir="8100000">
+            <a:outerShdw blurRad="50800" dist="25400" dir="8100000" algn="bl" rotWithShape="0">
               <a:srgbClr val="000000">
                 <a:alpha val="15000"/>
               </a:srgbClr>
             </a:outerShdw>
           </a:effectLst>
         </p:spPr>
+        <p:txBody>
+          <a:bodyPr/>
+          <a:lstStyle/>
+          <a:p>
+            <a:endParaRPr lang="zh-CN" altLang="en-US"/>
+          </a:p>
+        </p:txBody>
       </p:sp>
       <p:sp>
         <p:nvSpPr>
@@ -4629,7 +5576,7 @@
           <a:bodyPr wrap="square" lIns="0" tIns="0" rIns="0" bIns="0" rtlCol="0" anchor="ctr"/>
           <a:lstStyle/>
           <a:p>
-            <a:pPr algn="l" indent="0" marL="0">
+            <a:pPr marL="0" indent="0" algn="l">
               <a:buNone/>
             </a:pPr>
             <a:r>
@@ -4668,7 +5615,7 @@
           <a:bodyPr wrap="square" lIns="0" tIns="0" rIns="0" bIns="0" rtlCol="0" anchor="ctr"/>
           <a:lstStyle/>
           <a:p>
-            <a:pPr algn="l" indent="0" marL="0">
+            <a:pPr marL="0" indent="0" algn="l">
               <a:buNone/>
             </a:pPr>
             <a:r>
@@ -4707,7 +5654,7 @@
           <a:bodyPr wrap="square" lIns="0" tIns="0" rIns="0" bIns="0" rtlCol="0" anchor="ctr"/>
           <a:lstStyle/>
           <a:p>
-            <a:pPr algn="l" indent="0" marL="0">
+            <a:pPr marL="0" indent="0" algn="l">
               <a:buNone/>
             </a:pPr>
             <a:r>
@@ -4746,7 +5693,7 @@
           <a:bodyPr wrap="square" lIns="0" tIns="0" rIns="0" bIns="0" rtlCol="0" anchor="ctr"/>
           <a:lstStyle/>
           <a:p>
-            <a:pPr algn="l" indent="0" marL="0">
+            <a:pPr marL="0" indent="0" algn="l">
               <a:buNone/>
             </a:pPr>
             <a:r>
@@ -4785,7 +5732,7 @@
           <a:bodyPr wrap="square" lIns="0" tIns="0" rIns="0" bIns="0" rtlCol="0" anchor="ctr"/>
           <a:lstStyle/>
           <a:p>
-            <a:pPr algn="l" indent="0" marL="0">
+            <a:pPr marL="0" indent="0" algn="l">
               <a:buNone/>
             </a:pPr>
             <a:r>
@@ -4824,7 +5771,7 @@
           <a:bodyPr wrap="square" lIns="0" tIns="0" rIns="0" bIns="0" rtlCol="0" anchor="ctr"/>
           <a:lstStyle/>
           <a:p>
-            <a:pPr algn="l" indent="0" marL="0">
+            <a:pPr marL="0" indent="0" algn="l">
               <a:buNone/>
             </a:pPr>
             <a:r>
@@ -4863,7 +5810,7 @@
           <a:bodyPr wrap="square" lIns="0" tIns="0" rIns="0" bIns="0" rtlCol="0" anchor="ctr"/>
           <a:lstStyle/>
           <a:p>
-            <a:pPr algn="l" indent="0" marL="0">
+            <a:pPr marL="0" indent="0" algn="l">
               <a:buNone/>
             </a:pPr>
             <a:r>
@@ -4891,12 +5838,13 @@
 
 <file path=ppt/slides/slide5.xml><?xml version="1.0" encoding="utf-8"?>
 <p:sld xmlns:a="http://schemas.openxmlformats.org/drawingml/2006/main" xmlns:r="http://schemas.openxmlformats.org/officeDocument/2006/relationships" xmlns:p="http://schemas.openxmlformats.org/presentationml/2006/main">
-  <p:cSld name="Slide 5">
+  <p:cSld name="Slide 2">
     <p:bg>
       <p:bgPr>
         <a:solidFill>
           <a:srgbClr val="E8F0F8"/>
         </a:solidFill>
+        <a:effectLst/>
       </p:bgPr>
     </p:bg>
     <p:spTree>
@@ -4932,6 +5880,13 @@
           </a:solidFill>
           <a:ln/>
         </p:spPr>
+        <p:txBody>
+          <a:bodyPr/>
+          <a:lstStyle/>
+          <a:p>
+            <a:endParaRPr lang="zh-CN" altLang="en-US"/>
+          </a:p>
+        </p:txBody>
       </p:sp>
       <p:sp>
         <p:nvSpPr>
@@ -4954,7 +5909,7 @@
           <a:bodyPr wrap="square" lIns="0" tIns="0" rIns="0" bIns="0" rtlCol="0" anchor="ctr"/>
           <a:lstStyle/>
           <a:p>
-            <a:pPr algn="l" indent="0" marL="0">
+            <a:pPr marL="0" indent="0" algn="l">
               <a:buNone/>
             </a:pPr>
             <a:r>
@@ -4966,7 +5921,7 @@
                 <a:ea typeface="Arial" pitchFamily="34" charset="-122"/>
                 <a:cs typeface="Arial" pitchFamily="34" charset="-120"/>
               </a:rPr>
-              <a:t>2. 算力限制下的方法决策</a:t>
+              <a:t>1.1 Checklist Sec2 相关实验（按条）</a:t>
             </a:r>
             <a:endParaRPr lang="en-US" sz="2400" dirty="0"/>
           </a:p>
@@ -4980,8 +5935,8 @@
         </p:nvSpPr>
         <p:spPr>
           <a:xfrm>
-            <a:off x="457200" y="914400"/>
-            <a:ext cx="4023360" cy="2103120"/>
+            <a:off x="457200" y="1097280"/>
+            <a:ext cx="8229600" cy="3474720"/>
           </a:xfrm>
           <a:prstGeom prst="rect">
             <a:avLst/>
@@ -4991,13 +5946,20 @@
           </a:solidFill>
           <a:ln/>
           <a:effectLst>
-            <a:outerShdw sx="100000" sy="100000" kx="0" ky="0" algn="bl" rotWithShape="0" blurRad="50800" dist="25400" dir="8100000">
+            <a:outerShdw blurRad="50800" dist="25400" dir="8100000" algn="bl" rotWithShape="0">
               <a:srgbClr val="000000">
                 <a:alpha val="15000"/>
               </a:srgbClr>
             </a:outerShdw>
           </a:effectLst>
         </p:spPr>
+        <p:txBody>
+          <a:bodyPr/>
+          <a:lstStyle/>
+          <a:p>
+            <a:endParaRPr lang="zh-CN" altLang="en-US"/>
+          </a:p>
+        </p:txBody>
       </p:sp>
       <p:sp>
         <p:nvSpPr>
@@ -5007,8 +5969,8 @@
         </p:nvSpPr>
         <p:spPr>
           <a:xfrm>
-            <a:off x="457200" y="914400"/>
-            <a:ext cx="73152" cy="2103120"/>
+            <a:off x="457200" y="1097280"/>
+            <a:ext cx="73152" cy="3474720"/>
           </a:xfrm>
           <a:prstGeom prst="rect">
             <a:avLst/>
@@ -5018,6 +5980,13 @@
           </a:solidFill>
           <a:ln/>
         </p:spPr>
+        <p:txBody>
+          <a:bodyPr/>
+          <a:lstStyle/>
+          <a:p>
+            <a:endParaRPr lang="zh-CN" altLang="en-US"/>
+          </a:p>
+        </p:txBody>
       </p:sp>
       <p:sp>
         <p:nvSpPr>
@@ -5027,24 +5996,24 @@
         </p:nvSpPr>
         <p:spPr>
           <a:xfrm>
-            <a:off x="685800" y="1051560"/>
-            <a:ext cx="3657600" cy="365760"/>
-          </a:xfrm>
-          <a:prstGeom prst="rect">
-            <a:avLst/>
-          </a:prstGeom>
-          <a:noFill/>
-          <a:ln/>
-        </p:spPr>
-        <p:txBody>
-          <a:bodyPr wrap="square" lIns="0" tIns="0" rIns="0" bIns="0" rtlCol="0" anchor="ctr"/>
-          <a:lstStyle/>
-          <a:p>
-            <a:pPr algn="l" indent="0" marL="0">
-              <a:buNone/>
-            </a:pPr>
-            <a:r>
-              <a:rPr lang="en-US" sz="1600" b="1" dirty="0">
+            <a:off x="731520" y="1371600"/>
+            <a:ext cx="7680960" cy="731520"/>
+          </a:xfrm>
+          <a:prstGeom prst="rect">
+            <a:avLst/>
+          </a:prstGeom>
+          <a:noFill/>
+          <a:ln/>
+        </p:spPr>
+        <p:txBody>
+          <a:bodyPr wrap="square" lIns="0" tIns="0" rIns="0" bIns="0" rtlCol="0" anchor="ctr"/>
+          <a:lstStyle/>
+          <a:p>
+            <a:pPr marL="0" indent="0" algn="l">
+              <a:buNone/>
+            </a:pPr>
+            <a:r>
+              <a:rPr lang="en-US" sz="1800" b="1" dirty="0">
                 <a:solidFill>
                   <a:srgbClr val="1E293B"/>
                 </a:solidFill>
@@ -5052,7 +6021,106 @@
                 <a:ea typeface="Arial" pitchFamily="34" charset="-122"/>
                 <a:cs typeface="Arial" pitchFamily="34" charset="-120"/>
               </a:rPr>
-              <a:t>IF 框架: TracIn</a:t>
+              <a:t>项目仪表盘（Sec2）已完成相关实验：</a:t>
+            </a:r>
+            <a:endParaRPr lang="en-US" sz="1800" dirty="0"/>
+          </a:p>
+        </p:txBody>
+      </p:sp>
+      <p:sp>
+        <p:nvSpPr>
+          <p:cNvPr id="7" name="Text 5"/>
+          <p:cNvSpPr/>
+          <p:nvPr/>
+        </p:nvSpPr>
+        <p:spPr>
+          <a:xfrm>
+            <a:off x="731520" y="2103120"/>
+            <a:ext cx="7680960" cy="1371600"/>
+          </a:xfrm>
+          <a:prstGeom prst="rect">
+            <a:avLst/>
+          </a:prstGeom>
+          <a:noFill/>
+          <a:ln/>
+        </p:spPr>
+        <p:txBody>
+          <a:bodyPr wrap="square" lIns="0" tIns="0" rIns="0" bIns="0" rtlCol="0" anchor="ctr"/>
+          <a:lstStyle/>
+          <a:p>
+            <a:pPr marL="0" indent="0" algn="l">
+              <a:buNone/>
+            </a:pPr>
+            <a:r>
+              <a:rPr lang="en-US" sz="1300" dirty="0">
+                <a:solidFill>
+                  <a:srgbClr val="1E293B"/>
+                </a:solidFill>
+                <a:latin typeface="Arial" pitchFamily="34" charset="0"/>
+                <a:ea typeface="Arial" pitchFamily="34" charset="-122"/>
+                <a:cs typeface="Arial" pitchFamily="34" charset="-120"/>
+              </a:rPr>
+              <a:t>1) MG-0 稳定性：Cora/GCN/5 seeds（90 runs）</a:t>
+            </a:r>
+            <a:br/>
+            <a:r>
+              <a:rPr lang="en-US" sz="1300" dirty="0">
+                <a:solidFill>
+                  <a:srgbClr val="1E293B"/>
+                </a:solidFill>
+                <a:latin typeface="Arial" pitchFamily="34" charset="0"/>
+                <a:ea typeface="Arial" pitchFamily="34" charset="-122"/>
+                <a:cs typeface="Arial" pitchFamily="34" charset="-120"/>
+              </a:rPr>
+              <a:t>2) MG-1 跨数据集：Citeseer/GCN/5 seeds（90 runs）</a:t>
+            </a:r>
+            <a:br/>
+            <a:r>
+              <a:rPr lang="en-US" sz="1300" dirty="0">
+                <a:solidFill>
+                  <a:srgbClr val="1E293B"/>
+                </a:solidFill>
+                <a:latin typeface="Arial" pitchFamily="34" charset="0"/>
+                <a:ea typeface="Arial" pitchFamily="34" charset="-122"/>
+                <a:cs typeface="Arial" pitchFamily="34" charset="-120"/>
+              </a:rPr>
+              <a:t>3) MG-2 跨模型：Cora/GAT/5 seeds（90 runs）</a:t>
+            </a:r>
+            <a:br/>
+            <a:r>
+              <a:rPr lang="en-US" sz="1300" dirty="0">
+                <a:solidFill>
+                  <a:srgbClr val="1E293B"/>
+                </a:solidFill>
+                <a:latin typeface="Arial" pitchFamily="34" charset="0"/>
+                <a:ea typeface="Arial" pitchFamily="34" charset="-122"/>
+                <a:cs typeface="Arial" pitchFamily="34" charset="-120"/>
+              </a:rPr>
+              <a:t>4) MG-3 扩展方法：Citeseer(GCN)+Cora(GAT) / IDEA+MEGU（80 runs）</a:t>
+            </a:r>
+            <a:br/>
+            <a:r>
+              <a:rPr lang="en-US" sz="1300" dirty="0">
+                <a:solidFill>
+                  <a:srgbClr val="1E293B"/>
+                </a:solidFill>
+                <a:latin typeface="Arial" pitchFamily="34" charset="0"/>
+                <a:ea typeface="Arial" pitchFamily="34" charset="-122"/>
+                <a:cs typeface="Arial" pitchFamily="34" charset="-120"/>
+              </a:rPr>
+              <a:t>5) Ratio 敏感性：ratio=0.01/0.05/0.10/0.20（240 runs）</a:t>
+            </a:r>
+            <a:br/>
+            <a:r>
+              <a:rPr lang="en-US" sz="1300" dirty="0">
+                <a:solidFill>
+                  <a:srgbClr val="1E293B"/>
+                </a:solidFill>
+                <a:latin typeface="Arial" pitchFamily="34" charset="0"/>
+                <a:ea typeface="Arial" pitchFamily="34" charset="-122"/>
+                <a:cs typeface="Arial" pitchFamily="34" charset="-120"/>
+              </a:rPr>
+              <a:t>6) P2-EXT：GIF×{cora,citeseer}×{GCN,GAT,GIN}×r=0.10/0.20（360 runs）</a:t>
             </a:r>
             <a:endParaRPr lang="en-US" sz="1600" dirty="0"/>
           </a:p>
@@ -5060,288 +6128,30 @@
       </p:sp>
       <p:sp>
         <p:nvSpPr>
-          <p:cNvPr id="7" name="Text 5"/>
-          <p:cNvSpPr/>
-          <p:nvPr/>
-        </p:nvSpPr>
-        <p:spPr>
-          <a:xfrm>
-            <a:off x="685800" y="1463040"/>
-            <a:ext cx="3657600" cy="1371600"/>
-          </a:xfrm>
-          <a:prstGeom prst="rect">
-            <a:avLst/>
-          </a:prstGeom>
-          <a:noFill/>
-          <a:ln/>
-        </p:spPr>
-        <p:txBody>
-          <a:bodyPr wrap="square" lIns="0" tIns="0" rIns="0" bIns="0" rtlCol="0" anchor="ctr"/>
-          <a:lstStyle/>
-          <a:p>
-            <a:pPr algn="l" marL="342900" indent="-342900">
-              <a:buSzPct val="100000"/>
-              <a:buChar char="•"/>
-            </a:pPr>
-            <a:r>
-              <a:rPr lang="en-US" sz="1300" dirty="0">
-                <a:solidFill>
-                  <a:srgbClr val="1E293B"/>
-                </a:solidFill>
-                <a:latin typeface="Arial" pitchFamily="34" charset="0"/>
-                <a:ea typeface="Arial" pitchFamily="34" charset="-122"/>
-                <a:cs typeface="Arial" pitchFamily="34" charset="-120"/>
-              </a:rPr>
-              <a:t>精确 IF 开销爆炸</a:t>
-            </a:r>
-            <a:endParaRPr lang="en-US" sz="1300" dirty="0"/>
-          </a:p>
-          <a:p>
-            <a:pPr algn="l" marL="342900" indent="-342900">
-              <a:buSzPct val="100000"/>
-              <a:buChar char="•"/>
-            </a:pPr>
-            <a:r>
-              <a:rPr lang="en-US" sz="1300" dirty="0">
-                <a:solidFill>
-                  <a:srgbClr val="1E293B"/>
-                </a:solidFill>
-                <a:latin typeface="Arial" pitchFamily="34" charset="0"/>
-                <a:ea typeface="Arial" pitchFamily="34" charset="-122"/>
-                <a:cs typeface="Arial" pitchFamily="34" charset="-120"/>
-              </a:rPr>
-              <a:t>超大图可能到天/周/月级</a:t>
-            </a:r>
-            <a:endParaRPr lang="en-US" sz="1300" dirty="0"/>
-          </a:p>
-          <a:p>
-            <a:pPr algn="l" marL="342900" indent="-342900">
-              <a:buSzPct val="100000"/>
-              <a:buChar char="•"/>
-            </a:pPr>
-            <a:r>
-              <a:rPr lang="en-US" sz="1300" dirty="0">
-                <a:solidFill>
-                  <a:srgbClr val="1E293B"/>
-                </a:solidFill>
-                <a:latin typeface="Arial" pitchFamily="34" charset="0"/>
-                <a:ea typeface="Arial" pitchFamily="34" charset="-122"/>
-                <a:cs typeface="Arial" pitchFamily="34" charset="-120"/>
-              </a:rPr>
-              <a:t>采用 TracIn（一阶 pseudo-IF）作为可执行替代</a:t>
-            </a:r>
-            <a:endParaRPr lang="en-US" sz="1300" dirty="0"/>
-          </a:p>
-        </p:txBody>
-      </p:sp>
-      <p:sp>
-        <p:nvSpPr>
-          <p:cNvPr id="8" name="Shape 6"/>
-          <p:cNvSpPr/>
-          <p:nvPr/>
-        </p:nvSpPr>
-        <p:spPr>
-          <a:xfrm>
-            <a:off x="4663440" y="914400"/>
-            <a:ext cx="4023360" cy="2103120"/>
-          </a:xfrm>
-          <a:prstGeom prst="rect">
-            <a:avLst/>
-          </a:prstGeom>
-          <a:solidFill>
-            <a:srgbClr val="FFFFFF"/>
-          </a:solidFill>
-          <a:ln/>
-          <a:effectLst>
-            <a:outerShdw sx="100000" sy="100000" kx="0" ky="0" algn="bl" rotWithShape="0" blurRad="50800" dist="25400" dir="8100000">
-              <a:srgbClr val="000000">
-                <a:alpha val="15000"/>
-              </a:srgbClr>
-            </a:outerShdw>
-          </a:effectLst>
-        </p:spPr>
-      </p:sp>
-      <p:sp>
-        <p:nvSpPr>
-          <p:cNvPr id="9" name="Shape 7"/>
-          <p:cNvSpPr/>
-          <p:nvPr/>
-        </p:nvSpPr>
-        <p:spPr>
-          <a:xfrm>
-            <a:off x="4663440" y="914400"/>
-            <a:ext cx="73152" cy="2103120"/>
-          </a:xfrm>
-          <a:prstGeom prst="rect">
-            <a:avLst/>
-          </a:prstGeom>
-          <a:solidFill>
-            <a:srgbClr val="F59E0B"/>
-          </a:solidFill>
-          <a:ln/>
-        </p:spPr>
-      </p:sp>
-      <p:sp>
-        <p:nvSpPr>
-          <p:cNvPr id="10" name="Text 8"/>
-          <p:cNvSpPr/>
-          <p:nvPr/>
-        </p:nvSpPr>
-        <p:spPr>
-          <a:xfrm>
-            <a:off x="4892040" y="1051560"/>
-            <a:ext cx="3657600" cy="365760"/>
-          </a:xfrm>
-          <a:prstGeom prst="rect">
-            <a:avLst/>
-          </a:prstGeom>
-          <a:noFill/>
-          <a:ln/>
-        </p:spPr>
-        <p:txBody>
-          <a:bodyPr wrap="square" lIns="0" tIns="0" rIns="0" bIns="0" rtlCol="0" anchor="ctr"/>
-          <a:lstStyle/>
-          <a:p>
-            <a:pPr algn="l" indent="0" marL="0">
-              <a:buNone/>
-            </a:pPr>
-            <a:r>
-              <a:rPr lang="en-US" sz="1600" b="1" dirty="0">
-                <a:solidFill>
-                  <a:srgbClr val="1E293B"/>
-                </a:solidFill>
-                <a:latin typeface="Arial" pitchFamily="34" charset="0"/>
-                <a:ea typeface="Arial" pitchFamily="34" charset="-122"/>
-                <a:cs typeface="Arial" pitchFamily="34" charset="-120"/>
-              </a:rPr>
-              <a:t>IM 框架: IM v4</a:t>
-            </a:r>
-            <a:endParaRPr lang="en-US" sz="1600" dirty="0"/>
-          </a:p>
-        </p:txBody>
-      </p:sp>
-      <p:sp>
-        <p:nvSpPr>
-          <p:cNvPr id="11" name="Text 9"/>
-          <p:cNvSpPr/>
-          <p:nvPr/>
-        </p:nvSpPr>
-        <p:spPr>
-          <a:xfrm>
-            <a:off x="4892040" y="1463040"/>
-            <a:ext cx="3657600" cy="914400"/>
-          </a:xfrm>
-          <a:prstGeom prst="rect">
-            <a:avLst/>
-          </a:prstGeom>
-          <a:noFill/>
-          <a:ln/>
-        </p:spPr>
-        <p:txBody>
-          <a:bodyPr wrap="square" lIns="0" tIns="0" rIns="0" bIns="0" rtlCol="0" anchor="ctr"/>
-          <a:lstStyle/>
-          <a:p>
-            <a:pPr algn="l" marL="342900" indent="-342900">
-              <a:buSzPct val="100000"/>
-              <a:buChar char="•"/>
-            </a:pPr>
-            <a:r>
-              <a:rPr lang="en-US" sz="1300" dirty="0">
-                <a:solidFill>
-                  <a:srgbClr val="1E293B"/>
-                </a:solidFill>
-                <a:latin typeface="Arial" pitchFamily="34" charset="0"/>
-                <a:ea typeface="Arial" pitchFamily="34" charset="-122"/>
-                <a:cs typeface="Arial" pitchFamily="34" charset="-120"/>
-              </a:rPr>
-              <a:t>V0 时间: 652.97s</a:t>
-            </a:r>
-            <a:endParaRPr lang="en-US" sz="1300" dirty="0"/>
-          </a:p>
-          <a:p>
-            <a:pPr algn="l" marL="342900" indent="-342900">
-              <a:buSzPct val="100000"/>
-              <a:buChar char="•"/>
-            </a:pPr>
-            <a:r>
-              <a:rPr lang="en-US" sz="1300" dirty="0">
-                <a:solidFill>
-                  <a:srgbClr val="1E293B"/>
-                </a:solidFill>
-                <a:latin typeface="Arial" pitchFamily="34" charset="0"/>
-                <a:ea typeface="Arial" pitchFamily="34" charset="-122"/>
-                <a:cs typeface="Arial" pitchFamily="34" charset="-120"/>
-              </a:rPr>
-              <a:t>V4 时间: 18.90s</a:t>
-            </a:r>
-            <a:endParaRPr lang="en-US" sz="1300" dirty="0"/>
-          </a:p>
-          <a:p>
-            <a:pPr algn="l" marL="342900" indent="-342900">
-              <a:buSzPct val="100000"/>
-              <a:buChar char="•"/>
-            </a:pPr>
-            <a:r>
-              <a:rPr lang="en-US" sz="1300" dirty="0">
-                <a:solidFill>
-                  <a:srgbClr val="1E293B"/>
-                </a:solidFill>
-                <a:latin typeface="Arial" pitchFamily="34" charset="0"/>
-                <a:ea typeface="Arial" pitchFamily="34" charset="-122"/>
-                <a:cs typeface="Arial" pitchFamily="34" charset="-120"/>
-              </a:rPr>
-              <a:t>加速比: 34.55x</a:t>
-            </a:r>
-            <a:endParaRPr lang="en-US" sz="1300" dirty="0"/>
-          </a:p>
-        </p:txBody>
-      </p:sp>
-      <p:sp>
-        <p:nvSpPr>
-          <p:cNvPr id="12" name="Shape 10"/>
-          <p:cNvSpPr/>
-          <p:nvPr/>
-        </p:nvSpPr>
-        <p:spPr>
-          <a:xfrm>
-            <a:off x="457200" y="3200400"/>
-            <a:ext cx="8229600" cy="1371600"/>
-          </a:xfrm>
-          <a:prstGeom prst="rect">
-            <a:avLst/>
-          </a:prstGeom>
-          <a:solidFill>
-            <a:srgbClr val="1E2761"/>
-          </a:solidFill>
-          <a:ln/>
-        </p:spPr>
-      </p:sp>
-      <p:sp>
-        <p:nvSpPr>
-          <p:cNvPr id="13" name="Text 11"/>
-          <p:cNvSpPr/>
-          <p:nvPr/>
-        </p:nvSpPr>
-        <p:spPr>
-          <a:xfrm>
-            <a:off x="640080" y="3337560"/>
-            <a:ext cx="1828800" cy="365760"/>
-          </a:xfrm>
-          <a:prstGeom prst="rect">
-            <a:avLst/>
-          </a:prstGeom>
-          <a:noFill/>
-          <a:ln/>
-        </p:spPr>
-        <p:txBody>
-          <a:bodyPr wrap="square" lIns="0" tIns="0" rIns="0" bIns="0" rtlCol="0" anchor="ctr"/>
-          <a:lstStyle/>
-          <a:p>
-            <a:pPr algn="l" indent="0" marL="0">
-              <a:buNone/>
-            </a:pPr>
-            <a:r>
-              <a:rPr lang="en-US" sz="1400" b="1" dirty="0">
+          <p:cNvPr id="8" name="Text 6"/>
+          <p:cNvSpPr/>
+          <p:nvPr/>
+        </p:nvSpPr>
+        <p:spPr>
+          <a:xfrm>
+            <a:off x="731520" y="3657600"/>
+            <a:ext cx="1828800" cy="457200"/>
+          </a:xfrm>
+          <a:prstGeom prst="rect">
+            <a:avLst/>
+          </a:prstGeom>
+          <a:noFill/>
+          <a:ln/>
+        </p:spPr>
+        <p:txBody>
+          <a:bodyPr wrap="square" lIns="0" tIns="0" rIns="0" bIns="0" rtlCol="0" anchor="ctr"/>
+          <a:lstStyle/>
+          <a:p>
+            <a:pPr marL="0" indent="0" algn="l">
+              <a:buNone/>
+            </a:pPr>
+            <a:r>
+              <a:rPr lang="en-US" sz="2800" b="1" dirty="0">
                 <a:solidFill>
                   <a:srgbClr val="4A90D9"/>
                 </a:solidFill>
@@ -5349,141 +6159,46 @@
                 <a:ea typeface="Arial" pitchFamily="34" charset="-122"/>
                 <a:cs typeface="Arial" pitchFamily="34" charset="-120"/>
               </a:rPr>
-              <a:t>性能提升</a:t>
-            </a:r>
-            <a:endParaRPr lang="en-US" sz="1400" dirty="0"/>
-          </a:p>
-        </p:txBody>
-      </p:sp>
-      <p:sp>
-        <p:nvSpPr>
-          <p:cNvPr id="14" name="Text 12"/>
-          <p:cNvSpPr/>
-          <p:nvPr/>
-        </p:nvSpPr>
-        <p:spPr>
-          <a:xfrm>
-            <a:off x="640080" y="3657600"/>
-            <a:ext cx="1828800" cy="640080"/>
-          </a:xfrm>
-          <a:prstGeom prst="rect">
-            <a:avLst/>
-          </a:prstGeom>
-          <a:noFill/>
-          <a:ln/>
-        </p:spPr>
-        <p:txBody>
-          <a:bodyPr wrap="square" lIns="0" tIns="0" rIns="0" bIns="0" rtlCol="0" anchor="ctr"/>
-          <a:lstStyle/>
-          <a:p>
-            <a:pPr algn="l" indent="0" marL="0">
-              <a:buNone/>
-            </a:pPr>
-            <a:r>
-              <a:rPr lang="en-US" sz="3600" b="1" dirty="0">
-                <a:solidFill>
-                  <a:srgbClr val="FFFFFF"/>
-                </a:solidFill>
-                <a:latin typeface="Arial" pitchFamily="34" charset="0"/>
-                <a:ea typeface="Arial" pitchFamily="34" charset="-122"/>
-                <a:cs typeface="Arial" pitchFamily="34" charset="-120"/>
-              </a:rPr>
-              <a:t>34.55x</a:t>
-            </a:r>
-            <a:endParaRPr lang="en-US" sz="3600" dirty="0"/>
-          </a:p>
-        </p:txBody>
-      </p:sp>
-      <p:sp>
-        <p:nvSpPr>
-          <p:cNvPr id="15" name="Text 13"/>
-          <p:cNvSpPr/>
-          <p:nvPr/>
-        </p:nvSpPr>
-        <p:spPr>
-          <a:xfrm>
-            <a:off x="2560320" y="3657600"/>
-            <a:ext cx="3657600" cy="640080"/>
-          </a:xfrm>
-          <a:prstGeom prst="rect">
-            <a:avLst/>
-          </a:prstGeom>
-          <a:noFill/>
-          <a:ln/>
-        </p:spPr>
-        <p:txBody>
-          <a:bodyPr wrap="square" lIns="0" tIns="0" rIns="0" bIns="0" rtlCol="0" anchor="ctr"/>
-          <a:lstStyle/>
-          <a:p>
-            <a:pPr algn="l" indent="0" marL="0">
-              <a:buNone/>
-            </a:pPr>
-            <a:r>
-              <a:rPr lang="en-US" sz="1400" dirty="0">
-                <a:solidFill>
-                  <a:srgbClr val="E8F0F8"/>
-                </a:solidFill>
-                <a:latin typeface="Arial" pitchFamily="34" charset="0"/>
-                <a:ea typeface="Arial" pitchFamily="34" charset="-122"/>
-                <a:cs typeface="Arial" pitchFamily="34" charset="-120"/>
-              </a:rPr>
-              <a:t>加速比 (IM V0 → V4)</a:t>
-            </a:r>
-            <a:endParaRPr lang="en-US" sz="1400" dirty="0"/>
-          </a:p>
-          <a:p>
-            <a:pPr algn="l" indent="0" marL="0">
-              <a:buNone/>
-            </a:pPr>
-            <a:r>
-              <a:rPr lang="en-US" sz="1400" dirty="0">
-                <a:solidFill>
-                  <a:srgbClr val="E8F0F8"/>
-                </a:solidFill>
-                <a:latin typeface="Arial" pitchFamily="34" charset="0"/>
-                <a:ea typeface="Arial" pitchFamily="34" charset="-122"/>
-                <a:cs typeface="Arial" pitchFamily="34" charset="-120"/>
-              </a:rPr>
-              <a:t>spread 损失仅 1.26%</a:t>
-            </a:r>
-            <a:endParaRPr lang="en-US" sz="1400" dirty="0"/>
-          </a:p>
-        </p:txBody>
-      </p:sp>
-      <p:sp>
-        <p:nvSpPr>
-          <p:cNvPr id="16" name="Text 14"/>
-          <p:cNvSpPr/>
-          <p:nvPr/>
-        </p:nvSpPr>
-        <p:spPr>
-          <a:xfrm>
-            <a:off x="5943600" y="3931920"/>
-            <a:ext cx="3200400" cy="365760"/>
-          </a:xfrm>
-          <a:prstGeom prst="rect">
-            <a:avLst/>
-          </a:prstGeom>
-          <a:noFill/>
-          <a:ln/>
-        </p:spPr>
-        <p:txBody>
-          <a:bodyPr wrap="square" lIns="0" tIns="0" rIns="0" bIns="0" rtlCol="0" anchor="ctr"/>
-          <a:lstStyle/>
-          <a:p>
-            <a:pPr algn="r" indent="0" marL="0">
-              <a:buNone/>
-            </a:pPr>
-            <a:r>
-              <a:rPr lang="en-US" sz="1200" i="1" dirty="0">
-                <a:solidFill>
-                  <a:srgbClr val="4A90D9"/>
-                </a:solidFill>
-                <a:latin typeface="Arial" pitchFamily="34" charset="0"/>
-                <a:ea typeface="Arial" pitchFamily="34" charset="-122"/>
-                <a:cs typeface="Arial" pitchFamily="34" charset="-120"/>
-              </a:rPr>
-              <a:t>大图下一步: D-SSA/IMM (RR-set 系)</a:t>
+              <a:t>6 条</a:t>
+            </a:r>
+            <a:endParaRPr lang="en-US" sz="2800" dirty="0"/>
+          </a:p>
+        </p:txBody>
+      </p:sp>
+      <p:sp>
+        <p:nvSpPr>
+          <p:cNvPr id="9" name="Text 7"/>
+          <p:cNvSpPr/>
+          <p:nvPr/>
+        </p:nvSpPr>
+        <p:spPr>
+          <a:xfrm>
+            <a:off x="731520" y="4069080"/>
+            <a:ext cx="1828800" cy="274320"/>
+          </a:xfrm>
+          <a:prstGeom prst="rect">
+            <a:avLst/>
+          </a:prstGeom>
+          <a:noFill/>
+          <a:ln/>
+        </p:spPr>
+        <p:txBody>
+          <a:bodyPr wrap="square" lIns="0" tIns="0" rIns="0" bIns="0" rtlCol="0" anchor="ctr"/>
+          <a:lstStyle/>
+          <a:p>
+            <a:pPr marL="0" indent="0" algn="l">
+              <a:buNone/>
+            </a:pPr>
+            <a:r>
+              <a:rPr lang="en-US" sz="1200" dirty="0">
+                <a:solidFill>
+                  <a:srgbClr val="64748B"/>
+                </a:solidFill>
+                <a:latin typeface="Arial" pitchFamily="34" charset="0"/>
+                <a:ea typeface="Arial" pitchFamily="34" charset="-122"/>
+                <a:cs typeface="Arial" pitchFamily="34" charset="-120"/>
+              </a:rPr>
+              <a:t>Sec2 条目</a:t>
             </a:r>
             <a:endParaRPr lang="en-US" sz="1200" dirty="0"/>
           </a:p>
@@ -5499,12 +6214,13 @@
 
 <file path=ppt/slides/slide6.xml><?xml version="1.0" encoding="utf-8"?>
 <p:sld xmlns:a="http://schemas.openxmlformats.org/drawingml/2006/main" xmlns:r="http://schemas.openxmlformats.org/officeDocument/2006/relationships" xmlns:p="http://schemas.openxmlformats.org/presentationml/2006/main">
-  <p:cSld name="Slide 6">
+  <p:cSld name="Slide 5">
     <p:bg>
       <p:bgPr>
         <a:solidFill>
           <a:srgbClr val="E8F0F8"/>
         </a:solidFill>
+        <a:effectLst/>
       </p:bgPr>
     </p:bg>
     <p:spTree>
@@ -5540,6 +6256,13 @@
           </a:solidFill>
           <a:ln/>
         </p:spPr>
+        <p:txBody>
+          <a:bodyPr/>
+          <a:lstStyle/>
+          <a:p>
+            <a:endParaRPr lang="zh-CN" altLang="en-US"/>
+          </a:p>
+        </p:txBody>
       </p:sp>
       <p:sp>
         <p:nvSpPr>
@@ -5562,7 +6285,7 @@
           <a:bodyPr wrap="square" lIns="0" tIns="0" rIns="0" bIns="0" rtlCol="0" anchor="ctr"/>
           <a:lstStyle/>
           <a:p>
-            <a:pPr algn="l" indent="0" marL="0">
+            <a:pPr marL="0" indent="0" algn="l">
               <a:buNone/>
             </a:pPr>
             <a:r>
@@ -5574,7 +6297,7 @@
                 <a:ea typeface="Arial" pitchFamily="34" charset="-122"/>
                 <a:cs typeface="Arial" pitchFamily="34" charset="-120"/>
               </a:rPr>
-              <a:t>3. 新指标: Relative F1 Drop</a:t>
+              <a:t>2. 算力限制下的方法决策</a:t>
             </a:r>
             <a:endParaRPr lang="en-US" sz="2400" dirty="0"/>
           </a:p>
@@ -5588,8 +6311,8 @@
         </p:nvSpPr>
         <p:spPr>
           <a:xfrm>
-            <a:off x="457200" y="914400"/>
-            <a:ext cx="8229600" cy="1371600"/>
+            <a:off x="365760" y="914400"/>
+            <a:ext cx="4023360" cy="2103120"/>
           </a:xfrm>
           <a:prstGeom prst="rect">
             <a:avLst/>
@@ -5599,50 +6322,45 @@
           </a:solidFill>
           <a:ln/>
           <a:effectLst>
-            <a:outerShdw sx="100000" sy="100000" kx="0" ky="0" algn="bl" rotWithShape="0" blurRad="50800" dist="25400" dir="8100000">
+            <a:outerShdw blurRad="50800" dist="25400" dir="8100000" algn="bl" rotWithShape="0">
               <a:srgbClr val="000000">
                 <a:alpha val="15000"/>
               </a:srgbClr>
             </a:outerShdw>
           </a:effectLst>
         </p:spPr>
-      </p:sp>
-      <p:sp>
-        <p:nvSpPr>
-          <p:cNvPr id="5" name="Text 3"/>
-          <p:cNvSpPr/>
-          <p:nvPr/>
-        </p:nvSpPr>
-        <p:spPr>
-          <a:xfrm>
-            <a:off x="640080" y="1005840"/>
-            <a:ext cx="1828800" cy="320040"/>
-          </a:xfrm>
-          <a:prstGeom prst="rect">
-            <a:avLst/>
-          </a:prstGeom>
-          <a:noFill/>
-          <a:ln/>
-        </p:spPr>
-        <p:txBody>
-          <a:bodyPr wrap="square" lIns="0" tIns="0" rIns="0" bIns="0" rtlCol="0" anchor="ctr"/>
-          <a:lstStyle/>
-          <a:p>
-            <a:pPr algn="l" indent="0" marL="0">
-              <a:buNone/>
-            </a:pPr>
-            <a:r>
-              <a:rPr lang="en-US" sz="1400" b="1" dirty="0">
-                <a:solidFill>
-                  <a:srgbClr val="4A90D9"/>
-                </a:solidFill>
-                <a:latin typeface="Arial" pitchFamily="34" charset="0"/>
-                <a:ea typeface="Arial" pitchFamily="34" charset="-122"/>
-                <a:cs typeface="Arial" pitchFamily="34" charset="-120"/>
-              </a:rPr>
-              <a:t>指标定义</a:t>
-            </a:r>
-            <a:endParaRPr lang="en-US" sz="1400" dirty="0"/>
+        <p:txBody>
+          <a:bodyPr/>
+          <a:lstStyle/>
+          <a:p>
+            <a:endParaRPr lang="zh-CN" altLang="en-US"/>
+          </a:p>
+        </p:txBody>
+      </p:sp>
+      <p:sp>
+        <p:nvSpPr>
+          <p:cNvPr id="5" name="Shape 3"/>
+          <p:cNvSpPr/>
+          <p:nvPr/>
+        </p:nvSpPr>
+        <p:spPr>
+          <a:xfrm>
+            <a:off x="457200" y="914400"/>
+            <a:ext cx="73152" cy="2103120"/>
+          </a:xfrm>
+          <a:prstGeom prst="rect">
+            <a:avLst/>
+          </a:prstGeom>
+          <a:solidFill>
+            <a:srgbClr val="4A90D9"/>
+          </a:solidFill>
+          <a:ln/>
+        </p:spPr>
+        <p:txBody>
+          <a:bodyPr/>
+          <a:lstStyle/>
+          <a:p>
+            <a:endParaRPr lang="zh-CN" altLang="en-US"/>
           </a:p>
         </p:txBody>
       </p:sp>
@@ -5654,34 +6372,34 @@
         </p:nvSpPr>
         <p:spPr>
           <a:xfrm>
-            <a:off x="640080" y="1371600"/>
-            <a:ext cx="7315200" cy="274320"/>
-          </a:xfrm>
-          <a:prstGeom prst="rect">
-            <a:avLst/>
-          </a:prstGeom>
-          <a:noFill/>
-          <a:ln/>
-        </p:spPr>
-        <p:txBody>
-          <a:bodyPr wrap="square" lIns="0" tIns="0" rIns="0" bIns="0" rtlCol="0" anchor="ctr"/>
-          <a:lstStyle/>
-          <a:p>
-            <a:pPr algn="l" indent="0" marL="0">
-              <a:buNone/>
-            </a:pPr>
-            <a:r>
-              <a:rPr lang="en-US" sz="1400" dirty="0">
+            <a:off x="685800" y="1051560"/>
+            <a:ext cx="3657600" cy="365760"/>
+          </a:xfrm>
+          <a:prstGeom prst="rect">
+            <a:avLst/>
+          </a:prstGeom>
+          <a:noFill/>
+          <a:ln/>
+        </p:spPr>
+        <p:txBody>
+          <a:bodyPr wrap="square" lIns="0" tIns="0" rIns="0" bIns="0" rtlCol="0" anchor="ctr"/>
+          <a:lstStyle/>
+          <a:p>
+            <a:pPr marL="0" indent="0" algn="l">
+              <a:buNone/>
+            </a:pPr>
+            <a:r>
+              <a:rPr lang="en-US" sz="1600" b="1" dirty="0">
                 <a:solidFill>
                   <a:srgbClr val="1E293B"/>
                 </a:solidFill>
-                <a:latin typeface="Consolas" pitchFamily="34" charset="0"/>
-                <a:ea typeface="Consolas" pitchFamily="34" charset="-122"/>
-                <a:cs typeface="Consolas" pitchFamily="34" charset="-120"/>
-              </a:rPr>
-              <a:t>Baseline: F1̄_after(k=5, random)</a:t>
-            </a:r>
-            <a:endParaRPr lang="en-US" sz="1400" dirty="0"/>
+                <a:latin typeface="Arial" pitchFamily="34" charset="0"/>
+                <a:ea typeface="Arial" pitchFamily="34" charset="-122"/>
+                <a:cs typeface="Arial" pitchFamily="34" charset="-120"/>
+              </a:rPr>
+              <a:t>IF 框架: TracIn</a:t>
+            </a:r>
+            <a:endParaRPr lang="en-US" sz="1600" dirty="0"/>
           </a:p>
         </p:txBody>
       </p:sp>
@@ -5693,63 +6411,43 @@
         </p:nvSpPr>
         <p:spPr>
           <a:xfrm>
-            <a:off x="640080" y="1691640"/>
-            <a:ext cx="7315200" cy="274320"/>
-          </a:xfrm>
-          <a:prstGeom prst="rect">
-            <a:avLst/>
-          </a:prstGeom>
-          <a:noFill/>
-          <a:ln/>
-        </p:spPr>
-        <p:txBody>
-          <a:bodyPr wrap="square" lIns="0" tIns="0" rIns="0" bIns="0" rtlCol="0" anchor="ctr"/>
-          <a:lstStyle/>
-          <a:p>
-            <a:pPr algn="l" indent="0" marL="0">
-              <a:buNone/>
-            </a:pPr>
-            <a:r>
-              <a:rPr lang="en-US" sz="1400" dirty="0">
+            <a:off x="685800" y="1463040"/>
+            <a:ext cx="3657600" cy="1371600"/>
+          </a:xfrm>
+          <a:prstGeom prst="rect">
+            <a:avLst/>
+          </a:prstGeom>
+          <a:noFill/>
+          <a:ln/>
+        </p:spPr>
+        <p:txBody>
+          <a:bodyPr wrap="square" lIns="0" tIns="0" rIns="0" bIns="0" rtlCol="0" anchor="ctr"/>
+          <a:lstStyle/>
+          <a:p>
+            <a:pPr marL="342900" indent="-342900" algn="l">
+              <a:buSzPct val="100000"/>
+              <a:buChar char="•"/>
+            </a:pPr>
+            <a:r>
+              <a:rPr lang="en-US" sz="1300" dirty="0">
                 <a:solidFill>
                   <a:srgbClr val="1E293B"/>
                 </a:solidFill>
-                <a:latin typeface="Consolas" pitchFamily="34" charset="0"/>
-                <a:ea typeface="Consolas" pitchFamily="34" charset="-122"/>
-                <a:cs typeface="Consolas" pitchFamily="34" charset="-120"/>
-              </a:rPr>
-              <a:t>Relative F1 Drop = F1̄_after(k=5, random) - F1_after(ratio=0.05, attack)</a:t>
-            </a:r>
-            <a:endParaRPr lang="en-US" sz="1400" dirty="0"/>
-          </a:p>
-        </p:txBody>
-      </p:sp>
-      <p:sp>
-        <p:nvSpPr>
-          <p:cNvPr id="8" name="Text 6"/>
-          <p:cNvSpPr/>
-          <p:nvPr/>
-        </p:nvSpPr>
-        <p:spPr>
-          <a:xfrm>
-            <a:off x="457200" y="2468880"/>
-            <a:ext cx="8229600" cy="365760"/>
-          </a:xfrm>
-          <a:prstGeom prst="rect">
-            <a:avLst/>
-          </a:prstGeom>
-          <a:noFill/>
-          <a:ln/>
-        </p:spPr>
-        <p:txBody>
-          <a:bodyPr wrap="square" lIns="0" tIns="0" rIns="0" bIns="0" rtlCol="0" anchor="ctr"/>
-          <a:lstStyle/>
-          <a:p>
-            <a:pPr algn="l" indent="0" marL="0">
-              <a:buNone/>
-            </a:pPr>
-            <a:r>
-              <a:rPr lang="en-US" sz="1600" b="1" dirty="0">
+                <a:latin typeface="Arial" pitchFamily="34" charset="0"/>
+                <a:ea typeface="Arial" pitchFamily="34" charset="-122"/>
+                <a:cs typeface="Arial" pitchFamily="34" charset="-120"/>
+              </a:rPr>
+              <a:t>精确 IF 开销爆炸</a:t>
+            </a:r>
+            <a:endParaRPr lang="en-US" sz="1300" dirty="0"/>
+          </a:p>
+          <a:p>
+            <a:pPr marL="342900" indent="-342900" algn="l">
+              <a:buSzPct val="100000"/>
+              <a:buChar char="•"/>
+            </a:pPr>
+            <a:r>
+              <a:rPr lang="en-US" sz="1300" dirty="0">
                 <a:solidFill>
                   <a:srgbClr val="1E293B"/>
                 </a:solidFill>
@@ -5757,38 +6455,17 @@
                 <a:ea typeface="Arial" pitchFamily="34" charset="-122"/>
                 <a:cs typeface="Arial" pitchFamily="34" charset="-120"/>
               </a:rPr>
-              <a:t>解决的问题</a:t>
-            </a:r>
-            <a:endParaRPr lang="en-US" sz="1600" dirty="0"/>
-          </a:p>
-        </p:txBody>
-      </p:sp>
-      <p:sp>
-        <p:nvSpPr>
-          <p:cNvPr id="9" name="Text 7"/>
-          <p:cNvSpPr/>
-          <p:nvPr/>
-        </p:nvSpPr>
-        <p:spPr>
-          <a:xfrm>
-            <a:off x="457200" y="2834640"/>
-            <a:ext cx="8229600" cy="731520"/>
-          </a:xfrm>
-          <a:prstGeom prst="rect">
-            <a:avLst/>
-          </a:prstGeom>
-          <a:noFill/>
-          <a:ln/>
-        </p:spPr>
-        <p:txBody>
-          <a:bodyPr wrap="square" lIns="0" tIns="0" rIns="0" bIns="0" rtlCol="0" anchor="ctr"/>
-          <a:lstStyle/>
-          <a:p>
-            <a:pPr algn="l" indent="0" marL="0">
-              <a:buNone/>
-            </a:pPr>
-            <a:r>
-              <a:rPr lang="en-US" sz="1500" dirty="0">
+              <a:t>超大图可能到天/周/月级</a:t>
+            </a:r>
+            <a:endParaRPr lang="en-US" sz="1300" dirty="0"/>
+          </a:p>
+          <a:p>
+            <a:pPr marL="342900" indent="-342900" algn="l">
+              <a:buSzPct val="100000"/>
+              <a:buChar char="•"/>
+            </a:pPr>
+            <a:r>
+              <a:rPr lang="en-US" sz="1300" dirty="0">
                 <a:solidFill>
                   <a:srgbClr val="1E293B"/>
                 </a:solidFill>
@@ -5796,38 +6473,111 @@
                 <a:ea typeface="Arial" pitchFamily="34" charset="-122"/>
                 <a:cs typeface="Arial" pitchFamily="34" charset="-120"/>
               </a:rPr>
-              <a:t>它把「方法自身带来的性能漂移」从「攻击额外造成的损伤」里剥离出来，特别适用于解释 Shard-based 的反直觉现象。</a:t>
-            </a:r>
-            <a:endParaRPr lang="en-US" sz="1500" dirty="0"/>
-          </a:p>
-        </p:txBody>
-      </p:sp>
-      <p:sp>
-        <p:nvSpPr>
-          <p:cNvPr id="10" name="Shape 8"/>
-          <p:cNvSpPr/>
-          <p:nvPr/>
-        </p:nvSpPr>
-        <p:spPr>
-          <a:xfrm>
-            <a:off x="457200" y="3657600"/>
-            <a:ext cx="8229600" cy="914400"/>
+              <a:t>采用 TracIn（一阶 pseudo-IF）作为可执行替代</a:t>
+            </a:r>
+            <a:endParaRPr lang="en-US" sz="1300" dirty="0"/>
+          </a:p>
+        </p:txBody>
+      </p:sp>
+      <p:sp>
+        <p:nvSpPr>
+          <p:cNvPr id="8" name="Shape 6"/>
+          <p:cNvSpPr/>
+          <p:nvPr/>
+        </p:nvSpPr>
+        <p:spPr>
+          <a:xfrm>
+            <a:off x="4663440" y="914400"/>
+            <a:ext cx="4023360" cy="2103120"/>
           </a:xfrm>
           <a:prstGeom prst="rect">
             <a:avLst/>
           </a:prstGeom>
           <a:solidFill>
-            <a:srgbClr val="F59E0B"/>
+            <a:srgbClr val="FFFFFF"/>
           </a:solidFill>
           <a:ln/>
           <a:effectLst>
-            <a:outerShdw sx="100000" sy="100000" kx="0" ky="0" algn="bl" rotWithShape="0" blurRad="50800" dist="25400" dir="8100000">
+            <a:outerShdw blurRad="50800" dist="25400" dir="8100000" algn="bl" rotWithShape="0">
               <a:srgbClr val="000000">
                 <a:alpha val="15000"/>
               </a:srgbClr>
             </a:outerShdw>
           </a:effectLst>
         </p:spPr>
+        <p:txBody>
+          <a:bodyPr/>
+          <a:lstStyle/>
+          <a:p>
+            <a:endParaRPr lang="zh-CN" altLang="en-US"/>
+          </a:p>
+        </p:txBody>
+      </p:sp>
+      <p:sp>
+        <p:nvSpPr>
+          <p:cNvPr id="9" name="Shape 7"/>
+          <p:cNvSpPr/>
+          <p:nvPr/>
+        </p:nvSpPr>
+        <p:spPr>
+          <a:xfrm>
+            <a:off x="4663440" y="914400"/>
+            <a:ext cx="73152" cy="2103120"/>
+          </a:xfrm>
+          <a:prstGeom prst="rect">
+            <a:avLst/>
+          </a:prstGeom>
+          <a:solidFill>
+            <a:srgbClr val="F59E0B"/>
+          </a:solidFill>
+          <a:ln/>
+        </p:spPr>
+        <p:txBody>
+          <a:bodyPr/>
+          <a:lstStyle/>
+          <a:p>
+            <a:endParaRPr lang="zh-CN" altLang="en-US"/>
+          </a:p>
+        </p:txBody>
+      </p:sp>
+      <p:sp>
+        <p:nvSpPr>
+          <p:cNvPr id="10" name="Text 8"/>
+          <p:cNvSpPr/>
+          <p:nvPr/>
+        </p:nvSpPr>
+        <p:spPr>
+          <a:xfrm>
+            <a:off x="4892040" y="1051560"/>
+            <a:ext cx="3657600" cy="365760"/>
+          </a:xfrm>
+          <a:prstGeom prst="rect">
+            <a:avLst/>
+          </a:prstGeom>
+          <a:noFill/>
+          <a:ln/>
+        </p:spPr>
+        <p:txBody>
+          <a:bodyPr wrap="square" lIns="0" tIns="0" rIns="0" bIns="0" rtlCol="0" anchor="ctr"/>
+          <a:lstStyle/>
+          <a:p>
+            <a:pPr marL="0" indent="0" algn="l">
+              <a:buNone/>
+            </a:pPr>
+            <a:r>
+              <a:rPr lang="en-US" sz="1600" b="1" dirty="0">
+                <a:solidFill>
+                  <a:srgbClr val="1E293B"/>
+                </a:solidFill>
+                <a:latin typeface="Arial" pitchFamily="34" charset="0"/>
+                <a:ea typeface="Arial" pitchFamily="34" charset="-122"/>
+                <a:cs typeface="Arial" pitchFamily="34" charset="-120"/>
+              </a:rPr>
+              <a:t>IM 框架: IM v4</a:t>
+            </a:r>
+            <a:endParaRPr lang="en-US" sz="1600" dirty="0"/>
+          </a:p>
+        </p:txBody>
       </p:sp>
       <p:sp>
         <p:nvSpPr>
@@ -5837,24 +6587,166 @@
         </p:nvSpPr>
         <p:spPr>
           <a:xfrm>
-            <a:off x="640080" y="3886200"/>
-            <a:ext cx="7772400" cy="457200"/>
-          </a:xfrm>
-          <a:prstGeom prst="rect">
-            <a:avLst/>
-          </a:prstGeom>
-          <a:noFill/>
-          <a:ln/>
-        </p:spPr>
-        <p:txBody>
-          <a:bodyPr wrap="square" lIns="0" tIns="0" rIns="0" bIns="0" rtlCol="0" anchor="ctr"/>
-          <a:lstStyle/>
-          <a:p>
-            <a:pPr algn="ctr" indent="0" marL="0">
-              <a:buNone/>
-            </a:pPr>
-            <a:r>
-              <a:rPr lang="en-US" sz="1600" b="1" dirty="0">
+            <a:off x="4892040" y="1463040"/>
+            <a:ext cx="3657600" cy="914400"/>
+          </a:xfrm>
+          <a:prstGeom prst="rect">
+            <a:avLst/>
+          </a:prstGeom>
+          <a:noFill/>
+          <a:ln/>
+        </p:spPr>
+        <p:txBody>
+          <a:bodyPr wrap="square" lIns="0" tIns="0" rIns="0" bIns="0" rtlCol="0" anchor="ctr"/>
+          <a:lstStyle/>
+          <a:p>
+            <a:pPr marL="342900" indent="-342900" algn="l">
+              <a:buSzPct val="100000"/>
+              <a:buChar char="•"/>
+            </a:pPr>
+            <a:r>
+              <a:rPr lang="en-US" sz="1300" dirty="0">
+                <a:solidFill>
+                  <a:srgbClr val="1E293B"/>
+                </a:solidFill>
+                <a:latin typeface="Arial" pitchFamily="34" charset="0"/>
+                <a:ea typeface="Arial" pitchFamily="34" charset="-122"/>
+                <a:cs typeface="Arial" pitchFamily="34" charset="-120"/>
+              </a:rPr>
+              <a:t>V0 时间: 652.97s</a:t>
+            </a:r>
+            <a:endParaRPr lang="en-US" sz="1300" dirty="0"/>
+          </a:p>
+          <a:p>
+            <a:pPr marL="342900" indent="-342900" algn="l">
+              <a:buSzPct val="100000"/>
+              <a:buChar char="•"/>
+            </a:pPr>
+            <a:r>
+              <a:rPr lang="en-US" sz="1300" dirty="0">
+                <a:solidFill>
+                  <a:srgbClr val="1E293B"/>
+                </a:solidFill>
+                <a:latin typeface="Arial" pitchFamily="34" charset="0"/>
+                <a:ea typeface="Arial" pitchFamily="34" charset="-122"/>
+                <a:cs typeface="Arial" pitchFamily="34" charset="-120"/>
+              </a:rPr>
+              <a:t>V4 时间: 18.90s</a:t>
+            </a:r>
+            <a:endParaRPr lang="en-US" sz="1300" dirty="0"/>
+          </a:p>
+          <a:p>
+            <a:pPr marL="342900" indent="-342900" algn="l">
+              <a:buSzPct val="100000"/>
+              <a:buChar char="•"/>
+            </a:pPr>
+            <a:r>
+              <a:rPr lang="en-US" sz="1300" dirty="0">
+                <a:solidFill>
+                  <a:srgbClr val="1E293B"/>
+                </a:solidFill>
+                <a:latin typeface="Arial" pitchFamily="34" charset="0"/>
+                <a:ea typeface="Arial" pitchFamily="34" charset="-122"/>
+                <a:cs typeface="Arial" pitchFamily="34" charset="-120"/>
+              </a:rPr>
+              <a:t>加速比: 34.55x</a:t>
+            </a:r>
+            <a:endParaRPr lang="en-US" sz="1300" dirty="0"/>
+          </a:p>
+        </p:txBody>
+      </p:sp>
+      <p:sp>
+        <p:nvSpPr>
+          <p:cNvPr id="12" name="Shape 10"/>
+          <p:cNvSpPr/>
+          <p:nvPr/>
+        </p:nvSpPr>
+        <p:spPr>
+          <a:xfrm>
+            <a:off x="457200" y="3200400"/>
+            <a:ext cx="8229600" cy="1371600"/>
+          </a:xfrm>
+          <a:prstGeom prst="rect">
+            <a:avLst/>
+          </a:prstGeom>
+          <a:solidFill>
+            <a:srgbClr val="1E2761"/>
+          </a:solidFill>
+          <a:ln/>
+        </p:spPr>
+        <p:txBody>
+          <a:bodyPr/>
+          <a:lstStyle/>
+          <a:p>
+            <a:endParaRPr lang="zh-CN" altLang="en-US"/>
+          </a:p>
+        </p:txBody>
+      </p:sp>
+      <p:sp>
+        <p:nvSpPr>
+          <p:cNvPr id="13" name="Text 11"/>
+          <p:cNvSpPr/>
+          <p:nvPr/>
+        </p:nvSpPr>
+        <p:spPr>
+          <a:xfrm>
+            <a:off x="640080" y="3337560"/>
+            <a:ext cx="1828800" cy="365760"/>
+          </a:xfrm>
+          <a:prstGeom prst="rect">
+            <a:avLst/>
+          </a:prstGeom>
+          <a:noFill/>
+          <a:ln/>
+        </p:spPr>
+        <p:txBody>
+          <a:bodyPr wrap="square" lIns="0" tIns="0" rIns="0" bIns="0" rtlCol="0" anchor="ctr"/>
+          <a:lstStyle/>
+          <a:p>
+            <a:pPr marL="0" indent="0" algn="l">
+              <a:buNone/>
+            </a:pPr>
+            <a:r>
+              <a:rPr lang="en-US" sz="1400" b="1" dirty="0">
+                <a:solidFill>
+                  <a:srgbClr val="4A90D9"/>
+                </a:solidFill>
+                <a:latin typeface="Arial" pitchFamily="34" charset="0"/>
+                <a:ea typeface="Arial" pitchFamily="34" charset="-122"/>
+                <a:cs typeface="Arial" pitchFamily="34" charset="-120"/>
+              </a:rPr>
+              <a:t>性能提升</a:t>
+            </a:r>
+            <a:endParaRPr lang="en-US" sz="1400" dirty="0"/>
+          </a:p>
+        </p:txBody>
+      </p:sp>
+      <p:sp>
+        <p:nvSpPr>
+          <p:cNvPr id="14" name="Text 12"/>
+          <p:cNvSpPr/>
+          <p:nvPr/>
+        </p:nvSpPr>
+        <p:spPr>
+          <a:xfrm>
+            <a:off x="640080" y="3657600"/>
+            <a:ext cx="1828800" cy="640080"/>
+          </a:xfrm>
+          <a:prstGeom prst="rect">
+            <a:avLst/>
+          </a:prstGeom>
+          <a:noFill/>
+          <a:ln/>
+        </p:spPr>
+        <p:txBody>
+          <a:bodyPr wrap="square" lIns="0" tIns="0" rIns="0" bIns="0" rtlCol="0" anchor="ctr"/>
+          <a:lstStyle/>
+          <a:p>
+            <a:pPr marL="0" indent="0" algn="l">
+              <a:buNone/>
+            </a:pPr>
+            <a:r>
+              <a:rPr lang="en-US" sz="3600" b="1" dirty="0">
                 <a:solidFill>
                   <a:srgbClr val="FFFFFF"/>
                 </a:solidFill>
@@ -5862,9 +6754,104 @@
                 <a:ea typeface="Arial" pitchFamily="34" charset="-122"/>
                 <a:cs typeface="Arial" pitchFamily="34" charset="-120"/>
               </a:rPr>
-              <a:t>核心价值：区分「方法自带提升」vs 「攻击真实增益」</a:t>
-            </a:r>
-            <a:endParaRPr lang="en-US" sz="1600" dirty="0"/>
+              <a:t>34.55x</a:t>
+            </a:r>
+            <a:endParaRPr lang="en-US" sz="3600" dirty="0"/>
+          </a:p>
+        </p:txBody>
+      </p:sp>
+      <p:sp>
+        <p:nvSpPr>
+          <p:cNvPr id="15" name="Text 13"/>
+          <p:cNvSpPr/>
+          <p:nvPr/>
+        </p:nvSpPr>
+        <p:spPr>
+          <a:xfrm>
+            <a:off x="2560320" y="3657600"/>
+            <a:ext cx="3657600" cy="640080"/>
+          </a:xfrm>
+          <a:prstGeom prst="rect">
+            <a:avLst/>
+          </a:prstGeom>
+          <a:noFill/>
+          <a:ln/>
+        </p:spPr>
+        <p:txBody>
+          <a:bodyPr wrap="square" lIns="0" tIns="0" rIns="0" bIns="0" rtlCol="0" anchor="ctr"/>
+          <a:lstStyle/>
+          <a:p>
+            <a:pPr marL="0" indent="0" algn="l">
+              <a:buNone/>
+            </a:pPr>
+            <a:r>
+              <a:rPr lang="en-US" sz="1400" dirty="0">
+                <a:solidFill>
+                  <a:srgbClr val="E8F0F8"/>
+                </a:solidFill>
+                <a:latin typeface="Arial" pitchFamily="34" charset="0"/>
+                <a:ea typeface="Arial" pitchFamily="34" charset="-122"/>
+                <a:cs typeface="Arial" pitchFamily="34" charset="-120"/>
+              </a:rPr>
+              <a:t>加速比 (IM V0 → V4)</a:t>
+            </a:r>
+            <a:endParaRPr lang="en-US" sz="1400" dirty="0"/>
+          </a:p>
+          <a:p>
+            <a:pPr marL="0" indent="0" algn="l">
+              <a:buNone/>
+            </a:pPr>
+            <a:r>
+              <a:rPr lang="en-US" sz="1400" dirty="0">
+                <a:solidFill>
+                  <a:srgbClr val="E8F0F8"/>
+                </a:solidFill>
+                <a:latin typeface="Arial" pitchFamily="34" charset="0"/>
+                <a:ea typeface="Arial" pitchFamily="34" charset="-122"/>
+                <a:cs typeface="Arial" pitchFamily="34" charset="-120"/>
+              </a:rPr>
+              <a:t>spread 损失仅 1.26%</a:t>
+            </a:r>
+            <a:endParaRPr lang="en-US" sz="1400" dirty="0"/>
+          </a:p>
+        </p:txBody>
+      </p:sp>
+      <p:sp>
+        <p:nvSpPr>
+          <p:cNvPr id="16" name="Text 14"/>
+          <p:cNvSpPr/>
+          <p:nvPr/>
+        </p:nvSpPr>
+        <p:spPr>
+          <a:xfrm>
+            <a:off x="5303520" y="3863340"/>
+            <a:ext cx="3200400" cy="365760"/>
+          </a:xfrm>
+          <a:prstGeom prst="rect">
+            <a:avLst/>
+          </a:prstGeom>
+          <a:noFill/>
+          <a:ln/>
+        </p:spPr>
+        <p:txBody>
+          <a:bodyPr wrap="square" lIns="0" tIns="0" rIns="0" bIns="0" rtlCol="0" anchor="ctr"/>
+          <a:lstStyle/>
+          <a:p>
+            <a:pPr marL="0" indent="0" algn="r">
+              <a:buNone/>
+            </a:pPr>
+            <a:r>
+              <a:rPr lang="en-US" sz="1200" i="1" dirty="0">
+                <a:solidFill>
+                  <a:srgbClr val="4A90D9"/>
+                </a:solidFill>
+                <a:latin typeface="Arial" pitchFamily="34" charset="0"/>
+                <a:ea typeface="Arial" pitchFamily="34" charset="-122"/>
+                <a:cs typeface="Arial" pitchFamily="34" charset="-120"/>
+              </a:rPr>
+              <a:t>大图下一步: D-SSA/IMM (RR-set 系)</a:t>
+            </a:r>
+            <a:endParaRPr lang="en-US" sz="1200" dirty="0"/>
           </a:p>
         </p:txBody>
       </p:sp>
@@ -5878,12 +6865,13 @@
 
 <file path=ppt/slides/slide7.xml><?xml version="1.0" encoding="utf-8"?>
 <p:sld xmlns:a="http://schemas.openxmlformats.org/drawingml/2006/main" xmlns:r="http://schemas.openxmlformats.org/officeDocument/2006/relationships" xmlns:p="http://schemas.openxmlformats.org/presentationml/2006/main">
-  <p:cSld name="Slide 7">
+  <p:cSld name="Slide 6">
     <p:bg>
       <p:bgPr>
         <a:solidFill>
           <a:srgbClr val="E8F0F8"/>
         </a:solidFill>
+        <a:effectLst/>
       </p:bgPr>
     </p:bg>
     <p:spTree>
@@ -5919,6 +6907,13 @@
           </a:solidFill>
           <a:ln/>
         </p:spPr>
+        <p:txBody>
+          <a:bodyPr/>
+          <a:lstStyle/>
+          <a:p>
+            <a:endParaRPr lang="zh-CN" altLang="en-US"/>
+          </a:p>
+        </p:txBody>
       </p:sp>
       <p:sp>
         <p:nvSpPr>
@@ -5941,7 +6936,7 @@
           <a:bodyPr wrap="square" lIns="0" tIns="0" rIns="0" bIns="0" rtlCol="0" anchor="ctr"/>
           <a:lstStyle/>
           <a:p>
-            <a:pPr algn="l" indent="0" marL="0">
+            <a:pPr marL="0" indent="0" algn="l">
               <a:buNone/>
             </a:pPr>
             <a:r>
@@ -5953,7 +6948,7 @@
                 <a:ea typeface="Arial" pitchFamily="34" charset="-122"/>
                 <a:cs typeface="Arial" pitchFamily="34" charset="-120"/>
               </a:rPr>
-              <a:t>4. 深度分析：是否变好？</a:t>
+              <a:t>3. 新指标: Relative F1 Drop</a:t>
             </a:r>
             <a:endParaRPr lang="en-US" sz="2400" dirty="0"/>
           </a:p>
@@ -5968,7 +6963,7 @@
         <p:spPr>
           <a:xfrm>
             <a:off x="457200" y="914400"/>
-            <a:ext cx="2651760" cy="1645920"/>
+            <a:ext cx="8229600" cy="1371600"/>
           </a:xfrm>
           <a:prstGeom prst="rect">
             <a:avLst/>
@@ -5978,197 +6973,249 @@
           </a:solidFill>
           <a:ln/>
           <a:effectLst>
-            <a:outerShdw sx="100000" sy="100000" kx="0" ky="0" algn="bl" rotWithShape="0" blurRad="50800" dist="25400" dir="8100000">
+            <a:outerShdw blurRad="50800" dist="25400" dir="8100000" algn="bl" rotWithShape="0">
               <a:srgbClr val="000000">
                 <a:alpha val="15000"/>
               </a:srgbClr>
             </a:outerShdw>
           </a:effectLst>
         </p:spPr>
-      </p:sp>
-      <p:sp>
-        <p:nvSpPr>
-          <p:cNvPr id="5" name="Shape 3"/>
-          <p:cNvSpPr/>
-          <p:nvPr/>
-        </p:nvSpPr>
-        <p:spPr>
-          <a:xfrm>
-            <a:off x="594360" y="1005840"/>
-            <a:ext cx="365760" cy="365760"/>
-          </a:xfrm>
-          <a:prstGeom prst="ellipse">
+        <p:txBody>
+          <a:bodyPr/>
+          <a:lstStyle/>
+          <a:p>
+            <a:endParaRPr lang="zh-CN" altLang="en-US"/>
+          </a:p>
+        </p:txBody>
+      </p:sp>
+      <p:sp>
+        <p:nvSpPr>
+          <p:cNvPr id="5" name="Text 3"/>
+          <p:cNvSpPr/>
+          <p:nvPr/>
+        </p:nvSpPr>
+        <p:spPr>
+          <a:xfrm>
+            <a:off x="640080" y="1005840"/>
+            <a:ext cx="1828800" cy="320040"/>
+          </a:xfrm>
+          <a:prstGeom prst="rect">
+            <a:avLst/>
+          </a:prstGeom>
+          <a:noFill/>
+          <a:ln/>
+        </p:spPr>
+        <p:txBody>
+          <a:bodyPr wrap="square" lIns="0" tIns="0" rIns="0" bIns="0" rtlCol="0" anchor="ctr"/>
+          <a:lstStyle/>
+          <a:p>
+            <a:pPr marL="0" indent="0" algn="l">
+              <a:buNone/>
+            </a:pPr>
+            <a:r>
+              <a:rPr lang="en-US" sz="1400" b="1" dirty="0">
+                <a:solidFill>
+                  <a:srgbClr val="4A90D9"/>
+                </a:solidFill>
+                <a:latin typeface="Arial" pitchFamily="34" charset="0"/>
+                <a:ea typeface="Arial" pitchFamily="34" charset="-122"/>
+                <a:cs typeface="Arial" pitchFamily="34" charset="-120"/>
+              </a:rPr>
+              <a:t>指标定义</a:t>
+            </a:r>
+            <a:endParaRPr lang="en-US" sz="1400" dirty="0"/>
+          </a:p>
+        </p:txBody>
+      </p:sp>
+      <p:sp>
+        <p:nvSpPr>
+          <p:cNvPr id="6" name="Text 4"/>
+          <p:cNvSpPr/>
+          <p:nvPr/>
+        </p:nvSpPr>
+        <p:spPr>
+          <a:xfrm>
+            <a:off x="640080" y="1371600"/>
+            <a:ext cx="7315200" cy="274320"/>
+          </a:xfrm>
+          <a:prstGeom prst="rect">
+            <a:avLst/>
+          </a:prstGeom>
+          <a:noFill/>
+          <a:ln/>
+        </p:spPr>
+        <p:txBody>
+          <a:bodyPr wrap="square" lIns="0" tIns="0" rIns="0" bIns="0" rtlCol="0" anchor="ctr"/>
+          <a:lstStyle/>
+          <a:p>
+            <a:pPr marL="0" indent="0" algn="l">
+              <a:buNone/>
+            </a:pPr>
+            <a:r>
+              <a:rPr lang="en-US" sz="1400" dirty="0">
+                <a:solidFill>
+                  <a:srgbClr val="1E293B"/>
+                </a:solidFill>
+                <a:latin typeface="Consolas" pitchFamily="34" charset="0"/>
+                <a:ea typeface="Consolas" pitchFamily="34" charset="-122"/>
+                <a:cs typeface="Consolas" pitchFamily="34" charset="-120"/>
+              </a:rPr>
+              <a:t>Baseline: F1̄_after(k=5, random)</a:t>
+            </a:r>
+            <a:endParaRPr lang="en-US" sz="1400" dirty="0"/>
+          </a:p>
+        </p:txBody>
+      </p:sp>
+      <p:sp>
+        <p:nvSpPr>
+          <p:cNvPr id="7" name="Text 5"/>
+          <p:cNvSpPr/>
+          <p:nvPr/>
+        </p:nvSpPr>
+        <p:spPr>
+          <a:xfrm>
+            <a:off x="640080" y="1691640"/>
+            <a:ext cx="7315200" cy="274320"/>
+          </a:xfrm>
+          <a:prstGeom prst="rect">
+            <a:avLst/>
+          </a:prstGeom>
+          <a:noFill/>
+          <a:ln/>
+        </p:spPr>
+        <p:txBody>
+          <a:bodyPr wrap="square" lIns="0" tIns="0" rIns="0" bIns="0" rtlCol="0" anchor="ctr"/>
+          <a:lstStyle/>
+          <a:p>
+            <a:pPr marL="0" indent="0" algn="l">
+              <a:buNone/>
+            </a:pPr>
+            <a:r>
+              <a:rPr lang="en-US" sz="1400" dirty="0">
+                <a:solidFill>
+                  <a:srgbClr val="1E293B"/>
+                </a:solidFill>
+                <a:latin typeface="Consolas" pitchFamily="34" charset="0"/>
+                <a:ea typeface="Consolas" pitchFamily="34" charset="-122"/>
+                <a:cs typeface="Consolas" pitchFamily="34" charset="-120"/>
+              </a:rPr>
+              <a:t>Relative F1 Drop = F1̄_after(k=5, random) - F1_after(ratio=0.05, attack)</a:t>
+            </a:r>
+            <a:endParaRPr lang="en-US" sz="1400" dirty="0"/>
+          </a:p>
+        </p:txBody>
+      </p:sp>
+      <p:sp>
+        <p:nvSpPr>
+          <p:cNvPr id="8" name="Text 6"/>
+          <p:cNvSpPr/>
+          <p:nvPr/>
+        </p:nvSpPr>
+        <p:spPr>
+          <a:xfrm>
+            <a:off x="457200" y="2468880"/>
+            <a:ext cx="8229600" cy="365760"/>
+          </a:xfrm>
+          <a:prstGeom prst="rect">
+            <a:avLst/>
+          </a:prstGeom>
+          <a:noFill/>
+          <a:ln/>
+        </p:spPr>
+        <p:txBody>
+          <a:bodyPr wrap="square" lIns="0" tIns="0" rIns="0" bIns="0" rtlCol="0" anchor="ctr"/>
+          <a:lstStyle/>
+          <a:p>
+            <a:pPr marL="0" indent="0" algn="l">
+              <a:buNone/>
+            </a:pPr>
+            <a:r>
+              <a:rPr lang="en-US" sz="1600" b="1" dirty="0">
+                <a:solidFill>
+                  <a:srgbClr val="1E293B"/>
+                </a:solidFill>
+                <a:latin typeface="Arial" pitchFamily="34" charset="0"/>
+                <a:ea typeface="Arial" pitchFamily="34" charset="-122"/>
+                <a:cs typeface="Arial" pitchFamily="34" charset="-120"/>
+              </a:rPr>
+              <a:t>解决的问题</a:t>
+            </a:r>
+            <a:endParaRPr lang="en-US" sz="1600" dirty="0"/>
+          </a:p>
+        </p:txBody>
+      </p:sp>
+      <p:sp>
+        <p:nvSpPr>
+          <p:cNvPr id="9" name="Text 7"/>
+          <p:cNvSpPr/>
+          <p:nvPr/>
+        </p:nvSpPr>
+        <p:spPr>
+          <a:xfrm>
+            <a:off x="457200" y="2834640"/>
+            <a:ext cx="8229600" cy="731520"/>
+          </a:xfrm>
+          <a:prstGeom prst="rect">
+            <a:avLst/>
+          </a:prstGeom>
+          <a:noFill/>
+          <a:ln/>
+        </p:spPr>
+        <p:txBody>
+          <a:bodyPr wrap="square" lIns="0" tIns="0" rIns="0" bIns="0" rtlCol="0" anchor="ctr"/>
+          <a:lstStyle/>
+          <a:p>
+            <a:pPr marL="0" indent="0" algn="l">
+              <a:buNone/>
+            </a:pPr>
+            <a:r>
+              <a:rPr lang="en-US" sz="1500" dirty="0">
+                <a:solidFill>
+                  <a:srgbClr val="1E293B"/>
+                </a:solidFill>
+                <a:latin typeface="Arial" pitchFamily="34" charset="0"/>
+                <a:ea typeface="Arial" pitchFamily="34" charset="-122"/>
+                <a:cs typeface="Arial" pitchFamily="34" charset="-120"/>
+              </a:rPr>
+              <a:t>它把「方法自身带来的性能漂移」从「攻击额外造成的损伤」里剥离出来，特别适用于解释 Shard-based 的反直觉现象。</a:t>
+            </a:r>
+            <a:endParaRPr lang="en-US" sz="1500" dirty="0"/>
+          </a:p>
+        </p:txBody>
+      </p:sp>
+      <p:sp>
+        <p:nvSpPr>
+          <p:cNvPr id="10" name="Shape 8"/>
+          <p:cNvSpPr/>
+          <p:nvPr/>
+        </p:nvSpPr>
+        <p:spPr>
+          <a:xfrm>
+            <a:off x="457200" y="3657600"/>
+            <a:ext cx="8229600" cy="914400"/>
+          </a:xfrm>
+          <a:prstGeom prst="rect">
             <a:avLst/>
           </a:prstGeom>
           <a:solidFill>
-            <a:srgbClr val="4A90D9"/>
+            <a:srgbClr val="F59E0B"/>
           </a:solidFill>
           <a:ln/>
-        </p:spPr>
-      </p:sp>
-      <p:sp>
-        <p:nvSpPr>
-          <p:cNvPr id="6" name="Text 4"/>
-          <p:cNvSpPr/>
-          <p:nvPr/>
-        </p:nvSpPr>
-        <p:spPr>
-          <a:xfrm>
-            <a:off x="594360" y="1005840"/>
-            <a:ext cx="365760" cy="365760"/>
-          </a:xfrm>
-          <a:prstGeom prst="rect">
-            <a:avLst/>
-          </a:prstGeom>
-          <a:noFill/>
-          <a:ln/>
-        </p:spPr>
-        <p:txBody>
-          <a:bodyPr wrap="square" lIns="0" tIns="0" rIns="0" bIns="0" rtlCol="0" anchor="ctr"/>
-          <a:lstStyle/>
-          <a:p>
-            <a:pPr algn="ctr" indent="0" marL="0">
-              <a:buNone/>
-            </a:pPr>
-            <a:r>
-              <a:rPr lang="en-US" sz="1400" b="1" dirty="0">
-                <a:solidFill>
-                  <a:srgbClr val="FFFFFF"/>
-                </a:solidFill>
-                <a:latin typeface="Arial" pitchFamily="34" charset="0"/>
-                <a:ea typeface="Arial" pitchFamily="34" charset="-122"/>
-                <a:cs typeface="Arial" pitchFamily="34" charset="-120"/>
-              </a:rPr>
-              <a:t>1</a:t>
-            </a:r>
-            <a:endParaRPr lang="en-US" sz="1400" dirty="0"/>
-          </a:p>
-        </p:txBody>
-      </p:sp>
-      <p:sp>
-        <p:nvSpPr>
-          <p:cNvPr id="7" name="Text 5"/>
-          <p:cNvSpPr/>
-          <p:nvPr/>
-        </p:nvSpPr>
-        <p:spPr>
-          <a:xfrm>
-            <a:off x="594360" y="1463040"/>
-            <a:ext cx="2377440" cy="365760"/>
-          </a:xfrm>
-          <a:prstGeom prst="rect">
-            <a:avLst/>
-          </a:prstGeom>
-          <a:noFill/>
-          <a:ln/>
-        </p:spPr>
-        <p:txBody>
-          <a:bodyPr wrap="square" lIns="0" tIns="0" rIns="0" bIns="0" rtlCol="0" anchor="ctr"/>
-          <a:lstStyle/>
-          <a:p>
-            <a:pPr algn="l" indent="0" marL="0">
-              <a:buNone/>
-            </a:pPr>
-            <a:r>
-              <a:rPr lang="en-US" sz="1400" b="1" dirty="0">
-                <a:solidFill>
-                  <a:srgbClr val="1E293B"/>
-                </a:solidFill>
-                <a:latin typeface="Arial" pitchFamily="34" charset="0"/>
-                <a:ea typeface="Arial" pitchFamily="34" charset="-122"/>
-                <a:cs typeface="Arial" pitchFamily="34" charset="-120"/>
-              </a:rPr>
-              <a:t>实验体系变好</a:t>
-            </a:r>
-            <a:endParaRPr lang="en-US" sz="1400" dirty="0"/>
-          </a:p>
-        </p:txBody>
-      </p:sp>
-      <p:sp>
-        <p:nvSpPr>
-          <p:cNvPr id="8" name="Text 6"/>
-          <p:cNvSpPr/>
-          <p:nvPr/>
-        </p:nvSpPr>
-        <p:spPr>
-          <a:xfrm>
-            <a:off x="594360" y="1828800"/>
-            <a:ext cx="2377440" cy="640080"/>
-          </a:xfrm>
-          <a:prstGeom prst="rect">
-            <a:avLst/>
-          </a:prstGeom>
-          <a:noFill/>
-          <a:ln/>
-        </p:spPr>
-        <p:txBody>
-          <a:bodyPr wrap="square" lIns="0" tIns="0" rIns="0" bIns="0" rtlCol="0" anchor="ctr"/>
-          <a:lstStyle/>
-          <a:p>
-            <a:pPr algn="l" indent="0" marL="0">
-              <a:buNone/>
-            </a:pPr>
-            <a:r>
-              <a:rPr lang="en-US" sz="1100" dirty="0">
-                <a:solidFill>
-                  <a:srgbClr val="64748B"/>
-                </a:solidFill>
-                <a:latin typeface="Arial" pitchFamily="34" charset="0"/>
-                <a:ea typeface="Arial" pitchFamily="34" charset="-122"/>
-                <a:cs typeface="Arial" pitchFamily="34" charset="-120"/>
-              </a:rPr>
-              <a:t>从单配置扩展到跨方法/数据/模型/ratio 完整矩阵，5-seed 完整</a:t>
-            </a:r>
-            <a:endParaRPr lang="en-US" sz="1100" dirty="0"/>
-          </a:p>
-        </p:txBody>
-      </p:sp>
-      <p:sp>
-        <p:nvSpPr>
-          <p:cNvPr id="9" name="Shape 7"/>
-          <p:cNvSpPr/>
-          <p:nvPr/>
-        </p:nvSpPr>
-        <p:spPr>
-          <a:xfrm>
-            <a:off x="3291840" y="914400"/>
-            <a:ext cx="2651760" cy="1645920"/>
-          </a:xfrm>
-          <a:prstGeom prst="rect">
-            <a:avLst/>
-          </a:prstGeom>
-          <a:solidFill>
-            <a:srgbClr val="FFFFFF"/>
-          </a:solidFill>
-          <a:ln/>
           <a:effectLst>
-            <a:outerShdw sx="100000" sy="100000" kx="0" ky="0" algn="bl" rotWithShape="0" blurRad="50800" dist="25400" dir="8100000">
+            <a:outerShdw blurRad="50800" dist="25400" dir="8100000" algn="bl" rotWithShape="0">
               <a:srgbClr val="000000">
                 <a:alpha val="15000"/>
               </a:srgbClr>
             </a:outerShdw>
           </a:effectLst>
         </p:spPr>
-      </p:sp>
-      <p:sp>
-        <p:nvSpPr>
-          <p:cNvPr id="10" name="Shape 8"/>
-          <p:cNvSpPr/>
-          <p:nvPr/>
-        </p:nvSpPr>
-        <p:spPr>
-          <a:xfrm>
-            <a:off x="3429000" y="1005840"/>
-            <a:ext cx="365760" cy="365760"/>
-          </a:xfrm>
-          <a:prstGeom prst="ellipse">
-            <a:avLst/>
-          </a:prstGeom>
-          <a:solidFill>
-            <a:srgbClr val="4A90D9"/>
-          </a:solidFill>
-          <a:ln/>
-        </p:spPr>
+        <p:txBody>
+          <a:bodyPr/>
+          <a:lstStyle/>
+          <a:p>
+            <a:endParaRPr lang="zh-CN" altLang="en-US"/>
+          </a:p>
+        </p:txBody>
       </p:sp>
       <p:sp>
         <p:nvSpPr>
@@ -6178,24 +7225,24 @@
         </p:nvSpPr>
         <p:spPr>
           <a:xfrm>
-            <a:off x="3429000" y="1005840"/>
-            <a:ext cx="365760" cy="365760"/>
-          </a:xfrm>
-          <a:prstGeom prst="rect">
-            <a:avLst/>
-          </a:prstGeom>
-          <a:noFill/>
-          <a:ln/>
-        </p:spPr>
-        <p:txBody>
-          <a:bodyPr wrap="square" lIns="0" tIns="0" rIns="0" bIns="0" rtlCol="0" anchor="ctr"/>
-          <a:lstStyle/>
-          <a:p>
-            <a:pPr algn="ctr" indent="0" marL="0">
-              <a:buNone/>
-            </a:pPr>
-            <a:r>
-              <a:rPr lang="en-US" sz="1400" b="1" dirty="0">
+            <a:off x="640080" y="3886200"/>
+            <a:ext cx="7772400" cy="457200"/>
+          </a:xfrm>
+          <a:prstGeom prst="rect">
+            <a:avLst/>
+          </a:prstGeom>
+          <a:noFill/>
+          <a:ln/>
+        </p:spPr>
+        <p:txBody>
+          <a:bodyPr wrap="square" lIns="0" tIns="0" rIns="0" bIns="0" rtlCol="0" anchor="ctr"/>
+          <a:lstStyle/>
+          <a:p>
+            <a:pPr marL="0" indent="0" algn="ctr">
+              <a:buNone/>
+            </a:pPr>
+            <a:r>
+              <a:rPr lang="en-US" sz="1600" b="1" dirty="0">
                 <a:solidFill>
                   <a:srgbClr val="FFFFFF"/>
                 </a:solidFill>
@@ -6203,411 +7250,9 @@
                 <a:ea typeface="Arial" pitchFamily="34" charset="-122"/>
                 <a:cs typeface="Arial" pitchFamily="34" charset="-120"/>
               </a:rPr>
-              <a:t>2</a:t>
-            </a:r>
-            <a:endParaRPr lang="en-US" sz="1400" dirty="0"/>
-          </a:p>
-        </p:txBody>
-      </p:sp>
-      <p:sp>
-        <p:nvSpPr>
-          <p:cNvPr id="12" name="Text 10"/>
-          <p:cNvSpPr/>
-          <p:nvPr/>
-        </p:nvSpPr>
-        <p:spPr>
-          <a:xfrm>
-            <a:off x="3429000" y="1463040"/>
-            <a:ext cx="2377440" cy="365760"/>
-          </a:xfrm>
-          <a:prstGeom prst="rect">
-            <a:avLst/>
-          </a:prstGeom>
-          <a:noFill/>
-          <a:ln/>
-        </p:spPr>
-        <p:txBody>
-          <a:bodyPr wrap="square" lIns="0" tIns="0" rIns="0" bIns="0" rtlCol="0" anchor="ctr"/>
-          <a:lstStyle/>
-          <a:p>
-            <a:pPr algn="l" indent="0" marL="0">
-              <a:buNone/>
-            </a:pPr>
-            <a:r>
-              <a:rPr lang="en-US" sz="1400" b="1" dirty="0">
-                <a:solidFill>
-                  <a:srgbClr val="1E293B"/>
-                </a:solidFill>
-                <a:latin typeface="Arial" pitchFamily="34" charset="0"/>
-                <a:ea typeface="Arial" pitchFamily="34" charset="-122"/>
-                <a:cs typeface="Arial" pitchFamily="34" charset="-120"/>
-              </a:rPr>
-              <a:t>工程效率变好</a:t>
-            </a:r>
-            <a:endParaRPr lang="en-US" sz="1400" dirty="0"/>
-          </a:p>
-        </p:txBody>
-      </p:sp>
-      <p:sp>
-        <p:nvSpPr>
-          <p:cNvPr id="13" name="Text 11"/>
-          <p:cNvSpPr/>
-          <p:nvPr/>
-        </p:nvSpPr>
-        <p:spPr>
-          <a:xfrm>
-            <a:off x="3429000" y="1828800"/>
-            <a:ext cx="2377440" cy="640080"/>
-          </a:xfrm>
-          <a:prstGeom prst="rect">
-            <a:avLst/>
-          </a:prstGeom>
-          <a:noFill/>
-          <a:ln/>
-        </p:spPr>
-        <p:txBody>
-          <a:bodyPr wrap="square" lIns="0" tIns="0" rIns="0" bIns="0" rtlCol="0" anchor="ctr"/>
-          <a:lstStyle/>
-          <a:p>
-            <a:pPr algn="l" indent="0" marL="0">
-              <a:buNone/>
-            </a:pPr>
-            <a:r>
-              <a:rPr lang="en-US" sz="1100" dirty="0">
-                <a:solidFill>
-                  <a:srgbClr val="64748B"/>
-                </a:solidFill>
-                <a:latin typeface="Arial" pitchFamily="34" charset="0"/>
-                <a:ea typeface="Arial" pitchFamily="34" charset="-122"/>
-                <a:cs typeface="Arial" pitchFamily="34" charset="-120"/>
-              </a:rPr>
-              <a:t>IM 选点端到端提速 34.55x，明确大图迁移路线 (D-SSA)</a:t>
-            </a:r>
-            <a:endParaRPr lang="en-US" sz="1100" dirty="0"/>
-          </a:p>
-        </p:txBody>
-      </p:sp>
-      <p:sp>
-        <p:nvSpPr>
-          <p:cNvPr id="14" name="Shape 12"/>
-          <p:cNvSpPr/>
-          <p:nvPr/>
-        </p:nvSpPr>
-        <p:spPr>
-          <a:xfrm>
-            <a:off x="6126480" y="914400"/>
-            <a:ext cx="2651760" cy="1645920"/>
-          </a:xfrm>
-          <a:prstGeom prst="rect">
-            <a:avLst/>
-          </a:prstGeom>
-          <a:solidFill>
-            <a:srgbClr val="FFFFFF"/>
-          </a:solidFill>
-          <a:ln/>
-          <a:effectLst>
-            <a:outerShdw sx="100000" sy="100000" kx="0" ky="0" algn="bl" rotWithShape="0" blurRad="50800" dist="25400" dir="8100000">
-              <a:srgbClr val="000000">
-                <a:alpha val="15000"/>
-              </a:srgbClr>
-            </a:outerShdw>
-          </a:effectLst>
-        </p:spPr>
-      </p:sp>
-      <p:sp>
-        <p:nvSpPr>
-          <p:cNvPr id="15" name="Shape 13"/>
-          <p:cNvSpPr/>
-          <p:nvPr/>
-        </p:nvSpPr>
-        <p:spPr>
-          <a:xfrm>
-            <a:off x="6263640" y="1005840"/>
-            <a:ext cx="365760" cy="365760"/>
-          </a:xfrm>
-          <a:prstGeom prst="ellipse">
-            <a:avLst/>
-          </a:prstGeom>
-          <a:solidFill>
-            <a:srgbClr val="4A90D9"/>
-          </a:solidFill>
-          <a:ln/>
-        </p:spPr>
-      </p:sp>
-      <p:sp>
-        <p:nvSpPr>
-          <p:cNvPr id="16" name="Text 14"/>
-          <p:cNvSpPr/>
-          <p:nvPr/>
-        </p:nvSpPr>
-        <p:spPr>
-          <a:xfrm>
-            <a:off x="6263640" y="1005840"/>
-            <a:ext cx="365760" cy="365760"/>
-          </a:xfrm>
-          <a:prstGeom prst="rect">
-            <a:avLst/>
-          </a:prstGeom>
-          <a:noFill/>
-          <a:ln/>
-        </p:spPr>
-        <p:txBody>
-          <a:bodyPr wrap="square" lIns="0" tIns="0" rIns="0" bIns="0" rtlCol="0" anchor="ctr"/>
-          <a:lstStyle/>
-          <a:p>
-            <a:pPr algn="ctr" indent="0" marL="0">
-              <a:buNone/>
-            </a:pPr>
-            <a:r>
-              <a:rPr lang="en-US" sz="1400" b="1" dirty="0">
-                <a:solidFill>
-                  <a:srgbClr val="FFFFFF"/>
-                </a:solidFill>
-                <a:latin typeface="Arial" pitchFamily="34" charset="0"/>
-                <a:ea typeface="Arial" pitchFamily="34" charset="-122"/>
-                <a:cs typeface="Arial" pitchFamily="34" charset="-120"/>
-              </a:rPr>
-              <a:t>3</a:t>
-            </a:r>
-            <a:endParaRPr lang="en-US" sz="1400" dirty="0"/>
-          </a:p>
-        </p:txBody>
-      </p:sp>
-      <p:sp>
-        <p:nvSpPr>
-          <p:cNvPr id="17" name="Text 15"/>
-          <p:cNvSpPr/>
-          <p:nvPr/>
-        </p:nvSpPr>
-        <p:spPr>
-          <a:xfrm>
-            <a:off x="6263640" y="1463040"/>
-            <a:ext cx="2377440" cy="365760"/>
-          </a:xfrm>
-          <a:prstGeom prst="rect">
-            <a:avLst/>
-          </a:prstGeom>
-          <a:noFill/>
-          <a:ln/>
-        </p:spPr>
-        <p:txBody>
-          <a:bodyPr wrap="square" lIns="0" tIns="0" rIns="0" bIns="0" rtlCol="0" anchor="ctr"/>
-          <a:lstStyle/>
-          <a:p>
-            <a:pPr algn="l" indent="0" marL="0">
-              <a:buNone/>
-            </a:pPr>
-            <a:r>
-              <a:rPr lang="en-US" sz="1400" b="1" dirty="0">
-                <a:solidFill>
-                  <a:srgbClr val="1E293B"/>
-                </a:solidFill>
-                <a:latin typeface="Arial" pitchFamily="34" charset="0"/>
-                <a:ea typeface="Arial" pitchFamily="34" charset="-122"/>
-                <a:cs typeface="Arial" pitchFamily="34" charset="-120"/>
-              </a:rPr>
-              <a:t>解释力变好</a:t>
-            </a:r>
-            <a:endParaRPr lang="en-US" sz="1400" dirty="0"/>
-          </a:p>
-        </p:txBody>
-      </p:sp>
-      <p:sp>
-        <p:nvSpPr>
-          <p:cNvPr id="18" name="Text 16"/>
-          <p:cNvSpPr/>
-          <p:nvPr/>
-        </p:nvSpPr>
-        <p:spPr>
-          <a:xfrm>
-            <a:off x="6263640" y="1828800"/>
-            <a:ext cx="2377440" cy="640080"/>
-          </a:xfrm>
-          <a:prstGeom prst="rect">
-            <a:avLst/>
-          </a:prstGeom>
-          <a:noFill/>
-          <a:ln/>
-        </p:spPr>
-        <p:txBody>
-          <a:bodyPr wrap="square" lIns="0" tIns="0" rIns="0" bIns="0" rtlCol="0" anchor="ctr"/>
-          <a:lstStyle/>
-          <a:p>
-            <a:pPr algn="l" indent="0" marL="0">
-              <a:buNone/>
-            </a:pPr>
-            <a:r>
-              <a:rPr lang="en-US" sz="1100" dirty="0">
-                <a:solidFill>
-                  <a:srgbClr val="64748B"/>
-                </a:solidFill>
-                <a:latin typeface="Arial" pitchFamily="34" charset="0"/>
-                <a:ea typeface="Arial" pitchFamily="34" charset="-122"/>
-                <a:cs typeface="Arial" pitchFamily="34" charset="-120"/>
-              </a:rPr>
-              <a:t>Relative 指标准确判断「攻击有效」还是「方法本身增益」</a:t>
-            </a:r>
-            <a:endParaRPr lang="en-US" sz="1100" dirty="0"/>
-          </a:p>
-        </p:txBody>
-      </p:sp>
-      <p:sp>
-        <p:nvSpPr>
-          <p:cNvPr id="19" name="Text 17"/>
-          <p:cNvSpPr/>
-          <p:nvPr/>
-        </p:nvSpPr>
-        <p:spPr>
-          <a:xfrm>
-            <a:off x="457200" y="2743200"/>
-            <a:ext cx="8229600" cy="365760"/>
-          </a:xfrm>
-          <a:prstGeom prst="rect">
-            <a:avLst/>
-          </a:prstGeom>
-          <a:noFill/>
-          <a:ln/>
-        </p:spPr>
-        <p:txBody>
-          <a:bodyPr wrap="square" lIns="0" tIns="0" rIns="0" bIns="0" rtlCol="0" anchor="ctr"/>
-          <a:lstStyle/>
-          <a:p>
-            <a:pPr algn="l" indent="0" marL="0">
-              <a:buNone/>
-            </a:pPr>
-            <a:r>
-              <a:rPr lang="en-US" sz="1600" b="1" dirty="0">
-                <a:solidFill>
-                  <a:srgbClr val="1E293B"/>
-                </a:solidFill>
-                <a:latin typeface="Arial" pitchFamily="34" charset="0"/>
-                <a:ea typeface="Arial" pitchFamily="34" charset="-122"/>
-                <a:cs typeface="Arial" pitchFamily="34" charset="-120"/>
-              </a:rPr>
-              <a:t>Shard-based「gap 提升」解释</a:t>
+              <a:t>核心价值：区分「方法自带提升」vs 「攻击真实增益」</a:t>
             </a:r>
             <a:endParaRPr lang="en-US" sz="1600" dirty="0"/>
-          </a:p>
-        </p:txBody>
-      </p:sp>
-      <p:sp>
-        <p:nvSpPr>
-          <p:cNvPr id="20" name="Shape 18"/>
-          <p:cNvSpPr/>
-          <p:nvPr/>
-        </p:nvSpPr>
-        <p:spPr>
-          <a:xfrm>
-            <a:off x="457200" y="3108960"/>
-            <a:ext cx="8229600" cy="1645920"/>
-          </a:xfrm>
-          <a:prstGeom prst="rect">
-            <a:avLst/>
-          </a:prstGeom>
-          <a:solidFill>
-            <a:srgbClr val="FFFFFF"/>
-          </a:solidFill>
-          <a:ln/>
-          <a:effectLst>
-            <a:outerShdw sx="100000" sy="100000" kx="0" ky="0" algn="bl" rotWithShape="0" blurRad="50800" dist="25400" dir="8100000">
-              <a:srgbClr val="000000">
-                <a:alpha val="15000"/>
-              </a:srgbClr>
-            </a:outerShdw>
-          </a:effectLst>
-        </p:spPr>
-      </p:sp>
-      <p:sp>
-        <p:nvSpPr>
-          <p:cNvPr id="21" name="Text 19"/>
-          <p:cNvSpPr/>
-          <p:nvPr/>
-        </p:nvSpPr>
-        <p:spPr>
-          <a:xfrm>
-            <a:off x="640080" y="3246120"/>
-            <a:ext cx="7772400" cy="1371600"/>
-          </a:xfrm>
-          <a:prstGeom prst="rect">
-            <a:avLst/>
-          </a:prstGeom>
-          <a:noFill/>
-          <a:ln/>
-        </p:spPr>
-        <p:txBody>
-          <a:bodyPr wrap="square" lIns="0" tIns="0" rIns="0" bIns="0" rtlCol="0" anchor="ctr"/>
-          <a:lstStyle/>
-          <a:p>
-            <a:pPr algn="l" marL="342900" indent="-342900">
-              <a:buSzPct val="100000"/>
-              <a:buChar char="•"/>
-            </a:pPr>
-            <a:r>
-              <a:rPr lang="en-US" sz="1300" dirty="0">
-                <a:solidFill>
-                  <a:srgbClr val="1E293B"/>
-                </a:solidFill>
-                <a:latin typeface="Arial" pitchFamily="34" charset="0"/>
-                <a:ea typeface="Arial" pitchFamily="34" charset="-122"/>
-                <a:cs typeface="Arial" pitchFamily="34" charset="-120"/>
-              </a:rPr>
-              <a:t>绝对指标：GraphEraser 经常出现负 drop（越删越好）</a:t>
-            </a:r>
-            <a:endParaRPr lang="en-US" sz="1300" dirty="0"/>
-          </a:p>
-          <a:p>
-            <a:pPr algn="l" marL="342900" indent="-342900">
-              <a:buSzPct val="100000"/>
-              <a:buChar char="•"/>
-            </a:pPr>
-            <a:r>
-              <a:rPr lang="en-US" sz="1300" dirty="0">
-                <a:solidFill>
-                  <a:srgbClr val="1E293B"/>
-                </a:solidFill>
-                <a:latin typeface="Arial" pitchFamily="34" charset="0"/>
-                <a:ea typeface="Arial" pitchFamily="34" charset="-122"/>
-                <a:cs typeface="Arial" pitchFamily="34" charset="-120"/>
-              </a:rPr>
-              <a:t>MG-0 cora/gcn/r=0.05: GraphEraser F1 Drop = -5.2% ± 2.7</a:t>
-            </a:r>
-            <a:endParaRPr lang="en-US" sz="1300" dirty="0"/>
-          </a:p>
-          <a:p>
-            <a:pPr algn="l" marL="342900" indent="-342900">
-              <a:buSzPct val="100000"/>
-              <a:buChar char="•"/>
-            </a:pPr>
-            <a:r>
-              <a:rPr lang="en-US" sz="1300" dirty="0">
-                <a:solidFill>
-                  <a:srgbClr val="1E293B"/>
-                </a:solidFill>
-                <a:latin typeface="Arial" pitchFamily="34" charset="0"/>
-                <a:ea typeface="Arial" pitchFamily="34" charset="-122"/>
-                <a:cs typeface="Arial" pitchFamily="34" charset="-120"/>
-              </a:rPr>
-              <a:t>说明 Shard-based 本身存在「性能抬升效应」</a:t>
-            </a:r>
-            <a:endParaRPr lang="en-US" sz="1300" dirty="0"/>
-          </a:p>
-          <a:p>
-            <a:pPr algn="l" marL="342900" indent="-342900">
-              <a:buSzPct val="100000"/>
-              <a:buChar char="•"/>
-            </a:pPr>
-            <a:r>
-              <a:rPr lang="en-US" sz="1300" dirty="0">
-                <a:solidFill>
-                  <a:srgbClr val="1E293B"/>
-                </a:solidFill>
-                <a:latin typeface="Arial" pitchFamily="34" charset="0"/>
-                <a:ea typeface="Arial" pitchFamily="34" charset="-122"/>
-                <a:cs typeface="Arial" pitchFamily="34" charset="-120"/>
-              </a:rPr>
-              <a:t>Relative 口径下仍可看到攻击产生额外影响</a:t>
-            </a:r>
-            <a:endParaRPr lang="en-US" sz="1300" dirty="0"/>
           </a:p>
         </p:txBody>
       </p:sp>
@@ -6621,12 +7266,13 @@
 
 <file path=ppt/slides/slide8.xml><?xml version="1.0" encoding="utf-8"?>
 <p:sld xmlns:a="http://schemas.openxmlformats.org/drawingml/2006/main" xmlns:r="http://schemas.openxmlformats.org/officeDocument/2006/relationships" xmlns:p="http://schemas.openxmlformats.org/presentationml/2006/main">
-  <p:cSld name="Slide 8">
+  <p:cSld name="Slide 7">
     <p:bg>
       <p:bgPr>
         <a:solidFill>
           <a:srgbClr val="E8F0F8"/>
         </a:solidFill>
+        <a:effectLst/>
       </p:bgPr>
     </p:bg>
     <p:spTree>
@@ -6662,6 +7308,13 @@
           </a:solidFill>
           <a:ln/>
         </p:spPr>
+        <p:txBody>
+          <a:bodyPr/>
+          <a:lstStyle/>
+          <a:p>
+            <a:endParaRPr lang="zh-CN" altLang="en-US"/>
+          </a:p>
+        </p:txBody>
       </p:sp>
       <p:sp>
         <p:nvSpPr>
@@ -6684,7 +7337,7 @@
           <a:bodyPr wrap="square" lIns="0" tIns="0" rIns="0" bIns="0" rtlCol="0" anchor="ctr"/>
           <a:lstStyle/>
           <a:p>
-            <a:pPr algn="l" indent="0" marL="0">
+            <a:pPr marL="0" indent="0" algn="l">
               <a:buNone/>
             </a:pPr>
             <a:r>
@@ -6696,7 +7349,7 @@
                 <a:ea typeface="Arial" pitchFamily="34" charset="-122"/>
                 <a:cs typeface="Arial" pitchFamily="34" charset="-120"/>
               </a:rPr>
-              <a:t>4. 方法族稳定性结论</a:t>
+              <a:t>4. 深度分析：是否变好？</a:t>
             </a:r>
             <a:endParaRPr lang="en-US" sz="2400" dirty="0"/>
           </a:p>
@@ -6711,7 +7364,7 @@
         <p:spPr>
           <a:xfrm>
             <a:off x="457200" y="914400"/>
-            <a:ext cx="8229600" cy="1188720"/>
+            <a:ext cx="2651760" cy="1645920"/>
           </a:xfrm>
           <a:prstGeom prst="rect">
             <a:avLst/>
@@ -6721,13 +7374,20 @@
           </a:solidFill>
           <a:ln/>
           <a:effectLst>
-            <a:outerShdw sx="100000" sy="100000" kx="0" ky="0" algn="bl" rotWithShape="0" blurRad="50800" dist="25400" dir="8100000">
+            <a:outerShdw blurRad="50800" dist="25400" dir="8100000" algn="bl" rotWithShape="0">
               <a:srgbClr val="000000">
                 <a:alpha val="15000"/>
               </a:srgbClr>
             </a:outerShdw>
           </a:effectLst>
         </p:spPr>
+        <p:txBody>
+          <a:bodyPr/>
+          <a:lstStyle/>
+          <a:p>
+            <a:endParaRPr lang="zh-CN" altLang="en-US"/>
+          </a:p>
+        </p:txBody>
       </p:sp>
       <p:sp>
         <p:nvSpPr>
@@ -6737,17 +7397,24 @@
         </p:nvSpPr>
         <p:spPr>
           <a:xfrm>
-            <a:off x="457200" y="914400"/>
-            <a:ext cx="91440" cy="1188720"/>
-          </a:xfrm>
-          <a:prstGeom prst="rect">
+            <a:off x="594360" y="1005840"/>
+            <a:ext cx="365760" cy="365760"/>
+          </a:xfrm>
+          <a:prstGeom prst="ellipse">
             <a:avLst/>
           </a:prstGeom>
           <a:solidFill>
-            <a:srgbClr val="DC2626"/>
+            <a:srgbClr val="4A90D9"/>
           </a:solidFill>
           <a:ln/>
         </p:spPr>
+        <p:txBody>
+          <a:bodyPr/>
+          <a:lstStyle/>
+          <a:p>
+            <a:endParaRPr lang="zh-CN" altLang="en-US"/>
+          </a:p>
+        </p:txBody>
       </p:sp>
       <p:sp>
         <p:nvSpPr>
@@ -6757,24 +7424,63 @@
         </p:nvSpPr>
         <p:spPr>
           <a:xfrm>
-            <a:off x="731520" y="1051560"/>
-            <a:ext cx="2743200" cy="365760"/>
-          </a:xfrm>
-          <a:prstGeom prst="rect">
-            <a:avLst/>
-          </a:prstGeom>
-          <a:noFill/>
-          <a:ln/>
-        </p:spPr>
-        <p:txBody>
-          <a:bodyPr wrap="square" lIns="0" tIns="0" rIns="0" bIns="0" rtlCol="0" anchor="ctr"/>
-          <a:lstStyle/>
-          <a:p>
-            <a:pPr algn="l" indent="0" marL="0">
-              <a:buNone/>
-            </a:pPr>
-            <a:r>
-              <a:rPr lang="en-US" sz="1800" b="1" dirty="0">
+            <a:off x="594360" y="1005840"/>
+            <a:ext cx="365760" cy="365760"/>
+          </a:xfrm>
+          <a:prstGeom prst="rect">
+            <a:avLst/>
+          </a:prstGeom>
+          <a:noFill/>
+          <a:ln/>
+        </p:spPr>
+        <p:txBody>
+          <a:bodyPr wrap="square" lIns="0" tIns="0" rIns="0" bIns="0" rtlCol="0" anchor="ctr"/>
+          <a:lstStyle/>
+          <a:p>
+            <a:pPr marL="0" indent="0" algn="ctr">
+              <a:buNone/>
+            </a:pPr>
+            <a:r>
+              <a:rPr lang="en-US" sz="1400" b="1" dirty="0">
+                <a:solidFill>
+                  <a:srgbClr val="FFFFFF"/>
+                </a:solidFill>
+                <a:latin typeface="Arial" pitchFamily="34" charset="0"/>
+                <a:ea typeface="Arial" pitchFamily="34" charset="-122"/>
+                <a:cs typeface="Arial" pitchFamily="34" charset="-120"/>
+              </a:rPr>
+              <a:t>1</a:t>
+            </a:r>
+            <a:endParaRPr lang="en-US" sz="1400" dirty="0"/>
+          </a:p>
+        </p:txBody>
+      </p:sp>
+      <p:sp>
+        <p:nvSpPr>
+          <p:cNvPr id="7" name="Text 5"/>
+          <p:cNvSpPr/>
+          <p:nvPr/>
+        </p:nvSpPr>
+        <p:spPr>
+          <a:xfrm>
+            <a:off x="594360" y="1463040"/>
+            <a:ext cx="2377440" cy="365760"/>
+          </a:xfrm>
+          <a:prstGeom prst="rect">
+            <a:avLst/>
+          </a:prstGeom>
+          <a:noFill/>
+          <a:ln/>
+        </p:spPr>
+        <p:txBody>
+          <a:bodyPr wrap="square" lIns="0" tIns="0" rIns="0" bIns="0" rtlCol="0" anchor="ctr"/>
+          <a:lstStyle/>
+          <a:p>
+            <a:pPr marL="0" indent="0" algn="l">
+              <a:buNone/>
+            </a:pPr>
+            <a:r>
+              <a:rPr lang="en-US" sz="1400" b="1" dirty="0">
                 <a:solidFill>
                   <a:srgbClr val="1E293B"/>
                 </a:solidFill>
@@ -6782,46 +7488,7 @@
                 <a:ea typeface="Arial" pitchFamily="34" charset="-122"/>
                 <a:cs typeface="Arial" pitchFamily="34" charset="-120"/>
               </a:rPr>
-              <a:t>GNNDelete</a:t>
-            </a:r>
-            <a:endParaRPr lang="en-US" sz="1800" dirty="0"/>
-          </a:p>
-        </p:txBody>
-      </p:sp>
-      <p:sp>
-        <p:nvSpPr>
-          <p:cNvPr id="7" name="Text 5"/>
-          <p:cNvSpPr/>
-          <p:nvPr/>
-        </p:nvSpPr>
-        <p:spPr>
-          <a:xfrm>
-            <a:off x="3200400" y="1051560"/>
-            <a:ext cx="1828800" cy="365760"/>
-          </a:xfrm>
-          <a:prstGeom prst="rect">
-            <a:avLst/>
-          </a:prstGeom>
-          <a:noFill/>
-          <a:ln/>
-        </p:spPr>
-        <p:txBody>
-          <a:bodyPr wrap="square" lIns="0" tIns="0" rIns="0" bIns="0" rtlCol="0" anchor="ctr"/>
-          <a:lstStyle/>
-          <a:p>
-            <a:pPr algn="l" indent="0" marL="0">
-              <a:buNone/>
-            </a:pPr>
-            <a:r>
-              <a:rPr lang="en-US" sz="1400" b="1" dirty="0">
-                <a:solidFill>
-                  <a:srgbClr val="DC2626"/>
-                </a:solidFill>
-                <a:latin typeface="Arial" pitchFamily="34" charset="0"/>
-                <a:ea typeface="Arial" pitchFamily="34" charset="-122"/>
-                <a:cs typeface="Arial" pitchFamily="34" charset="-120"/>
-              </a:rPr>
-              <a:t>脆弱性最高</a:t>
+              <a:t>实验体系变好</a:t>
             </a:r>
             <a:endParaRPr lang="en-US" sz="1400" dirty="0"/>
           </a:p>
@@ -6835,24 +7502,24 @@
         </p:nvSpPr>
         <p:spPr>
           <a:xfrm>
-            <a:off x="731520" y="1554480"/>
-            <a:ext cx="7772400" cy="457200"/>
-          </a:xfrm>
-          <a:prstGeom prst="rect">
-            <a:avLst/>
-          </a:prstGeom>
-          <a:noFill/>
-          <a:ln/>
-        </p:spPr>
-        <p:txBody>
-          <a:bodyPr wrap="square" lIns="0" tIns="0" rIns="0" bIns="0" rtlCol="0" anchor="ctr"/>
-          <a:lstStyle/>
-          <a:p>
-            <a:pPr algn="l" indent="0" marL="0">
-              <a:buNone/>
-            </a:pPr>
-            <a:r>
-              <a:rPr lang="en-US" sz="1300" dirty="0">
+            <a:off x="594360" y="1828800"/>
+            <a:ext cx="2377440" cy="640080"/>
+          </a:xfrm>
+          <a:prstGeom prst="rect">
+            <a:avLst/>
+          </a:prstGeom>
+          <a:noFill/>
+          <a:ln/>
+        </p:spPr>
+        <p:txBody>
+          <a:bodyPr wrap="square" lIns="0" tIns="0" rIns="0" bIns="0" rtlCol="0" anchor="ctr"/>
+          <a:lstStyle/>
+          <a:p>
+            <a:pPr marL="0" indent="0" algn="l">
+              <a:buNone/>
+            </a:pPr>
+            <a:r>
+              <a:rPr lang="en-US" sz="1100" dirty="0">
                 <a:solidFill>
                   <a:srgbClr val="64748B"/>
                 </a:solidFill>
@@ -6860,9 +7527,9 @@
                 <a:ea typeface="Arial" pitchFamily="34" charset="-122"/>
                 <a:cs typeface="Arial" pitchFamily="34" charset="-120"/>
               </a:rPr>
-              <a:t>长期处于最高 relative/f1_drop 区间</a:t>
-            </a:r>
-            <a:endParaRPr lang="en-US" sz="1300" dirty="0"/>
+              <a:t>从单配置扩展到跨方法/数据/模型/ratio 完整矩阵，5-seed 完整</a:t>
+            </a:r>
+            <a:endParaRPr lang="en-US" sz="1100" dirty="0"/>
           </a:p>
         </p:txBody>
       </p:sp>
@@ -6874,8 +7541,8 @@
         </p:nvSpPr>
         <p:spPr>
           <a:xfrm>
-            <a:off x="457200" y="2240280"/>
-            <a:ext cx="8229600" cy="1188720"/>
+            <a:off x="3291840" y="914400"/>
+            <a:ext cx="2651760" cy="1645920"/>
           </a:xfrm>
           <a:prstGeom prst="rect">
             <a:avLst/>
@@ -6885,13 +7552,20 @@
           </a:solidFill>
           <a:ln/>
           <a:effectLst>
-            <a:outerShdw sx="100000" sy="100000" kx="0" ky="0" algn="bl" rotWithShape="0" blurRad="50800" dist="25400" dir="8100000">
+            <a:outerShdw blurRad="50800" dist="25400" dir="8100000" algn="bl" rotWithShape="0">
               <a:srgbClr val="000000">
                 <a:alpha val="15000"/>
               </a:srgbClr>
             </a:outerShdw>
           </a:effectLst>
         </p:spPr>
+        <p:txBody>
+          <a:bodyPr/>
+          <a:lstStyle/>
+          <a:p>
+            <a:endParaRPr lang="zh-CN" altLang="en-US"/>
+          </a:p>
+        </p:txBody>
       </p:sp>
       <p:sp>
         <p:nvSpPr>
@@ -6901,17 +7575,24 @@
         </p:nvSpPr>
         <p:spPr>
           <a:xfrm>
-            <a:off x="457200" y="2240280"/>
-            <a:ext cx="91440" cy="1188720"/>
-          </a:xfrm>
-          <a:prstGeom prst="rect">
+            <a:off x="3429000" y="1005840"/>
+            <a:ext cx="365760" cy="365760"/>
+          </a:xfrm>
+          <a:prstGeom prst="ellipse">
             <a:avLst/>
           </a:prstGeom>
           <a:solidFill>
-            <a:srgbClr val="059669"/>
+            <a:srgbClr val="4A90D9"/>
           </a:solidFill>
           <a:ln/>
         </p:spPr>
+        <p:txBody>
+          <a:bodyPr/>
+          <a:lstStyle/>
+          <a:p>
+            <a:endParaRPr lang="zh-CN" altLang="en-US"/>
+          </a:p>
+        </p:txBody>
       </p:sp>
       <p:sp>
         <p:nvSpPr>
@@ -6921,24 +7602,63 @@
         </p:nvSpPr>
         <p:spPr>
           <a:xfrm>
-            <a:off x="731520" y="2377440"/>
-            <a:ext cx="2743200" cy="365760"/>
-          </a:xfrm>
-          <a:prstGeom prst="rect">
-            <a:avLst/>
-          </a:prstGeom>
-          <a:noFill/>
-          <a:ln/>
-        </p:spPr>
-        <p:txBody>
-          <a:bodyPr wrap="square" lIns="0" tIns="0" rIns="0" bIns="0" rtlCol="0" anchor="ctr"/>
-          <a:lstStyle/>
-          <a:p>
-            <a:pPr algn="l" indent="0" marL="0">
-              <a:buNone/>
-            </a:pPr>
-            <a:r>
-              <a:rPr lang="en-US" sz="1800" b="1" dirty="0">
+            <a:off x="3429000" y="1005840"/>
+            <a:ext cx="365760" cy="365760"/>
+          </a:xfrm>
+          <a:prstGeom prst="rect">
+            <a:avLst/>
+          </a:prstGeom>
+          <a:noFill/>
+          <a:ln/>
+        </p:spPr>
+        <p:txBody>
+          <a:bodyPr wrap="square" lIns="0" tIns="0" rIns="0" bIns="0" rtlCol="0" anchor="ctr"/>
+          <a:lstStyle/>
+          <a:p>
+            <a:pPr marL="0" indent="0" algn="ctr">
+              <a:buNone/>
+            </a:pPr>
+            <a:r>
+              <a:rPr lang="en-US" sz="1400" b="1" dirty="0">
+                <a:solidFill>
+                  <a:srgbClr val="FFFFFF"/>
+                </a:solidFill>
+                <a:latin typeface="Arial" pitchFamily="34" charset="0"/>
+                <a:ea typeface="Arial" pitchFamily="34" charset="-122"/>
+                <a:cs typeface="Arial" pitchFamily="34" charset="-120"/>
+              </a:rPr>
+              <a:t>2</a:t>
+            </a:r>
+            <a:endParaRPr lang="en-US" sz="1400" dirty="0"/>
+          </a:p>
+        </p:txBody>
+      </p:sp>
+      <p:sp>
+        <p:nvSpPr>
+          <p:cNvPr id="12" name="Text 10"/>
+          <p:cNvSpPr/>
+          <p:nvPr/>
+        </p:nvSpPr>
+        <p:spPr>
+          <a:xfrm>
+            <a:off x="3429000" y="1463040"/>
+            <a:ext cx="2377440" cy="365760"/>
+          </a:xfrm>
+          <a:prstGeom prst="rect">
+            <a:avLst/>
+          </a:prstGeom>
+          <a:noFill/>
+          <a:ln/>
+        </p:spPr>
+        <p:txBody>
+          <a:bodyPr wrap="square" lIns="0" tIns="0" rIns="0" bIns="0" rtlCol="0" anchor="ctr"/>
+          <a:lstStyle/>
+          <a:p>
+            <a:pPr marL="0" indent="0" algn="l">
+              <a:buNone/>
+            </a:pPr>
+            <a:r>
+              <a:rPr lang="en-US" sz="1400" b="1" dirty="0">
                 <a:solidFill>
                   <a:srgbClr val="1E293B"/>
                 </a:solidFill>
@@ -6946,46 +7666,7 @@
                 <a:ea typeface="Arial" pitchFamily="34" charset="-122"/>
                 <a:cs typeface="Arial" pitchFamily="34" charset="-120"/>
               </a:rPr>
-              <a:t>GIF/IDEA/MEGU</a:t>
-            </a:r>
-            <a:endParaRPr lang="en-US" sz="1800" dirty="0"/>
-          </a:p>
-        </p:txBody>
-      </p:sp>
-      <p:sp>
-        <p:nvSpPr>
-          <p:cNvPr id="12" name="Text 10"/>
-          <p:cNvSpPr/>
-          <p:nvPr/>
-        </p:nvSpPr>
-        <p:spPr>
-          <a:xfrm>
-            <a:off x="3200400" y="2377440"/>
-            <a:ext cx="1828800" cy="365760"/>
-          </a:xfrm>
-          <a:prstGeom prst="rect">
-            <a:avLst/>
-          </a:prstGeom>
-          <a:noFill/>
-          <a:ln/>
-        </p:spPr>
-        <p:txBody>
-          <a:bodyPr wrap="square" lIns="0" tIns="0" rIns="0" bIns="0" rtlCol="0" anchor="ctr"/>
-          <a:lstStyle/>
-          <a:p>
-            <a:pPr algn="l" indent="0" marL="0">
-              <a:buNone/>
-            </a:pPr>
-            <a:r>
-              <a:rPr lang="en-US" sz="1400" b="1" dirty="0">
-                <a:solidFill>
-                  <a:srgbClr val="059669"/>
-                </a:solidFill>
-                <a:latin typeface="Arial" pitchFamily="34" charset="0"/>
-                <a:ea typeface="Arial" pitchFamily="34" charset="-122"/>
-                <a:cs typeface="Arial" pitchFamily="34" charset="-120"/>
-              </a:rPr>
-              <a:t>整体更稳</a:t>
+              <a:t>工程效率变好</a:t>
             </a:r>
             <a:endParaRPr lang="en-US" sz="1400" dirty="0"/>
           </a:p>
@@ -6999,24 +7680,24 @@
         </p:nvSpPr>
         <p:spPr>
           <a:xfrm>
-            <a:off x="731520" y="2880360"/>
-            <a:ext cx="7772400" cy="457200"/>
-          </a:xfrm>
-          <a:prstGeom prst="rect">
-            <a:avLst/>
-          </a:prstGeom>
-          <a:noFill/>
-          <a:ln/>
-        </p:spPr>
-        <p:txBody>
-          <a:bodyPr wrap="square" lIns="0" tIns="0" rIns="0" bIns="0" rtlCol="0" anchor="ctr"/>
-          <a:lstStyle/>
-          <a:p>
-            <a:pPr algn="l" indent="0" marL="0">
-              <a:buNone/>
-            </a:pPr>
-            <a:r>
-              <a:rPr lang="en-US" sz="1300" dirty="0">
+            <a:off x="3429000" y="1828800"/>
+            <a:ext cx="2377440" cy="640080"/>
+          </a:xfrm>
+          <a:prstGeom prst="rect">
+            <a:avLst/>
+          </a:prstGeom>
+          <a:noFill/>
+          <a:ln/>
+        </p:spPr>
+        <p:txBody>
+          <a:bodyPr wrap="square" lIns="0" tIns="0" rIns="0" bIns="0" rtlCol="0" anchor="ctr"/>
+          <a:lstStyle/>
+          <a:p>
+            <a:pPr marL="0" indent="0" algn="l">
+              <a:buNone/>
+            </a:pPr>
+            <a:r>
+              <a:rPr lang="en-US" sz="1100" dirty="0">
                 <a:solidFill>
                   <a:srgbClr val="64748B"/>
                 </a:solidFill>
@@ -7024,9 +7705,9 @@
                 <a:ea typeface="Arial" pitchFamily="34" charset="-122"/>
                 <a:cs typeface="Arial" pitchFamily="34" charset="-120"/>
               </a:rPr>
-              <a:t>攻击效果存在但幅度显著低于 GNNDelete</a:t>
-            </a:r>
-            <a:endParaRPr lang="en-US" sz="1300" dirty="0"/>
+              <a:t>IM 选点端到端提速 34.55x，明确大图迁移路线 (D-SSA)</a:t>
+            </a:r>
+            <a:endParaRPr lang="en-US" sz="1100" dirty="0"/>
           </a:p>
         </p:txBody>
       </p:sp>
@@ -7038,8 +7719,8 @@
         </p:nvSpPr>
         <p:spPr>
           <a:xfrm>
-            <a:off x="457200" y="3566160"/>
-            <a:ext cx="8229600" cy="1188720"/>
+            <a:off x="6126480" y="914400"/>
+            <a:ext cx="2651760" cy="1645920"/>
           </a:xfrm>
           <a:prstGeom prst="rect">
             <a:avLst/>
@@ -7049,13 +7730,20 @@
           </a:solidFill>
           <a:ln/>
           <a:effectLst>
-            <a:outerShdw sx="100000" sy="100000" kx="0" ky="0" algn="bl" rotWithShape="0" blurRad="50800" dist="25400" dir="8100000">
+            <a:outerShdw blurRad="50800" dist="25400" dir="8100000" algn="bl" rotWithShape="0">
               <a:srgbClr val="000000">
                 <a:alpha val="15000"/>
               </a:srgbClr>
             </a:outerShdw>
           </a:effectLst>
         </p:spPr>
+        <p:txBody>
+          <a:bodyPr/>
+          <a:lstStyle/>
+          <a:p>
+            <a:endParaRPr lang="zh-CN" altLang="en-US"/>
+          </a:p>
+        </p:txBody>
       </p:sp>
       <p:sp>
         <p:nvSpPr>
@@ -7065,17 +7753,24 @@
         </p:nvSpPr>
         <p:spPr>
           <a:xfrm>
-            <a:off x="457200" y="3566160"/>
-            <a:ext cx="91440" cy="1188720"/>
-          </a:xfrm>
-          <a:prstGeom prst="rect">
+            <a:off x="6263640" y="1005840"/>
+            <a:ext cx="365760" cy="365760"/>
+          </a:xfrm>
+          <a:prstGeom prst="ellipse">
             <a:avLst/>
           </a:prstGeom>
           <a:solidFill>
-            <a:srgbClr val="D97706"/>
+            <a:srgbClr val="4A90D9"/>
           </a:solidFill>
           <a:ln/>
         </p:spPr>
+        <p:txBody>
+          <a:bodyPr/>
+          <a:lstStyle/>
+          <a:p>
+            <a:endParaRPr lang="zh-CN" altLang="en-US"/>
+          </a:p>
+        </p:txBody>
       </p:sp>
       <p:sp>
         <p:nvSpPr>
@@ -7085,24 +7780,63 @@
         </p:nvSpPr>
         <p:spPr>
           <a:xfrm>
-            <a:off x="731520" y="3703320"/>
-            <a:ext cx="2743200" cy="365760"/>
-          </a:xfrm>
-          <a:prstGeom prst="rect">
-            <a:avLst/>
-          </a:prstGeom>
-          <a:noFill/>
-          <a:ln/>
-        </p:spPr>
-        <p:txBody>
-          <a:bodyPr wrap="square" lIns="0" tIns="0" rIns="0" bIns="0" rtlCol="0" anchor="ctr"/>
-          <a:lstStyle/>
-          <a:p>
-            <a:pPr algn="l" indent="0" marL="0">
-              <a:buNone/>
-            </a:pPr>
-            <a:r>
-              <a:rPr lang="en-US" sz="1800" b="1" dirty="0">
+            <a:off x="6263640" y="1005840"/>
+            <a:ext cx="365760" cy="365760"/>
+          </a:xfrm>
+          <a:prstGeom prst="rect">
+            <a:avLst/>
+          </a:prstGeom>
+          <a:noFill/>
+          <a:ln/>
+        </p:spPr>
+        <p:txBody>
+          <a:bodyPr wrap="square" lIns="0" tIns="0" rIns="0" bIns="0" rtlCol="0" anchor="ctr"/>
+          <a:lstStyle/>
+          <a:p>
+            <a:pPr marL="0" indent="0" algn="ctr">
+              <a:buNone/>
+            </a:pPr>
+            <a:r>
+              <a:rPr lang="en-US" sz="1400" b="1" dirty="0">
+                <a:solidFill>
+                  <a:srgbClr val="FFFFFF"/>
+                </a:solidFill>
+                <a:latin typeface="Arial" pitchFamily="34" charset="0"/>
+                <a:ea typeface="Arial" pitchFamily="34" charset="-122"/>
+                <a:cs typeface="Arial" pitchFamily="34" charset="-120"/>
+              </a:rPr>
+              <a:t>3</a:t>
+            </a:r>
+            <a:endParaRPr lang="en-US" sz="1400" dirty="0"/>
+          </a:p>
+        </p:txBody>
+      </p:sp>
+      <p:sp>
+        <p:nvSpPr>
+          <p:cNvPr id="17" name="Text 15"/>
+          <p:cNvSpPr/>
+          <p:nvPr/>
+        </p:nvSpPr>
+        <p:spPr>
+          <a:xfrm>
+            <a:off x="6263640" y="1463040"/>
+            <a:ext cx="2377440" cy="365760"/>
+          </a:xfrm>
+          <a:prstGeom prst="rect">
+            <a:avLst/>
+          </a:prstGeom>
+          <a:noFill/>
+          <a:ln/>
+        </p:spPr>
+        <p:txBody>
+          <a:bodyPr wrap="square" lIns="0" tIns="0" rIns="0" bIns="0" rtlCol="0" anchor="ctr"/>
+          <a:lstStyle/>
+          <a:p>
+            <a:pPr marL="0" indent="0" algn="l">
+              <a:buNone/>
+            </a:pPr>
+            <a:r>
+              <a:rPr lang="en-US" sz="1400" b="1" dirty="0">
                 <a:solidFill>
                   <a:srgbClr val="1E293B"/>
                 </a:solidFill>
@@ -7110,46 +7844,7 @@
                 <a:ea typeface="Arial" pitchFamily="34" charset="-122"/>
                 <a:cs typeface="Arial" pitchFamily="34" charset="-120"/>
               </a:rPr>
-              <a:t>GraphEraser</a:t>
-            </a:r>
-            <a:endParaRPr lang="en-US" sz="1800" dirty="0"/>
-          </a:p>
-        </p:txBody>
-      </p:sp>
-      <p:sp>
-        <p:nvSpPr>
-          <p:cNvPr id="17" name="Text 15"/>
-          <p:cNvSpPr/>
-          <p:nvPr/>
-        </p:nvSpPr>
-        <p:spPr>
-          <a:xfrm>
-            <a:off x="3200400" y="3703320"/>
-            <a:ext cx="1828800" cy="365760"/>
-          </a:xfrm>
-          <a:prstGeom prst="rect">
-            <a:avLst/>
-          </a:prstGeom>
-          <a:noFill/>
-          <a:ln/>
-        </p:spPr>
-        <p:txBody>
-          <a:bodyPr wrap="square" lIns="0" tIns="0" rIns="0" bIns="0" rtlCol="0" anchor="ctr"/>
-          <a:lstStyle/>
-          <a:p>
-            <a:pPr algn="l" indent="0" marL="0">
-              <a:buNone/>
-            </a:pPr>
-            <a:r>
-              <a:rPr lang="en-US" sz="1400" b="1" dirty="0">
-                <a:solidFill>
-                  <a:srgbClr val="D97706"/>
-                </a:solidFill>
-                <a:latin typeface="Arial" pitchFamily="34" charset="0"/>
-                <a:ea typeface="Arial" pitchFamily="34" charset="-122"/>
-                <a:cs typeface="Arial" pitchFamily="34" charset="-120"/>
-              </a:rPr>
-              <a:t>需谨慎阐释</a:t>
+              <a:t>解释力变好</a:t>
             </a:r>
             <a:endParaRPr lang="en-US" sz="1400" dirty="0"/>
           </a:p>
@@ -7163,93 +7858,201 @@
         </p:nvSpPr>
         <p:spPr>
           <a:xfrm>
-            <a:off x="731520" y="4206240"/>
-            <a:ext cx="7772400" cy="457200"/>
-          </a:xfrm>
-          <a:prstGeom prst="rect">
-            <a:avLst/>
-          </a:prstGeom>
-          <a:noFill/>
-          <a:ln/>
-        </p:spPr>
-        <p:txBody>
-          <a:bodyPr wrap="square" lIns="0" tIns="0" rIns="0" bIns="0" rtlCol="0" anchor="ctr"/>
-          <a:lstStyle/>
-          <a:p>
-            <a:pPr algn="l" indent="0" marL="0">
-              <a:buNone/>
+            <a:off x="6263640" y="1828800"/>
+            <a:ext cx="2377440" cy="640080"/>
+          </a:xfrm>
+          <a:prstGeom prst="rect">
+            <a:avLst/>
+          </a:prstGeom>
+          <a:noFill/>
+          <a:ln/>
+        </p:spPr>
+        <p:txBody>
+          <a:bodyPr wrap="square" lIns="0" tIns="0" rIns="0" bIns="0" rtlCol="0" anchor="ctr"/>
+          <a:lstStyle/>
+          <a:p>
+            <a:pPr marL="0" indent="0" algn="l">
+              <a:buNone/>
+            </a:pPr>
+            <a:r>
+              <a:rPr lang="en-US" sz="1100" dirty="0">
+                <a:solidFill>
+                  <a:srgbClr val="64748B"/>
+                </a:solidFill>
+                <a:latin typeface="Arial" pitchFamily="34" charset="0"/>
+                <a:ea typeface="Arial" pitchFamily="34" charset="-122"/>
+                <a:cs typeface="Arial" pitchFamily="34" charset="-120"/>
+              </a:rPr>
+              <a:t>Relative 指标准确判断「攻击有效」还是「方法本身增益」</a:t>
+            </a:r>
+            <a:endParaRPr lang="en-US" sz="1100" dirty="0"/>
+          </a:p>
+        </p:txBody>
+      </p:sp>
+      <p:sp>
+        <p:nvSpPr>
+          <p:cNvPr id="19" name="Text 17"/>
+          <p:cNvSpPr/>
+          <p:nvPr/>
+        </p:nvSpPr>
+        <p:spPr>
+          <a:xfrm>
+            <a:off x="457200" y="2743200"/>
+            <a:ext cx="8229600" cy="365760"/>
+          </a:xfrm>
+          <a:prstGeom prst="rect">
+            <a:avLst/>
+          </a:prstGeom>
+          <a:noFill/>
+          <a:ln/>
+        </p:spPr>
+        <p:txBody>
+          <a:bodyPr wrap="square" lIns="0" tIns="0" rIns="0" bIns="0" rtlCol="0" anchor="ctr"/>
+          <a:lstStyle/>
+          <a:p>
+            <a:pPr marL="0" indent="0" algn="l">
+              <a:buNone/>
+            </a:pPr>
+            <a:r>
+              <a:rPr lang="en-US" sz="1600" b="1" dirty="0">
+                <a:solidFill>
+                  <a:srgbClr val="1E293B"/>
+                </a:solidFill>
+                <a:latin typeface="Arial" pitchFamily="34" charset="0"/>
+                <a:ea typeface="Arial" pitchFamily="34" charset="-122"/>
+                <a:cs typeface="Arial" pitchFamily="34" charset="-120"/>
+              </a:rPr>
+              <a:t>Shard-based「gap 提升」解释</a:t>
+            </a:r>
+            <a:endParaRPr lang="en-US" sz="1600" dirty="0"/>
+          </a:p>
+        </p:txBody>
+      </p:sp>
+      <p:sp>
+        <p:nvSpPr>
+          <p:cNvPr id="20" name="Shape 18"/>
+          <p:cNvSpPr/>
+          <p:nvPr/>
+        </p:nvSpPr>
+        <p:spPr>
+          <a:xfrm>
+            <a:off x="457200" y="3108960"/>
+            <a:ext cx="8229600" cy="1645920"/>
+          </a:xfrm>
+          <a:prstGeom prst="rect">
+            <a:avLst/>
+          </a:prstGeom>
+          <a:solidFill>
+            <a:srgbClr val="FFFFFF"/>
+          </a:solidFill>
+          <a:ln/>
+          <a:effectLst>
+            <a:outerShdw blurRad="50800" dist="25400" dir="8100000" algn="bl" rotWithShape="0">
+              <a:srgbClr val="000000">
+                <a:alpha val="15000"/>
+              </a:srgbClr>
+            </a:outerShdw>
+          </a:effectLst>
+        </p:spPr>
+        <p:txBody>
+          <a:bodyPr/>
+          <a:lstStyle/>
+          <a:p>
+            <a:endParaRPr lang="zh-CN" altLang="en-US"/>
+          </a:p>
+        </p:txBody>
+      </p:sp>
+      <p:sp>
+        <p:nvSpPr>
+          <p:cNvPr id="21" name="Text 19"/>
+          <p:cNvSpPr/>
+          <p:nvPr/>
+        </p:nvSpPr>
+        <p:spPr>
+          <a:xfrm>
+            <a:off x="640080" y="3246120"/>
+            <a:ext cx="7772400" cy="1371600"/>
+          </a:xfrm>
+          <a:prstGeom prst="rect">
+            <a:avLst/>
+          </a:prstGeom>
+          <a:noFill/>
+          <a:ln/>
+        </p:spPr>
+        <p:txBody>
+          <a:bodyPr wrap="square" lIns="0" tIns="0" rIns="0" bIns="0" rtlCol="0" anchor="ctr"/>
+          <a:lstStyle/>
+          <a:p>
+            <a:pPr marL="342900" indent="-342900" algn="l">
+              <a:buSzPct val="100000"/>
+              <a:buChar char="•"/>
             </a:pPr>
             <a:r>
               <a:rPr lang="en-US" sz="1300" dirty="0">
                 <a:solidFill>
-                  <a:srgbClr val="64748B"/>
-                </a:solidFill>
-                <a:latin typeface="Arial" pitchFamily="34" charset="0"/>
-                <a:ea typeface="Arial" pitchFamily="34" charset="-122"/>
-                <a:cs typeface="Arial" pitchFamily="34" charset="-120"/>
-              </a:rPr>
-              <a:t>绝对「提升」与相对「攻击增益」并存</a:t>
+                  <a:srgbClr val="1E293B"/>
+                </a:solidFill>
+                <a:latin typeface="Arial" pitchFamily="34" charset="0"/>
+                <a:ea typeface="Arial" pitchFamily="34" charset="-122"/>
+                <a:cs typeface="Arial" pitchFamily="34" charset="-120"/>
+              </a:rPr>
+              <a:t>绝对指标：GraphEraser 经常出现负 drop（越删越好）</a:t>
             </a:r>
             <a:endParaRPr lang="en-US" sz="1300" dirty="0"/>
           </a:p>
-        </p:txBody>
-      </p:sp>
-      <p:sp>
-        <p:nvSpPr>
-          <p:cNvPr id="19" name="Shape 17"/>
-          <p:cNvSpPr/>
-          <p:nvPr/>
-        </p:nvSpPr>
-        <p:spPr>
-          <a:xfrm>
-            <a:off x="457200" y="4206240"/>
-            <a:ext cx="8229600" cy="640080"/>
-          </a:xfrm>
-          <a:prstGeom prst="rect">
-            <a:avLst/>
-          </a:prstGeom>
-          <a:solidFill>
-            <a:srgbClr val="1E2761"/>
-          </a:solidFill>
-          <a:ln/>
-        </p:spPr>
-      </p:sp>
-      <p:sp>
-        <p:nvSpPr>
-          <p:cNvPr id="20" name="Text 18"/>
-          <p:cNvSpPr/>
-          <p:nvPr/>
-        </p:nvSpPr>
-        <p:spPr>
-          <a:xfrm>
-            <a:off x="640080" y="4343400"/>
-            <a:ext cx="7772400" cy="365760"/>
-          </a:xfrm>
-          <a:prstGeom prst="rect">
-            <a:avLst/>
-          </a:prstGeom>
-          <a:noFill/>
-          <a:ln/>
-        </p:spPr>
-        <p:txBody>
-          <a:bodyPr wrap="square" lIns="0" tIns="0" rIns="0" bIns="0" rtlCol="0" anchor="ctr"/>
-          <a:lstStyle/>
-          <a:p>
-            <a:pPr algn="ctr" indent="0" marL="0">
-              <a:buNone/>
-            </a:pPr>
-            <a:r>
-              <a:rPr lang="en-US" sz="1400" b="1" dirty="0">
-                <a:solidFill>
-                  <a:srgbClr val="FFFFFF"/>
-                </a:solidFill>
-                <a:latin typeface="Arial" pitchFamily="34" charset="0"/>
-                <a:ea typeface="Arial" pitchFamily="34" charset="-122"/>
-                <a:cs typeface="Arial" pitchFamily="34" charset="-120"/>
-              </a:rPr>
-              <a:t>双层结论：绝对指标 + Relative 指标合起来，才能避免误判</a:t>
-            </a:r>
-            <a:endParaRPr lang="en-US" sz="1400" dirty="0"/>
+          <a:p>
+            <a:pPr marL="342900" indent="-342900" algn="l">
+              <a:buSzPct val="100000"/>
+              <a:buChar char="•"/>
+            </a:pPr>
+            <a:r>
+              <a:rPr lang="en-US" sz="1300" dirty="0">
+                <a:solidFill>
+                  <a:srgbClr val="1E293B"/>
+                </a:solidFill>
+                <a:latin typeface="Arial" pitchFamily="34" charset="0"/>
+                <a:ea typeface="Arial" pitchFamily="34" charset="-122"/>
+                <a:cs typeface="Arial" pitchFamily="34" charset="-120"/>
+              </a:rPr>
+              <a:t>MG-0 cora/gcn/r=0.05: GraphEraser F1 Drop = -5.2% ± 2.7</a:t>
+            </a:r>
+            <a:endParaRPr lang="en-US" sz="1300" dirty="0"/>
+          </a:p>
+          <a:p>
+            <a:pPr marL="342900" indent="-342900" algn="l">
+              <a:buSzPct val="100000"/>
+              <a:buChar char="•"/>
+            </a:pPr>
+            <a:r>
+              <a:rPr lang="en-US" sz="1300" dirty="0">
+                <a:solidFill>
+                  <a:srgbClr val="1E293B"/>
+                </a:solidFill>
+                <a:latin typeface="Arial" pitchFamily="34" charset="0"/>
+                <a:ea typeface="Arial" pitchFamily="34" charset="-122"/>
+                <a:cs typeface="Arial" pitchFamily="34" charset="-120"/>
+              </a:rPr>
+              <a:t>说明 Shard-based 本身存在「性能抬升效应」</a:t>
+            </a:r>
+            <a:endParaRPr lang="en-US" sz="1300" dirty="0"/>
+          </a:p>
+          <a:p>
+            <a:pPr marL="342900" indent="-342900" algn="l">
+              <a:buSzPct val="100000"/>
+              <a:buChar char="•"/>
+            </a:pPr>
+            <a:r>
+              <a:rPr lang="en-US" sz="1300" dirty="0">
+                <a:solidFill>
+                  <a:srgbClr val="1E293B"/>
+                </a:solidFill>
+                <a:latin typeface="Arial" pitchFamily="34" charset="0"/>
+                <a:ea typeface="Arial" pitchFamily="34" charset="-122"/>
+                <a:cs typeface="Arial" pitchFamily="34" charset="-120"/>
+              </a:rPr>
+              <a:t>Relative 口径下仍可看到攻击产生额外影响</a:t>
+            </a:r>
+            <a:endParaRPr lang="en-US" sz="1300" dirty="0"/>
           </a:p>
         </p:txBody>
       </p:sp>
@@ -7263,12 +8066,13 @@
 
 <file path=ppt/slides/slide9.xml><?xml version="1.0" encoding="utf-8"?>
 <p:sld xmlns:a="http://schemas.openxmlformats.org/drawingml/2006/main" xmlns:r="http://schemas.openxmlformats.org/officeDocument/2006/relationships" xmlns:p="http://schemas.openxmlformats.org/presentationml/2006/main">
-  <p:cSld name="Slide 9">
+  <p:cSld name="Slide 8">
     <p:bg>
       <p:bgPr>
         <a:solidFill>
           <a:srgbClr val="E8F0F8"/>
         </a:solidFill>
+        <a:effectLst/>
       </p:bgPr>
     </p:bg>
     <p:spTree>
@@ -7304,6 +8108,13 @@
           </a:solidFill>
           <a:ln/>
         </p:spPr>
+        <p:txBody>
+          <a:bodyPr/>
+          <a:lstStyle/>
+          <a:p>
+            <a:endParaRPr lang="zh-CN" altLang="en-US"/>
+          </a:p>
+        </p:txBody>
       </p:sp>
       <p:sp>
         <p:nvSpPr>
@@ -7326,7 +8137,7 @@
           <a:bodyPr wrap="square" lIns="0" tIns="0" rIns="0" bIns="0" rtlCol="0" anchor="ctr"/>
           <a:lstStyle/>
           <a:p>
-            <a:pPr algn="l" indent="0" marL="0">
+            <a:pPr marL="0" indent="0" algn="l">
               <a:buNone/>
             </a:pPr>
             <a:r>
@@ -7338,7 +8149,7 @@
                 <a:ea typeface="Arial" pitchFamily="34" charset="-122"/>
                 <a:cs typeface="Arial" pitchFamily="34" charset="-120"/>
               </a:rPr>
-              <a:t>5. 可视化图表（可直接引用）</a:t>
+              <a:t>4. 方法族稳定性结论</a:t>
             </a:r>
             <a:endParaRPr lang="en-US" sz="2400" dirty="0"/>
           </a:p>
@@ -7353,7 +8164,7 @@
         <p:spPr>
           <a:xfrm>
             <a:off x="457200" y="914400"/>
-            <a:ext cx="2651760" cy="1463040"/>
+            <a:ext cx="8229600" cy="1188720"/>
           </a:xfrm>
           <a:prstGeom prst="rect">
             <a:avLst/>
@@ -7363,13 +8174,20 @@
           </a:solidFill>
           <a:ln/>
           <a:effectLst>
-            <a:outerShdw sx="100000" sy="100000" kx="0" ky="0" algn="bl" rotWithShape="0" blurRad="50800" dist="25400" dir="8100000">
+            <a:outerShdw blurRad="50800" dist="25400" dir="8100000" algn="bl" rotWithShape="0">
               <a:srgbClr val="000000">
                 <a:alpha val="15000"/>
               </a:srgbClr>
             </a:outerShdw>
           </a:effectLst>
         </p:spPr>
+        <p:txBody>
+          <a:bodyPr/>
+          <a:lstStyle/>
+          <a:p>
+            <a:endParaRPr lang="zh-CN" altLang="en-US"/>
+          </a:p>
+        </p:txBody>
       </p:sp>
       <p:sp>
         <p:nvSpPr>
@@ -7379,17 +8197,24 @@
         </p:nvSpPr>
         <p:spPr>
           <a:xfrm>
-            <a:off x="594360" y="1051560"/>
-            <a:ext cx="2377440" cy="822960"/>
+            <a:off x="457200" y="914400"/>
+            <a:ext cx="91440" cy="1188720"/>
           </a:xfrm>
           <a:prstGeom prst="rect">
             <a:avLst/>
           </a:prstGeom>
           <a:solidFill>
-            <a:srgbClr val="E8F0F8"/>
+            <a:srgbClr val="DC2626"/>
           </a:solidFill>
           <a:ln/>
         </p:spPr>
+        <p:txBody>
+          <a:bodyPr/>
+          <a:lstStyle/>
+          <a:p>
+            <a:endParaRPr lang="zh-CN" altLang="en-US"/>
+          </a:p>
+        </p:txBody>
       </p:sp>
       <p:sp>
         <p:nvSpPr>
@@ -7399,31 +8224,34 @@
         </p:nvSpPr>
         <p:spPr>
           <a:xfrm>
-            <a:off x="594360" y="1051560"/>
-            <a:ext cx="2377440" cy="822960"/>
-          </a:xfrm>
-          <a:prstGeom prst="rect">
-            <a:avLst/>
-          </a:prstGeom>
-          <a:noFill/>
-          <a:ln/>
-        </p:spPr>
-        <p:txBody>
-          <a:bodyPr wrap="square" lIns="0" tIns="0" rIns="0" bIns="0" rtlCol="0" anchor="ctr"/>
-          <a:lstStyle/>
-          <a:p>
-            <a:pPr algn="ctr" indent="0" marL="0">
-              <a:buNone/>
-            </a:pPr>
-            <a:r>
-              <a:rPr lang="en-US" sz="3200" dirty="0">
-                <a:solidFill>
-                  <a:srgbClr val="000000"/>
-                </a:solidFill>
-              </a:rPr>
-              <a:t>📊</a:t>
-            </a:r>
-            <a:endParaRPr lang="en-US" sz="3200" dirty="0"/>
+            <a:off x="731520" y="1051560"/>
+            <a:ext cx="2743200" cy="365760"/>
+          </a:xfrm>
+          <a:prstGeom prst="rect">
+            <a:avLst/>
+          </a:prstGeom>
+          <a:noFill/>
+          <a:ln/>
+        </p:spPr>
+        <p:txBody>
+          <a:bodyPr wrap="square" lIns="0" tIns="0" rIns="0" bIns="0" rtlCol="0" anchor="ctr"/>
+          <a:lstStyle/>
+          <a:p>
+            <a:pPr marL="0" indent="0" algn="l">
+              <a:buNone/>
+            </a:pPr>
+            <a:r>
+              <a:rPr lang="en-US" sz="1800" b="1" dirty="0">
+                <a:solidFill>
+                  <a:srgbClr val="1E293B"/>
+                </a:solidFill>
+                <a:latin typeface="Arial" pitchFamily="34" charset="0"/>
+                <a:ea typeface="Arial" pitchFamily="34" charset="-122"/>
+                <a:cs typeface="Arial" pitchFamily="34" charset="-120"/>
+              </a:rPr>
+              <a:t>GNNDelete</a:t>
+            </a:r>
+            <a:endParaRPr lang="en-US" sz="1800" dirty="0"/>
           </a:p>
         </p:txBody>
       </p:sp>
@@ -7435,34 +8263,34 @@
         </p:nvSpPr>
         <p:spPr>
           <a:xfrm>
-            <a:off x="594360" y="1965960"/>
-            <a:ext cx="914400" cy="274320"/>
-          </a:xfrm>
-          <a:prstGeom prst="rect">
-            <a:avLst/>
-          </a:prstGeom>
-          <a:noFill/>
-          <a:ln/>
-        </p:spPr>
-        <p:txBody>
-          <a:bodyPr wrap="square" lIns="0" tIns="0" rIns="0" bIns="0" rtlCol="0" anchor="ctr"/>
-          <a:lstStyle/>
-          <a:p>
-            <a:pPr algn="l" indent="0" marL="0">
-              <a:buNone/>
-            </a:pPr>
-            <a:r>
-              <a:rPr lang="en-US" sz="1200" b="1" dirty="0">
-                <a:solidFill>
-                  <a:srgbClr val="4A90D9"/>
-                </a:solidFill>
-                <a:latin typeface="Arial" pitchFamily="34" charset="0"/>
-                <a:ea typeface="Arial" pitchFamily="34" charset="-122"/>
-                <a:cs typeface="Arial" pitchFamily="34" charset="-120"/>
-              </a:rPr>
-              <a:t>FIG-1</a:t>
-            </a:r>
-            <a:endParaRPr lang="en-US" sz="1200" dirty="0"/>
+            <a:off x="3200400" y="1051560"/>
+            <a:ext cx="1828800" cy="365760"/>
+          </a:xfrm>
+          <a:prstGeom prst="rect">
+            <a:avLst/>
+          </a:prstGeom>
+          <a:noFill/>
+          <a:ln/>
+        </p:spPr>
+        <p:txBody>
+          <a:bodyPr wrap="square" lIns="0" tIns="0" rIns="0" bIns="0" rtlCol="0" anchor="ctr"/>
+          <a:lstStyle/>
+          <a:p>
+            <a:pPr marL="0" indent="0" algn="l">
+              <a:buNone/>
+            </a:pPr>
+            <a:r>
+              <a:rPr lang="en-US" sz="1400" b="1" dirty="0">
+                <a:solidFill>
+                  <a:srgbClr val="DC2626"/>
+                </a:solidFill>
+                <a:latin typeface="Arial" pitchFamily="34" charset="0"/>
+                <a:ea typeface="Arial" pitchFamily="34" charset="-122"/>
+                <a:cs typeface="Arial" pitchFamily="34" charset="-120"/>
+              </a:rPr>
+              <a:t>脆弱性最高</a:t>
+            </a:r>
+            <a:endParaRPr lang="en-US" sz="1400" dirty="0"/>
           </a:p>
         </p:txBody>
       </p:sp>
@@ -7474,24 +8302,24 @@
         </p:nvSpPr>
         <p:spPr>
           <a:xfrm>
-            <a:off x="594360" y="2194560"/>
-            <a:ext cx="2377440" cy="137160"/>
-          </a:xfrm>
-          <a:prstGeom prst="rect">
-            <a:avLst/>
-          </a:prstGeom>
-          <a:noFill/>
-          <a:ln/>
-        </p:spPr>
-        <p:txBody>
-          <a:bodyPr wrap="square" lIns="0" tIns="0" rIns="0" bIns="0" rtlCol="0" anchor="ctr"/>
-          <a:lstStyle/>
-          <a:p>
-            <a:pPr algn="l" indent="0" marL="0">
-              <a:buNone/>
-            </a:pPr>
-            <a:r>
-              <a:rPr lang="en-US" sz="1100" dirty="0">
+            <a:off x="731520" y="1554480"/>
+            <a:ext cx="7772400" cy="457200"/>
+          </a:xfrm>
+          <a:prstGeom prst="rect">
+            <a:avLst/>
+          </a:prstGeom>
+          <a:noFill/>
+          <a:ln/>
+        </p:spPr>
+        <p:txBody>
+          <a:bodyPr wrap="square" lIns="0" tIns="0" rIns="0" bIns="0" rtlCol="0" anchor="ctr"/>
+          <a:lstStyle/>
+          <a:p>
+            <a:pPr marL="0" indent="0" algn="l">
+              <a:buNone/>
+            </a:pPr>
+            <a:r>
+              <a:rPr lang="en-US" sz="1300" dirty="0">
                 <a:solidFill>
                   <a:srgbClr val="64748B"/>
                 </a:solidFill>
@@ -7499,9 +8327,9 @@
                 <a:ea typeface="Arial" pitchFamily="34" charset="-122"/>
                 <a:cs typeface="Arial" pitchFamily="34" charset="-120"/>
               </a:rPr>
-              <a:t>泛化与方法族对比</a:t>
-            </a:r>
-            <a:endParaRPr lang="en-US" sz="1100" dirty="0"/>
+              <a:t>长期处于最高 relative/f1_drop 区间</a:t>
+            </a:r>
+            <a:endParaRPr lang="en-US" sz="1300" dirty="0"/>
           </a:p>
         </p:txBody>
       </p:sp>
@@ -7513,8 +8341,8 @@
         </p:nvSpPr>
         <p:spPr>
           <a:xfrm>
-            <a:off x="3291840" y="914400"/>
-            <a:ext cx="2651760" cy="1463040"/>
+            <a:off x="457200" y="2240280"/>
+            <a:ext cx="8229600" cy="1188720"/>
           </a:xfrm>
           <a:prstGeom prst="rect">
             <a:avLst/>
@@ -7524,13 +8352,20 @@
           </a:solidFill>
           <a:ln/>
           <a:effectLst>
-            <a:outerShdw sx="100000" sy="100000" kx="0" ky="0" algn="bl" rotWithShape="0" blurRad="50800" dist="25400" dir="8100000">
+            <a:outerShdw blurRad="50800" dist="25400" dir="8100000" algn="bl" rotWithShape="0">
               <a:srgbClr val="000000">
                 <a:alpha val="15000"/>
               </a:srgbClr>
             </a:outerShdw>
           </a:effectLst>
         </p:spPr>
+        <p:txBody>
+          <a:bodyPr/>
+          <a:lstStyle/>
+          <a:p>
+            <a:endParaRPr lang="zh-CN" altLang="en-US"/>
+          </a:p>
+        </p:txBody>
       </p:sp>
       <p:sp>
         <p:nvSpPr>
@@ -7540,17 +8375,24 @@
         </p:nvSpPr>
         <p:spPr>
           <a:xfrm>
-            <a:off x="3429000" y="1051560"/>
-            <a:ext cx="2377440" cy="822960"/>
+            <a:off x="457200" y="2240280"/>
+            <a:ext cx="91440" cy="1188720"/>
           </a:xfrm>
           <a:prstGeom prst="rect">
             <a:avLst/>
           </a:prstGeom>
           <a:solidFill>
-            <a:srgbClr val="E8F0F8"/>
+            <a:srgbClr val="059669"/>
           </a:solidFill>
           <a:ln/>
         </p:spPr>
+        <p:txBody>
+          <a:bodyPr/>
+          <a:lstStyle/>
+          <a:p>
+            <a:endParaRPr lang="zh-CN" altLang="en-US"/>
+          </a:p>
+        </p:txBody>
       </p:sp>
       <p:sp>
         <p:nvSpPr>
@@ -7560,31 +8402,34 @@
         </p:nvSpPr>
         <p:spPr>
           <a:xfrm>
-            <a:off x="3429000" y="1051560"/>
-            <a:ext cx="2377440" cy="822960"/>
-          </a:xfrm>
-          <a:prstGeom prst="rect">
-            <a:avLst/>
-          </a:prstGeom>
-          <a:noFill/>
-          <a:ln/>
-        </p:spPr>
-        <p:txBody>
-          <a:bodyPr wrap="square" lIns="0" tIns="0" rIns="0" bIns="0" rtlCol="0" anchor="ctr"/>
-          <a:lstStyle/>
-          <a:p>
-            <a:pPr algn="ctr" indent="0" marL="0">
-              <a:buNone/>
-            </a:pPr>
-            <a:r>
-              <a:rPr lang="en-US" sz="3200" dirty="0">
-                <a:solidFill>
-                  <a:srgbClr val="000000"/>
-                </a:solidFill>
-              </a:rPr>
-              <a:t>📊</a:t>
-            </a:r>
-            <a:endParaRPr lang="en-US" sz="3200" dirty="0"/>
+            <a:off x="731520" y="2377440"/>
+            <a:ext cx="2743200" cy="365760"/>
+          </a:xfrm>
+          <a:prstGeom prst="rect">
+            <a:avLst/>
+          </a:prstGeom>
+          <a:noFill/>
+          <a:ln/>
+        </p:spPr>
+        <p:txBody>
+          <a:bodyPr wrap="square" lIns="0" tIns="0" rIns="0" bIns="0" rtlCol="0" anchor="ctr"/>
+          <a:lstStyle/>
+          <a:p>
+            <a:pPr marL="0" indent="0" algn="l">
+              <a:buNone/>
+            </a:pPr>
+            <a:r>
+              <a:rPr lang="en-US" sz="1800" b="1" dirty="0">
+                <a:solidFill>
+                  <a:srgbClr val="1E293B"/>
+                </a:solidFill>
+                <a:latin typeface="Arial" pitchFamily="34" charset="0"/>
+                <a:ea typeface="Arial" pitchFamily="34" charset="-122"/>
+                <a:cs typeface="Arial" pitchFamily="34" charset="-120"/>
+              </a:rPr>
+              <a:t>GIF/IDEA/MEGU</a:t>
+            </a:r>
+            <a:endParaRPr lang="en-US" sz="1800" dirty="0"/>
           </a:p>
         </p:txBody>
       </p:sp>
@@ -7596,34 +8441,34 @@
         </p:nvSpPr>
         <p:spPr>
           <a:xfrm>
-            <a:off x="3429000" y="1965960"/>
-            <a:ext cx="914400" cy="274320"/>
-          </a:xfrm>
-          <a:prstGeom prst="rect">
-            <a:avLst/>
-          </a:prstGeom>
-          <a:noFill/>
-          <a:ln/>
-        </p:spPr>
-        <p:txBody>
-          <a:bodyPr wrap="square" lIns="0" tIns="0" rIns="0" bIns="0" rtlCol="0" anchor="ctr"/>
-          <a:lstStyle/>
-          <a:p>
-            <a:pPr algn="l" indent="0" marL="0">
-              <a:buNone/>
-            </a:pPr>
-            <a:r>
-              <a:rPr lang="en-US" sz="1200" b="1" dirty="0">
-                <a:solidFill>
-                  <a:srgbClr val="4A90D9"/>
-                </a:solidFill>
-                <a:latin typeface="Arial" pitchFamily="34" charset="0"/>
-                <a:ea typeface="Arial" pitchFamily="34" charset="-122"/>
-                <a:cs typeface="Arial" pitchFamily="34" charset="-120"/>
-              </a:rPr>
-              <a:t>FIG-2</a:t>
-            </a:r>
-            <a:endParaRPr lang="en-US" sz="1200" dirty="0"/>
+            <a:off x="3200400" y="2377440"/>
+            <a:ext cx="1828800" cy="365760"/>
+          </a:xfrm>
+          <a:prstGeom prst="rect">
+            <a:avLst/>
+          </a:prstGeom>
+          <a:noFill/>
+          <a:ln/>
+        </p:spPr>
+        <p:txBody>
+          <a:bodyPr wrap="square" lIns="0" tIns="0" rIns="0" bIns="0" rtlCol="0" anchor="ctr"/>
+          <a:lstStyle/>
+          <a:p>
+            <a:pPr marL="0" indent="0" algn="l">
+              <a:buNone/>
+            </a:pPr>
+            <a:r>
+              <a:rPr lang="en-US" sz="1400" b="1" dirty="0">
+                <a:solidFill>
+                  <a:srgbClr val="059669"/>
+                </a:solidFill>
+                <a:latin typeface="Arial" pitchFamily="34" charset="0"/>
+                <a:ea typeface="Arial" pitchFamily="34" charset="-122"/>
+                <a:cs typeface="Arial" pitchFamily="34" charset="-120"/>
+              </a:rPr>
+              <a:t>整体更稳</a:t>
+            </a:r>
+            <a:endParaRPr lang="en-US" sz="1400" dirty="0"/>
           </a:p>
         </p:txBody>
       </p:sp>
@@ -7635,24 +8480,24 @@
         </p:nvSpPr>
         <p:spPr>
           <a:xfrm>
-            <a:off x="3429000" y="2194560"/>
-            <a:ext cx="2377440" cy="137160"/>
-          </a:xfrm>
-          <a:prstGeom prst="rect">
-            <a:avLst/>
-          </a:prstGeom>
-          <a:noFill/>
-          <a:ln/>
-        </p:spPr>
-        <p:txBody>
-          <a:bodyPr wrap="square" lIns="0" tIns="0" rIns="0" bIns="0" rtlCol="0" anchor="ctr"/>
-          <a:lstStyle/>
-          <a:p>
-            <a:pPr algn="l" indent="0" marL="0">
-              <a:buNone/>
-            </a:pPr>
-            <a:r>
-              <a:rPr lang="en-US" sz="1100" dirty="0">
+            <a:off x="731520" y="2880360"/>
+            <a:ext cx="7772400" cy="457200"/>
+          </a:xfrm>
+          <a:prstGeom prst="rect">
+            <a:avLst/>
+          </a:prstGeom>
+          <a:noFill/>
+          <a:ln/>
+        </p:spPr>
+        <p:txBody>
+          <a:bodyPr wrap="square" lIns="0" tIns="0" rIns="0" bIns="0" rtlCol="0" anchor="ctr"/>
+          <a:lstStyle/>
+          <a:p>
+            <a:pPr marL="0" indent="0" algn="l">
+              <a:buNone/>
+            </a:pPr>
+            <a:r>
+              <a:rPr lang="en-US" sz="1300" dirty="0">
                 <a:solidFill>
                   <a:srgbClr val="64748B"/>
                 </a:solidFill>
@@ -7660,9 +8505,9 @@
                 <a:ea typeface="Arial" pitchFamily="34" charset="-122"/>
                 <a:cs typeface="Arial" pitchFamily="34" charset="-120"/>
               </a:rPr>
-              <a:t>Ratio 敏感性</a:t>
-            </a:r>
-            <a:endParaRPr lang="en-US" sz="1100" dirty="0"/>
+              <a:t>攻击效果存在但幅度显著低于 GNNDelete</a:t>
+            </a:r>
+            <a:endParaRPr lang="en-US" sz="1300" dirty="0"/>
           </a:p>
         </p:txBody>
       </p:sp>
@@ -7674,8 +8519,8 @@
         </p:nvSpPr>
         <p:spPr>
           <a:xfrm>
-            <a:off x="6126480" y="914400"/>
-            <a:ext cx="2651760" cy="1463040"/>
+            <a:off x="457200" y="3566160"/>
+            <a:ext cx="8229600" cy="1188720"/>
           </a:xfrm>
           <a:prstGeom prst="rect">
             <a:avLst/>
@@ -7685,13 +8530,20 @@
           </a:solidFill>
           <a:ln/>
           <a:effectLst>
-            <a:outerShdw sx="100000" sy="100000" kx="0" ky="0" algn="bl" rotWithShape="0" blurRad="50800" dist="25400" dir="8100000">
+            <a:outerShdw blurRad="50800" dist="25400" dir="8100000" algn="bl" rotWithShape="0">
               <a:srgbClr val="000000">
                 <a:alpha val="15000"/>
               </a:srgbClr>
             </a:outerShdw>
           </a:effectLst>
         </p:spPr>
+        <p:txBody>
+          <a:bodyPr/>
+          <a:lstStyle/>
+          <a:p>
+            <a:endParaRPr lang="zh-CN" altLang="en-US"/>
+          </a:p>
+        </p:txBody>
       </p:sp>
       <p:sp>
         <p:nvSpPr>
@@ -7701,17 +8553,24 @@
         </p:nvSpPr>
         <p:spPr>
           <a:xfrm>
-            <a:off x="6263640" y="1051560"/>
-            <a:ext cx="2377440" cy="822960"/>
+            <a:off x="457200" y="3566160"/>
+            <a:ext cx="91440" cy="1188720"/>
           </a:xfrm>
           <a:prstGeom prst="rect">
             <a:avLst/>
           </a:prstGeom>
           <a:solidFill>
-            <a:srgbClr val="E8F0F8"/>
+            <a:srgbClr val="D97706"/>
           </a:solidFill>
           <a:ln/>
         </p:spPr>
+        <p:txBody>
+          <a:bodyPr/>
+          <a:lstStyle/>
+          <a:p>
+            <a:endParaRPr lang="zh-CN" altLang="en-US"/>
+          </a:p>
+        </p:txBody>
       </p:sp>
       <p:sp>
         <p:nvSpPr>
@@ -7721,31 +8580,34 @@
         </p:nvSpPr>
         <p:spPr>
           <a:xfrm>
-            <a:off x="6263640" y="1051560"/>
-            <a:ext cx="2377440" cy="822960"/>
-          </a:xfrm>
-          <a:prstGeom prst="rect">
-            <a:avLst/>
-          </a:prstGeom>
-          <a:noFill/>
-          <a:ln/>
-        </p:spPr>
-        <p:txBody>
-          <a:bodyPr wrap="square" lIns="0" tIns="0" rIns="0" bIns="0" rtlCol="0" anchor="ctr"/>
-          <a:lstStyle/>
-          <a:p>
-            <a:pPr algn="ctr" indent="0" marL="0">
-              <a:buNone/>
-            </a:pPr>
-            <a:r>
-              <a:rPr lang="en-US" sz="3200" dirty="0">
-                <a:solidFill>
-                  <a:srgbClr val="000000"/>
-                </a:solidFill>
-              </a:rPr>
-              <a:t>📊</a:t>
-            </a:r>
-            <a:endParaRPr lang="en-US" sz="3200" dirty="0"/>
+            <a:off x="731520" y="3703320"/>
+            <a:ext cx="2743200" cy="365760"/>
+          </a:xfrm>
+          <a:prstGeom prst="rect">
+            <a:avLst/>
+          </a:prstGeom>
+          <a:noFill/>
+          <a:ln/>
+        </p:spPr>
+        <p:txBody>
+          <a:bodyPr wrap="square" lIns="0" tIns="0" rIns="0" bIns="0" rtlCol="0" anchor="ctr"/>
+          <a:lstStyle/>
+          <a:p>
+            <a:pPr marL="0" indent="0" algn="l">
+              <a:buNone/>
+            </a:pPr>
+            <a:r>
+              <a:rPr lang="en-US" sz="1800" b="1" dirty="0">
+                <a:solidFill>
+                  <a:srgbClr val="1E293B"/>
+                </a:solidFill>
+                <a:latin typeface="Arial" pitchFamily="34" charset="0"/>
+                <a:ea typeface="Arial" pitchFamily="34" charset="-122"/>
+                <a:cs typeface="Arial" pitchFamily="34" charset="-120"/>
+              </a:rPr>
+              <a:t>GraphEraser</a:t>
+            </a:r>
+            <a:endParaRPr lang="en-US" sz="1800" dirty="0"/>
           </a:p>
         </p:txBody>
       </p:sp>
@@ -7757,34 +8619,34 @@
         </p:nvSpPr>
         <p:spPr>
           <a:xfrm>
-            <a:off x="6263640" y="1965960"/>
-            <a:ext cx="914400" cy="274320"/>
-          </a:xfrm>
-          <a:prstGeom prst="rect">
-            <a:avLst/>
-          </a:prstGeom>
-          <a:noFill/>
-          <a:ln/>
-        </p:spPr>
-        <p:txBody>
-          <a:bodyPr wrap="square" lIns="0" tIns="0" rIns="0" bIns="0" rtlCol="0" anchor="ctr"/>
-          <a:lstStyle/>
-          <a:p>
-            <a:pPr algn="l" indent="0" marL="0">
-              <a:buNone/>
-            </a:pPr>
-            <a:r>
-              <a:rPr lang="en-US" sz="1200" b="1" dirty="0">
-                <a:solidFill>
-                  <a:srgbClr val="4A90D9"/>
-                </a:solidFill>
-                <a:latin typeface="Arial" pitchFamily="34" charset="0"/>
-                <a:ea typeface="Arial" pitchFamily="34" charset="-122"/>
-                <a:cs typeface="Arial" pitchFamily="34" charset="-120"/>
-              </a:rPr>
-              <a:t>FIG-3</a:t>
-            </a:r>
-            <a:endParaRPr lang="en-US" sz="1200" dirty="0"/>
+            <a:off x="3200400" y="3703320"/>
+            <a:ext cx="1828800" cy="365760"/>
+          </a:xfrm>
+          <a:prstGeom prst="rect">
+            <a:avLst/>
+          </a:prstGeom>
+          <a:noFill/>
+          <a:ln/>
+        </p:spPr>
+        <p:txBody>
+          <a:bodyPr wrap="square" lIns="0" tIns="0" rIns="0" bIns="0" rtlCol="0" anchor="ctr"/>
+          <a:lstStyle/>
+          <a:p>
+            <a:pPr marL="0" indent="0" algn="l">
+              <a:buNone/>
+            </a:pPr>
+            <a:r>
+              <a:rPr lang="en-US" sz="1400" b="1" dirty="0">
+                <a:solidFill>
+                  <a:srgbClr val="D97706"/>
+                </a:solidFill>
+                <a:latin typeface="Arial" pitchFamily="34" charset="0"/>
+                <a:ea typeface="Arial" pitchFamily="34" charset="-122"/>
+                <a:cs typeface="Arial" pitchFamily="34" charset="-120"/>
+              </a:rPr>
+              <a:t>需谨慎阐释</a:t>
+            </a:r>
+            <a:endParaRPr lang="en-US" sz="1400" dirty="0"/>
           </a:p>
         </p:txBody>
       </p:sp>
@@ -7796,24 +8658,24 @@
         </p:nvSpPr>
         <p:spPr>
           <a:xfrm>
-            <a:off x="6263640" y="2194560"/>
-            <a:ext cx="2377440" cy="137160"/>
-          </a:xfrm>
-          <a:prstGeom prst="rect">
-            <a:avLst/>
-          </a:prstGeom>
-          <a:noFill/>
-          <a:ln/>
-        </p:spPr>
-        <p:txBody>
-          <a:bodyPr wrap="square" lIns="0" tIns="0" rIns="0" bIns="0" rtlCol="0" anchor="ctr"/>
-          <a:lstStyle/>
-          <a:p>
-            <a:pPr algn="l" indent="0" marL="0">
-              <a:buNone/>
-            </a:pPr>
-            <a:r>
-              <a:rPr lang="en-US" sz="1100" dirty="0">
+            <a:off x="731520" y="4206240"/>
+            <a:ext cx="7772400" cy="457200"/>
+          </a:xfrm>
+          <a:prstGeom prst="rect">
+            <a:avLst/>
+          </a:prstGeom>
+          <a:noFill/>
+          <a:ln/>
+        </p:spPr>
+        <p:txBody>
+          <a:bodyPr wrap="square" lIns="0" tIns="0" rIns="0" bIns="0" rtlCol="0" anchor="ctr"/>
+          <a:lstStyle/>
+          <a:p>
+            <a:pPr marL="0" indent="0" algn="l">
+              <a:buNone/>
+            </a:pPr>
+            <a:r>
+              <a:rPr lang="en-US" sz="1300" dirty="0">
                 <a:solidFill>
                   <a:srgbClr val="64748B"/>
                 </a:solidFill>
@@ -7821,9 +8683,9 @@
                 <a:ea typeface="Arial" pitchFamily="34" charset="-122"/>
                 <a:cs typeface="Arial" pitchFamily="34" charset="-120"/>
               </a:rPr>
-              <a:t>全方法脆弱性谱</a:t>
-            </a:r>
-            <a:endParaRPr lang="en-US" sz="1100" dirty="0"/>
+              <a:t>绝对「提升」与相对「攻击增益」并存</a:t>
+            </a:r>
+            <a:endParaRPr lang="en-US" sz="1300" dirty="0"/>
           </a:p>
         </p:txBody>
       </p:sp>
@@ -7835,317 +8697,61 @@
         </p:nvSpPr>
         <p:spPr>
           <a:xfrm>
-            <a:off x="457200" y="2560320"/>
-            <a:ext cx="2651760" cy="1463040"/>
+            <a:off x="457200" y="4206240"/>
+            <a:ext cx="8229600" cy="640080"/>
           </a:xfrm>
           <a:prstGeom prst="rect">
             <a:avLst/>
           </a:prstGeom>
           <a:solidFill>
-            <a:srgbClr val="FFFFFF"/>
+            <a:srgbClr val="1E2761"/>
           </a:solidFill>
           <a:ln/>
-          <a:effectLst>
-            <a:outerShdw sx="100000" sy="100000" kx="0" ky="0" algn="bl" rotWithShape="0" blurRad="50800" dist="25400" dir="8100000">
-              <a:srgbClr val="000000">
-                <a:alpha val="15000"/>
-              </a:srgbClr>
-            </a:outerShdw>
-          </a:effectLst>
-        </p:spPr>
-      </p:sp>
-      <p:sp>
-        <p:nvSpPr>
-          <p:cNvPr id="20" name="Shape 18"/>
-          <p:cNvSpPr/>
-          <p:nvPr/>
-        </p:nvSpPr>
-        <p:spPr>
-          <a:xfrm>
-            <a:off x="594360" y="2697480"/>
-            <a:ext cx="2377440" cy="822960"/>
-          </a:xfrm>
-          <a:prstGeom prst="rect">
-            <a:avLst/>
-          </a:prstGeom>
-          <a:solidFill>
-            <a:srgbClr val="E8F0F8"/>
-          </a:solidFill>
-          <a:ln/>
-        </p:spPr>
-      </p:sp>
-      <p:sp>
-        <p:nvSpPr>
-          <p:cNvPr id="21" name="Text 19"/>
-          <p:cNvSpPr/>
-          <p:nvPr/>
-        </p:nvSpPr>
-        <p:spPr>
-          <a:xfrm>
-            <a:off x="594360" y="2697480"/>
-            <a:ext cx="2377440" cy="822960"/>
-          </a:xfrm>
-          <a:prstGeom prst="rect">
-            <a:avLst/>
-          </a:prstGeom>
-          <a:noFill/>
-          <a:ln/>
-        </p:spPr>
-        <p:txBody>
-          <a:bodyPr wrap="square" lIns="0" tIns="0" rIns="0" bIns="0" rtlCol="0" anchor="ctr"/>
-          <a:lstStyle/>
-          <a:p>
-            <a:pPr algn="ctr" indent="0" marL="0">
-              <a:buNone/>
-            </a:pPr>
-            <a:r>
-              <a:rPr lang="en-US" sz="3200" dirty="0">
-                <a:solidFill>
-                  <a:srgbClr val="000000"/>
-                </a:solidFill>
-              </a:rPr>
-              <a:t>📊</a:t>
-            </a:r>
-            <a:endParaRPr lang="en-US" sz="3200" dirty="0"/>
-          </a:p>
-        </p:txBody>
-      </p:sp>
-      <p:sp>
-        <p:nvSpPr>
-          <p:cNvPr id="22" name="Text 20"/>
-          <p:cNvSpPr/>
-          <p:nvPr/>
-        </p:nvSpPr>
-        <p:spPr>
-          <a:xfrm>
-            <a:off x="594360" y="3611880"/>
-            <a:ext cx="914400" cy="274320"/>
-          </a:xfrm>
-          <a:prstGeom prst="rect">
-            <a:avLst/>
-          </a:prstGeom>
-          <a:noFill/>
-          <a:ln/>
-        </p:spPr>
-        <p:txBody>
-          <a:bodyPr wrap="square" lIns="0" tIns="0" rIns="0" bIns="0" rtlCol="0" anchor="ctr"/>
-          <a:lstStyle/>
-          <a:p>
-            <a:pPr algn="l" indent="0" marL="0">
-              <a:buNone/>
-            </a:pPr>
-            <a:r>
-              <a:rPr lang="en-US" sz="1200" b="1" dirty="0">
-                <a:solidFill>
-                  <a:srgbClr val="4A90D9"/>
-                </a:solidFill>
-                <a:latin typeface="Arial" pitchFamily="34" charset="0"/>
-                <a:ea typeface="Arial" pitchFamily="34" charset="-122"/>
-                <a:cs typeface="Arial" pitchFamily="34" charset="-120"/>
-              </a:rPr>
-              <a:t>FIG-4</a:t>
-            </a:r>
-            <a:endParaRPr lang="en-US" sz="1200" dirty="0"/>
-          </a:p>
-        </p:txBody>
-      </p:sp>
-      <p:sp>
-        <p:nvSpPr>
-          <p:cNvPr id="23" name="Text 21"/>
-          <p:cNvSpPr/>
-          <p:nvPr/>
-        </p:nvSpPr>
-        <p:spPr>
-          <a:xfrm>
-            <a:off x="594360" y="3840480"/>
-            <a:ext cx="2377440" cy="137160"/>
-          </a:xfrm>
-          <a:prstGeom prst="rect">
-            <a:avLst/>
-          </a:prstGeom>
-          <a:noFill/>
-          <a:ln/>
-        </p:spPr>
-        <p:txBody>
-          <a:bodyPr wrap="square" lIns="0" tIns="0" rIns="0" bIns="0" rtlCol="0" anchor="ctr"/>
-          <a:lstStyle/>
-          <a:p>
-            <a:pPr algn="l" indent="0" marL="0">
-              <a:buNone/>
-            </a:pPr>
-            <a:r>
-              <a:rPr lang="en-US" sz="1100" dirty="0">
-                <a:solidFill>
-                  <a:srgbClr val="64748B"/>
-                </a:solidFill>
-                <a:latin typeface="Arial" pitchFamily="34" charset="0"/>
-                <a:ea typeface="Arial" pitchFamily="34" charset="-122"/>
-                <a:cs typeface="Arial" pitchFamily="34" charset="-120"/>
-              </a:rPr>
-              <a:t>统计显著性</a:t>
-            </a:r>
-            <a:endParaRPr lang="en-US" sz="1100" dirty="0"/>
-          </a:p>
-        </p:txBody>
-      </p:sp>
-      <p:sp>
-        <p:nvSpPr>
-          <p:cNvPr id="24" name="Shape 22"/>
-          <p:cNvSpPr/>
-          <p:nvPr/>
-        </p:nvSpPr>
-        <p:spPr>
-          <a:xfrm>
-            <a:off x="3291840" y="2560320"/>
-            <a:ext cx="2651760" cy="1463040"/>
-          </a:xfrm>
-          <a:prstGeom prst="rect">
-            <a:avLst/>
-          </a:prstGeom>
-          <a:solidFill>
-            <a:srgbClr val="FFFFFF"/>
-          </a:solidFill>
-          <a:ln/>
-          <a:effectLst>
-            <a:outerShdw sx="100000" sy="100000" kx="0" ky="0" algn="bl" rotWithShape="0" blurRad="50800" dist="25400" dir="8100000">
-              <a:srgbClr val="000000">
-                <a:alpha val="15000"/>
-              </a:srgbClr>
-            </a:outerShdw>
-          </a:effectLst>
-        </p:spPr>
-      </p:sp>
-      <p:sp>
-        <p:nvSpPr>
-          <p:cNvPr id="25" name="Shape 23"/>
-          <p:cNvSpPr/>
-          <p:nvPr/>
-        </p:nvSpPr>
-        <p:spPr>
-          <a:xfrm>
-            <a:off x="3429000" y="2697480"/>
-            <a:ext cx="2377440" cy="822960"/>
-          </a:xfrm>
-          <a:prstGeom prst="rect">
-            <a:avLst/>
-          </a:prstGeom>
-          <a:solidFill>
-            <a:srgbClr val="E8F0F8"/>
-          </a:solidFill>
-          <a:ln/>
-        </p:spPr>
-      </p:sp>
-      <p:sp>
-        <p:nvSpPr>
-          <p:cNvPr id="26" name="Text 24"/>
-          <p:cNvSpPr/>
-          <p:nvPr/>
-        </p:nvSpPr>
-        <p:spPr>
-          <a:xfrm>
-            <a:off x="3429000" y="2697480"/>
-            <a:ext cx="2377440" cy="822960"/>
-          </a:xfrm>
-          <a:prstGeom prst="rect">
-            <a:avLst/>
-          </a:prstGeom>
-          <a:noFill/>
-          <a:ln/>
-        </p:spPr>
-        <p:txBody>
-          <a:bodyPr wrap="square" lIns="0" tIns="0" rIns="0" bIns="0" rtlCol="0" anchor="ctr"/>
-          <a:lstStyle/>
-          <a:p>
-            <a:pPr algn="ctr" indent="0" marL="0">
-              <a:buNone/>
-            </a:pPr>
-            <a:r>
-              <a:rPr lang="en-US" sz="3200" dirty="0">
-                <a:solidFill>
-                  <a:srgbClr val="000000"/>
-                </a:solidFill>
-              </a:rPr>
-              <a:t>📊</a:t>
-            </a:r>
-            <a:endParaRPr lang="en-US" sz="3200" dirty="0"/>
-          </a:p>
-        </p:txBody>
-      </p:sp>
-      <p:sp>
-        <p:nvSpPr>
-          <p:cNvPr id="27" name="Text 25"/>
-          <p:cNvSpPr/>
-          <p:nvPr/>
-        </p:nvSpPr>
-        <p:spPr>
-          <a:xfrm>
-            <a:off x="3429000" y="3611880"/>
-            <a:ext cx="914400" cy="274320"/>
-          </a:xfrm>
-          <a:prstGeom prst="rect">
-            <a:avLst/>
-          </a:prstGeom>
-          <a:noFill/>
-          <a:ln/>
-        </p:spPr>
-        <p:txBody>
-          <a:bodyPr wrap="square" lIns="0" tIns="0" rIns="0" bIns="0" rtlCol="0" anchor="ctr"/>
-          <a:lstStyle/>
-          <a:p>
-            <a:pPr algn="l" indent="0" marL="0">
-              <a:buNone/>
-            </a:pPr>
-            <a:r>
-              <a:rPr lang="en-US" sz="1200" b="1" dirty="0">
-                <a:solidFill>
-                  <a:srgbClr val="4A90D9"/>
-                </a:solidFill>
-                <a:latin typeface="Arial" pitchFamily="34" charset="0"/>
-                <a:ea typeface="Arial" pitchFamily="34" charset="-122"/>
-                <a:cs typeface="Arial" pitchFamily="34" charset="-120"/>
-              </a:rPr>
-              <a:t>FIG-5</a:t>
-            </a:r>
-            <a:endParaRPr lang="en-US" sz="1200" dirty="0"/>
-          </a:p>
-        </p:txBody>
-      </p:sp>
-      <p:sp>
-        <p:nvSpPr>
-          <p:cNvPr id="28" name="Text 26"/>
-          <p:cNvSpPr/>
-          <p:nvPr/>
-        </p:nvSpPr>
-        <p:spPr>
-          <a:xfrm>
-            <a:off x="3429000" y="3840480"/>
-            <a:ext cx="2377440" cy="137160"/>
-          </a:xfrm>
-          <a:prstGeom prst="rect">
-            <a:avLst/>
-          </a:prstGeom>
-          <a:noFill/>
-          <a:ln/>
-        </p:spPr>
-        <p:txBody>
-          <a:bodyPr wrap="square" lIns="0" tIns="0" rIns="0" bIns="0" rtlCol="0" anchor="ctr"/>
-          <a:lstStyle/>
-          <a:p>
-            <a:pPr algn="l" indent="0" marL="0">
-              <a:buNone/>
-            </a:pPr>
-            <a:r>
-              <a:rPr lang="en-US" sz="1100" dirty="0">
-                <a:solidFill>
-                  <a:srgbClr val="64748B"/>
-                </a:solidFill>
-                <a:latin typeface="Arial" pitchFamily="34" charset="0"/>
-                <a:ea typeface="Arial" pitchFamily="34" charset="-122"/>
-                <a:cs typeface="Arial" pitchFamily="34" charset="-120"/>
-              </a:rPr>
-              <a:t>Relative vs Gap</a:t>
-            </a:r>
-            <a:endParaRPr lang="en-US" sz="1100" dirty="0"/>
+        </p:spPr>
+        <p:txBody>
+          <a:bodyPr/>
+          <a:lstStyle/>
+          <a:p>
+            <a:endParaRPr lang="zh-CN" altLang="en-US"/>
+          </a:p>
+        </p:txBody>
+      </p:sp>
+      <p:sp>
+        <p:nvSpPr>
+          <p:cNvPr id="20" name="Text 18"/>
+          <p:cNvSpPr/>
+          <p:nvPr/>
+        </p:nvSpPr>
+        <p:spPr>
+          <a:xfrm>
+            <a:off x="640080" y="4343400"/>
+            <a:ext cx="7772400" cy="365760"/>
+          </a:xfrm>
+          <a:prstGeom prst="rect">
+            <a:avLst/>
+          </a:prstGeom>
+          <a:noFill/>
+          <a:ln/>
+        </p:spPr>
+        <p:txBody>
+          <a:bodyPr wrap="square" lIns="0" tIns="0" rIns="0" bIns="0" rtlCol="0" anchor="ctr"/>
+          <a:lstStyle/>
+          <a:p>
+            <a:pPr marL="0" indent="0" algn="ctr">
+              <a:buNone/>
+            </a:pPr>
+            <a:r>
+              <a:rPr lang="en-US" sz="1400" b="1" dirty="0">
+                <a:solidFill>
+                  <a:srgbClr val="FFFFFF"/>
+                </a:solidFill>
+                <a:latin typeface="Arial" pitchFamily="34" charset="0"/>
+                <a:ea typeface="Arial" pitchFamily="34" charset="-122"/>
+                <a:cs typeface="Arial" pitchFamily="34" charset="-120"/>
+              </a:rPr>
+              <a:t>双层结论：绝对指标 + Relative 指标合起来，才能避免误判</a:t>
+            </a:r>
+            <a:endParaRPr lang="en-US" sz="1400" dirty="0"/>
           </a:p>
         </p:txBody>
       </p:sp>
@@ -8450,4 +9056,319 @@
     </a:ext>
   </a:extLst>
 </a:theme>
+</file>
+
+<file path=ppt/theme/theme2.xml><?xml version="1.0" encoding="utf-8"?>
+<a:theme xmlns:a="http://schemas.openxmlformats.org/drawingml/2006/main" name="Office 主题​​">
+  <a:themeElements>
+    <a:clrScheme name="Office">
+      <a:dk1>
+        <a:sysClr val="windowText" lastClr="000000"/>
+      </a:dk1>
+      <a:lt1>
+        <a:sysClr val="window" lastClr="FFFFFF"/>
+      </a:lt1>
+      <a:dk2>
+        <a:srgbClr val="0E2841"/>
+      </a:dk2>
+      <a:lt2>
+        <a:srgbClr val="E8E8E8"/>
+      </a:lt2>
+      <a:accent1>
+        <a:srgbClr val="156082"/>
+      </a:accent1>
+      <a:accent2>
+        <a:srgbClr val="E97132"/>
+      </a:accent2>
+      <a:accent3>
+        <a:srgbClr val="196B24"/>
+      </a:accent3>
+      <a:accent4>
+        <a:srgbClr val="0F9ED5"/>
+      </a:accent4>
+      <a:accent5>
+        <a:srgbClr val="A02B93"/>
+      </a:accent5>
+      <a:accent6>
+        <a:srgbClr val="4EA72E"/>
+      </a:accent6>
+      <a:hlink>
+        <a:srgbClr val="467886"/>
+      </a:hlink>
+      <a:folHlink>
+        <a:srgbClr val="96607D"/>
+      </a:folHlink>
+    </a:clrScheme>
+    <a:fontScheme name="Office">
+      <a:majorFont>
+        <a:latin typeface="等线 Light" panose="02110004020202020204"/>
+        <a:ea typeface=""/>
+        <a:cs typeface=""/>
+        <a:font script="Jpan" typeface="游ゴシック Light"/>
+        <a:font script="Hang" typeface="맑은 고딕"/>
+        <a:font script="Hans" typeface="等线 Light"/>
+        <a:font script="Hant" typeface="新細明體"/>
+        <a:font script="Arab" typeface="Times New Roman"/>
+        <a:font script="Hebr" typeface="Times New Roman"/>
+        <a:font script="Thai" typeface="Angsana New"/>
+        <a:font script="Ethi" typeface="Nyala"/>
+        <a:font script="Beng" typeface="Vrinda"/>
+        <a:font script="Gujr" typeface="Shruti"/>
+        <a:font script="Khmr" typeface="MoolBoran"/>
+        <a:font script="Knda" typeface="Tunga"/>
+        <a:font script="Guru" typeface="Raavi"/>
+        <a:font script="Cans" typeface="Euphemia"/>
+        <a:font script="Cher" typeface="Plantagenet Cherokee"/>
+        <a:font script="Yiii" typeface="Microsoft Yi Baiti"/>
+        <a:font script="Tibt" typeface="Microsoft Himalaya"/>
+        <a:font script="Thaa" typeface="MV Boli"/>
+        <a:font script="Deva" typeface="Mangal"/>
+        <a:font script="Telu" typeface="Gautami"/>
+        <a:font script="Taml" typeface="Latha"/>
+        <a:font script="Syrc" typeface="Estrangelo Edessa"/>
+        <a:font script="Orya" typeface="Kalinga"/>
+        <a:font script="Mlym" typeface="Kartika"/>
+        <a:font script="Laoo" typeface="DokChampa"/>
+        <a:font script="Sinh" typeface="Iskoola Pota"/>
+        <a:font script="Mong" typeface="Mongolian Baiti"/>
+        <a:font script="Viet" typeface="Times New Roman"/>
+        <a:font script="Uigh" typeface="Microsoft Uighur"/>
+        <a:font script="Geor" typeface="Sylfaen"/>
+        <a:font script="Armn" typeface="Arial"/>
+        <a:font script="Bugi" typeface="Leelawadee UI"/>
+        <a:font script="Bopo" typeface="Microsoft JhengHei"/>
+        <a:font script="Java" typeface="Javanese Text"/>
+        <a:font script="Lisu" typeface="Segoe UI"/>
+        <a:font script="Mymr" typeface="Myanmar Text"/>
+        <a:font script="Nkoo" typeface="Ebrima"/>
+        <a:font script="Olck" typeface="Nirmala UI"/>
+        <a:font script="Osma" typeface="Ebrima"/>
+        <a:font script="Phag" typeface="Phagspa"/>
+        <a:font script="Syrn" typeface="Estrangelo Edessa"/>
+        <a:font script="Syrj" typeface="Estrangelo Edessa"/>
+        <a:font script="Syre" typeface="Estrangelo Edessa"/>
+        <a:font script="Sora" typeface="Nirmala UI"/>
+        <a:font script="Tale" typeface="Microsoft Tai Le"/>
+        <a:font script="Talu" typeface="Microsoft New Tai Lue"/>
+        <a:font script="Tfng" typeface="Ebrima"/>
+      </a:majorFont>
+      <a:minorFont>
+        <a:latin typeface="等线" panose="02110004020202020204"/>
+        <a:ea typeface=""/>
+        <a:cs typeface=""/>
+        <a:font script="Jpan" typeface="游ゴシック"/>
+        <a:font script="Hang" typeface="맑은 고딕"/>
+        <a:font script="Hans" typeface="等线"/>
+        <a:font script="Hant" typeface="新細明體"/>
+        <a:font script="Arab" typeface="Arial"/>
+        <a:font script="Hebr" typeface="Arial"/>
+        <a:font script="Thai" typeface="Cordia New"/>
+        <a:font script="Ethi" typeface="Nyala"/>
+        <a:font script="Beng" typeface="Vrinda"/>
+        <a:font script="Gujr" typeface="Shruti"/>
+        <a:font script="Khmr" typeface="DaunPenh"/>
+        <a:font script="Knda" typeface="Tunga"/>
+        <a:font script="Guru" typeface="Raavi"/>
+        <a:font script="Cans" typeface="Euphemia"/>
+        <a:font script="Cher" typeface="Plantagenet Cherokee"/>
+        <a:font script="Yiii" typeface="Microsoft Yi Baiti"/>
+        <a:font script="Tibt" typeface="Microsoft Himalaya"/>
+        <a:font script="Thaa" typeface="MV Boli"/>
+        <a:font script="Deva" typeface="Mangal"/>
+        <a:font script="Telu" typeface="Gautami"/>
+        <a:font script="Taml" typeface="Latha"/>
+        <a:font script="Syrc" typeface="Estrangelo Edessa"/>
+        <a:font script="Orya" typeface="Kalinga"/>
+        <a:font script="Mlym" typeface="Kartika"/>
+        <a:font script="Laoo" typeface="DokChampa"/>
+        <a:font script="Sinh" typeface="Iskoola Pota"/>
+        <a:font script="Mong" typeface="Mongolian Baiti"/>
+        <a:font script="Viet" typeface="Arial"/>
+        <a:font script="Uigh" typeface="Microsoft Uighur"/>
+        <a:font script="Geor" typeface="Sylfaen"/>
+        <a:font script="Armn" typeface="Arial"/>
+        <a:font script="Bugi" typeface="Leelawadee UI"/>
+        <a:font script="Bopo" typeface="Microsoft JhengHei"/>
+        <a:font script="Java" typeface="Javanese Text"/>
+        <a:font script="Lisu" typeface="Segoe UI"/>
+        <a:font script="Mymr" typeface="Myanmar Text"/>
+        <a:font script="Nkoo" typeface="Ebrima"/>
+        <a:font script="Olck" typeface="Nirmala UI"/>
+        <a:font script="Osma" typeface="Ebrima"/>
+        <a:font script="Phag" typeface="Phagspa"/>
+        <a:font script="Syrn" typeface="Estrangelo Edessa"/>
+        <a:font script="Syrj" typeface="Estrangelo Edessa"/>
+        <a:font script="Syre" typeface="Estrangelo Edessa"/>
+        <a:font script="Sora" typeface="Nirmala UI"/>
+        <a:font script="Tale" typeface="Microsoft Tai Le"/>
+        <a:font script="Talu" typeface="Microsoft New Tai Lue"/>
+        <a:font script="Tfng" typeface="Ebrima"/>
+      </a:minorFont>
+    </a:fontScheme>
+    <a:fmtScheme name="Office">
+      <a:fillStyleLst>
+        <a:solidFill>
+          <a:schemeClr val="phClr"/>
+        </a:solidFill>
+        <a:gradFill rotWithShape="1">
+          <a:gsLst>
+            <a:gs pos="0">
+              <a:schemeClr val="phClr">
+                <a:lumMod val="110000"/>
+                <a:satMod val="105000"/>
+                <a:tint val="67000"/>
+              </a:schemeClr>
+            </a:gs>
+            <a:gs pos="50000">
+              <a:schemeClr val="phClr">
+                <a:lumMod val="105000"/>
+                <a:satMod val="103000"/>
+                <a:tint val="73000"/>
+              </a:schemeClr>
+            </a:gs>
+            <a:gs pos="100000">
+              <a:schemeClr val="phClr">
+                <a:lumMod val="105000"/>
+                <a:satMod val="109000"/>
+                <a:tint val="81000"/>
+              </a:schemeClr>
+            </a:gs>
+          </a:gsLst>
+          <a:lin ang="5400000" scaled="0"/>
+        </a:gradFill>
+        <a:gradFill rotWithShape="1">
+          <a:gsLst>
+            <a:gs pos="0">
+              <a:schemeClr val="phClr">
+                <a:satMod val="103000"/>
+                <a:lumMod val="102000"/>
+                <a:tint val="94000"/>
+              </a:schemeClr>
+            </a:gs>
+            <a:gs pos="50000">
+              <a:schemeClr val="phClr">
+                <a:satMod val="110000"/>
+                <a:lumMod val="100000"/>
+                <a:shade val="100000"/>
+              </a:schemeClr>
+            </a:gs>
+            <a:gs pos="100000">
+              <a:schemeClr val="phClr">
+                <a:lumMod val="99000"/>
+                <a:satMod val="120000"/>
+                <a:shade val="78000"/>
+              </a:schemeClr>
+            </a:gs>
+          </a:gsLst>
+          <a:lin ang="5400000" scaled="0"/>
+        </a:gradFill>
+      </a:fillStyleLst>
+      <a:lnStyleLst>
+        <a:ln w="12700" cap="flat" cmpd="sng" algn="ctr">
+          <a:solidFill>
+            <a:schemeClr val="phClr"/>
+          </a:solidFill>
+          <a:prstDash val="solid"/>
+          <a:miter lim="800000"/>
+        </a:ln>
+        <a:ln w="19050" cap="flat" cmpd="sng" algn="ctr">
+          <a:solidFill>
+            <a:schemeClr val="phClr"/>
+          </a:solidFill>
+          <a:prstDash val="solid"/>
+          <a:miter lim="800000"/>
+        </a:ln>
+        <a:ln w="25400" cap="flat" cmpd="sng" algn="ctr">
+          <a:solidFill>
+            <a:schemeClr val="phClr"/>
+          </a:solidFill>
+          <a:prstDash val="solid"/>
+          <a:miter lim="800000"/>
+        </a:ln>
+      </a:lnStyleLst>
+      <a:effectStyleLst>
+        <a:effectStyle>
+          <a:effectLst/>
+        </a:effectStyle>
+        <a:effectStyle>
+          <a:effectLst/>
+        </a:effectStyle>
+        <a:effectStyle>
+          <a:effectLst>
+            <a:outerShdw blurRad="57150" dist="19050" dir="5400000" algn="ctr" rotWithShape="0">
+              <a:srgbClr val="000000">
+                <a:alpha val="63000"/>
+              </a:srgbClr>
+            </a:outerShdw>
+          </a:effectLst>
+        </a:effectStyle>
+      </a:effectStyleLst>
+      <a:bgFillStyleLst>
+        <a:solidFill>
+          <a:schemeClr val="phClr"/>
+        </a:solidFill>
+        <a:solidFill>
+          <a:schemeClr val="phClr">
+            <a:tint val="95000"/>
+            <a:satMod val="170000"/>
+          </a:schemeClr>
+        </a:solidFill>
+        <a:gradFill rotWithShape="1">
+          <a:gsLst>
+            <a:gs pos="0">
+              <a:schemeClr val="phClr">
+                <a:tint val="93000"/>
+                <a:satMod val="150000"/>
+                <a:shade val="98000"/>
+                <a:lumMod val="102000"/>
+              </a:schemeClr>
+            </a:gs>
+            <a:gs pos="50000">
+              <a:schemeClr val="phClr">
+                <a:tint val="98000"/>
+                <a:satMod val="130000"/>
+                <a:shade val="90000"/>
+                <a:lumMod val="103000"/>
+              </a:schemeClr>
+            </a:gs>
+            <a:gs pos="100000">
+              <a:schemeClr val="phClr">
+                <a:shade val="63000"/>
+                <a:satMod val="120000"/>
+              </a:schemeClr>
+            </a:gs>
+          </a:gsLst>
+          <a:lin ang="5400000" scaled="0"/>
+        </a:gradFill>
+      </a:bgFillStyleLst>
+    </a:fmtScheme>
+  </a:themeElements>
+  <a:objectDefaults>
+    <a:lnDef>
+      <a:spPr/>
+      <a:bodyPr/>
+      <a:lstStyle/>
+      <a:style>
+        <a:lnRef idx="2">
+          <a:schemeClr val="accent1"/>
+        </a:lnRef>
+        <a:fillRef idx="0">
+          <a:schemeClr val="accent1"/>
+        </a:fillRef>
+        <a:effectRef idx="1">
+          <a:schemeClr val="accent1"/>
+        </a:effectRef>
+        <a:fontRef idx="minor">
+          <a:schemeClr val="tx1"/>
+        </a:fontRef>
+      </a:style>
+    </a:lnDef>
+  </a:objectDefaults>
+  <a:extraClrSchemeLst/>
+  <a:extLst>
+    <a:ext uri="{05A4C25C-085E-4340-85A3-A5531E510DB2}">
+      <thm15:themeFamily xmlns:thm15="http://schemas.microsoft.com/office/thememl/2012/main" name="Office Theme" id="{2E142A2C-CD16-42D6-873A-C26D2A0506FA}" vid="{1BDDFF52-6CD6-40A5-AB3C-68EB2F1E4D0A}"/>
+    </a:ext>
+  </a:extLst>
+</a:theme>
 </file>